--- a/Konsultation_IBI_Deck.pptx
+++ b/Konsultation_IBI_Deck.pptx
@@ -3248,7 +3248,7 @@
             </a:pPr>
             <a:r>
               <a:rPr/>
-              <a:t>2026-06-12</a:t>
+              <a:t>2026-06-13</a:t>
             </a:r>
           </a:p>
         </p:txBody>
@@ -3295,7 +3295,7 @@
             </a:pPr>
             <a:r>
               <a:rPr/>
-              <a:t>Transfer in die Bibliothekswelt</a:t>
+              <a:t>Der BookCrossing-Datensatz</a:t>
             </a:r>
           </a:p>
         </p:txBody>
@@ -3318,14 +3318,14 @@
             <a:pPr lvl="0"/>
             <a:r>
               <a:rPr/>
-              <a:t>Welche KI-Versprechen hören Bibliotheken aktuell von Anbietern?</a:t>
+              <a:t>2004 von Cai-Nicolas Ziegler aus der BookCrossing-Community gecrawlt</a:t>
             </a:r>
           </a:p>
           <a:p>
             <a:pPr lvl="0"/>
             <a:r>
               <a:rPr/>
-              <a:t>KI-gestützte Erschließung, Chatbots, Discovery</a:t>
+              <a:t>Demos in diesem Deck nutzen ein Teilsample (~494.000 Bewertungen):</a:t>
             </a:r>
           </a:p>
         </p:txBody>
@@ -3493,36 +3493,6 @@
             <p:ph type="title"/>
           </p:nvPr>
         </p:nvSpPr>
-        <p:spPr>
-          <a:xfrm>
-            <a:off x="457201" y="204787"/>
-            <a:ext cx="3008313" cy="871538"/>
-          </a:xfrm>
-        </p:spPr>
-        <p:txBody>
-          <a:bodyPr/>
-          <a:lstStyle/>
-          <a:p>
-            <a:pPr lvl="0" indent="0" marL="0">
-              <a:buNone/>
-            </a:pPr>
-            <a:r>
-              <a:rPr/>
-              <a:t>Der Book-Crossing-Datensatz</a:t>
-            </a:r>
-          </a:p>
-        </p:txBody>
-      </p:sp>
-      <p:sp>
-        <p:nvSpPr>
-          <p:cNvPr id="4" name="Text Placeholder 3"/>
-          <p:cNvSpPr>
-            <a:spLocks noGrp="1"/>
-          </p:cNvSpPr>
-          <p:nvPr>
-            <p:ph idx="2" sz="half" type="body"/>
-          </p:nvPr>
-        </p:nvSpPr>
         <p:spPr/>
         <p:txBody>
           <a:bodyPr/>
@@ -3533,7 +3503,7 @@
             </a:pPr>
             <a:r>
               <a:rPr/>
-              <a:t>2004 von Cai-Nicolas Ziegler aus der BookCrossing-Community gecrawlt — die Demos in diesem Deck nutzen ein Teilsample (~494.000 Bewertungen):</a:t>
+              <a:t>Der BookCrossing-Datensatz</a:t>
             </a:r>
           </a:p>
         </p:txBody>
@@ -3549,8 +3519,8 @@
           </p:nvPr>
         </p:nvGraphicFramePr>
         <p:xfrm>
-          <a:off x="3568700" y="203200"/>
-          <a:ext cx="5105400" cy="4381500"/>
+          <a:off x="457200" y="1193800"/>
+          <a:ext cx="8229600" cy="3390900"/>
         </p:xfrm>
         <a:graphic>
           <a:graphicData uri="http://schemas.openxmlformats.org/drawingml/2006/table">
@@ -3559,9 +3529,9 @@
                 <a:tableStyleId>{5C22544A-7EE6-4342-B048-85BDC9FD1C3A}</a:tableStyleId>
               </a:tblPr>
               <a:tblGrid>
-                <a:gridCol w="1320800"/>
-                <a:gridCol w="2476500"/>
-                <a:gridCol w="1320800"/>
+                <a:gridCol w="2171700"/>
+                <a:gridCol w="3886200"/>
+                <a:gridCol w="2171700"/>
               </a:tblGrid>
               <a:tr h="0">
                 <a:tc>
@@ -3800,230 +3770,43 @@
             </a:pPr>
             <a:r>
               <a:rPr/>
-              <a:t>Übung: Was stimmt mit diesen Daten nicht? (15 Min)</a:t>
+              <a:t>CRISP-DM</a:t>
             </a:r>
           </a:p>
         </p:txBody>
       </p:sp>
-      <p:sp>
-        <p:nvSpPr>
-          <p:cNvPr id="3" name="Content Placeholder 2"/>
-          <p:cNvSpPr>
-            <a:spLocks noGrp="1"/>
-          </p:cNvSpPr>
-          <p:nvPr>
-            <p:ph idx="1"/>
-          </p:nvPr>
-        </p:nvSpPr>
-        <p:spPr/>
-        <p:txBody>
-          <a:bodyPr/>
-          <a:lstStyle/>
-          <a:p>
-            <a:pPr lvl="0"/>
-            <a:r>
-              <a:rPr/>
-              <a:t>Gruppe 1: BX-Users</a:t>
-            </a:r>
-          </a:p>
-          <a:p>
-            <a:pPr lvl="0"/>
-            <a:r>
-              <a:rPr/>
-              <a:t>Gruppe 2: BX-Books</a:t>
-            </a:r>
-          </a:p>
-          <a:p>
-            <a:pPr lvl="0"/>
-            <a:r>
-              <a:rPr/>
-              <a:t>Gruppe 3: BX-Book-Ratings</a:t>
-            </a:r>
-          </a:p>
-        </p:txBody>
-      </p:sp>
+      <p:pic>
+        <p:nvPicPr>
+          <p:cNvPr descr="images/CRISP-DM_Process_Diagram.png" id="0" name="Picture 1"/>
+          <p:cNvPicPr>
+            <a:picLocks noGrp="1" noChangeAspect="1"/>
+          </p:cNvPicPr>
+          <p:nvPr/>
+        </p:nvPicPr>
+        <p:blipFill>
+          <a:blip r:embed="rId2"/>
+          <a:stretch>
+            <a:fillRect/>
+          </a:stretch>
+        </p:blipFill>
+        <p:spPr bwMode="auto">
+          <a:xfrm>
+            <a:off x="2882900" y="1193800"/>
+            <a:ext cx="3378200" cy="3390900"/>
+          </a:xfrm>
+          <a:prstGeom prst="rect">
+            <a:avLst/>
+          </a:prstGeom>
+          <a:noFill/>
+          <a:ln w="9525">
+            <a:noFill/>
+            <a:headEnd/>
+            <a:tailEnd/>
+          </a:ln>
+        </p:spPr>
+      </p:pic>
     </p:spTree>
   </p:cSld>
-  <p:timing>
-    <p:tnLst>
-      <p:par>
-        <p:cTn id="1" dur="indefinite" restart="never" nodeType="tmRoot">
-          <p:childTnLst>
-            <p:seq concurrent="1" nextAc="seek">
-              <p:cTn id="2" dur="indefinite" nodeType="mainSeq">
-                <p:childTnLst>
-                  <p:par>
-                    <p:cTn id="3" fill="hold">
-                      <p:stCondLst>
-                        <p:cond delay="indefinite"/>
-                      </p:stCondLst>
-                      <p:childTnLst>
-                        <p:par>
-                          <p:cTn id="4" fill="hold">
-                            <p:stCondLst>
-                              <p:cond delay="0"/>
-                            </p:stCondLst>
-                            <p:childTnLst>
-                              <p:par>
-                                <p:cTn id="5" presetID="1" presetClass="entr" presetSubtype="0" fill="hold" grpId="0" nodeType="clickEffect">
-                                  <p:stCondLst>
-                                    <p:cond delay="0"/>
-                                  </p:stCondLst>
-                                  <p:childTnLst>
-                                    <p:set>
-                                      <p:cBhvr>
-                                        <p:cTn id="6" dur="1" fill="hold">
-                                          <p:stCondLst>
-                                            <p:cond delay="0"/>
-                                          </p:stCondLst>
-                                        </p:cTn>
-                                        <p:tgtEl>
-                                          <p:spTgt spid="3">
-                                            <p:txEl>
-                                              <p:pRg st="0" end="0"/>
-                                            </p:txEl>
-                                          </p:spTgt>
-                                        </p:tgtEl>
-                                        <p:attrNameLst>
-                                          <p:attrName>style.visibility</p:attrName>
-                                        </p:attrNameLst>
-                                      </p:cBhvr>
-                                      <p:to>
-                                        <p:strVal val="visible"/>
-                                      </p:to>
-                                    </p:set>
-                                  </p:childTnLst>
-                                </p:cTn>
-                              </p:par>
-                            </p:childTnLst>
-                          </p:cTn>
-                        </p:par>
-                      </p:childTnLst>
-                    </p:cTn>
-                  </p:par>
-                  <p:par>
-                    <p:cTn id="7" fill="hold">
-                      <p:stCondLst>
-                        <p:cond delay="indefinite"/>
-                      </p:stCondLst>
-                      <p:childTnLst>
-                        <p:par>
-                          <p:cTn id="8" fill="hold">
-                            <p:stCondLst>
-                              <p:cond delay="0"/>
-                            </p:stCondLst>
-                            <p:childTnLst>
-                              <p:par>
-                                <p:cTn id="9" presetID="1" presetClass="entr" presetSubtype="0" fill="hold" grpId="0" nodeType="clickEffect">
-                                  <p:stCondLst>
-                                    <p:cond delay="0"/>
-                                  </p:stCondLst>
-                                  <p:childTnLst>
-                                    <p:set>
-                                      <p:cBhvr>
-                                        <p:cTn id="10" dur="1" fill="hold">
-                                          <p:stCondLst>
-                                            <p:cond delay="0"/>
-                                          </p:stCondLst>
-                                        </p:cTn>
-                                        <p:tgtEl>
-                                          <p:spTgt spid="3">
-                                            <p:txEl>
-                                              <p:pRg st="1" end="1"/>
-                                            </p:txEl>
-                                          </p:spTgt>
-                                        </p:tgtEl>
-                                        <p:attrNameLst>
-                                          <p:attrName>style.visibility</p:attrName>
-                                        </p:attrNameLst>
-                                      </p:cBhvr>
-                                      <p:to>
-                                        <p:strVal val="visible"/>
-                                      </p:to>
-                                    </p:set>
-                                  </p:childTnLst>
-                                </p:cTn>
-                              </p:par>
-                            </p:childTnLst>
-                          </p:cTn>
-                        </p:par>
-                      </p:childTnLst>
-                    </p:cTn>
-                  </p:par>
-                  <p:par>
-                    <p:cTn id="11" fill="hold">
-                      <p:stCondLst>
-                        <p:cond delay="indefinite"/>
-                      </p:stCondLst>
-                      <p:childTnLst>
-                        <p:par>
-                          <p:cTn id="12" fill="hold">
-                            <p:stCondLst>
-                              <p:cond delay="0"/>
-                            </p:stCondLst>
-                            <p:childTnLst>
-                              <p:par>
-                                <p:cTn id="13" presetID="1" presetClass="entr" presetSubtype="0" fill="hold" grpId="0" nodeType="clickEffect">
-                                  <p:stCondLst>
-                                    <p:cond delay="0"/>
-                                  </p:stCondLst>
-                                  <p:childTnLst>
-                                    <p:set>
-                                      <p:cBhvr>
-                                        <p:cTn id="14" dur="1" fill="hold">
-                                          <p:stCondLst>
-                                            <p:cond delay="0"/>
-                                          </p:stCondLst>
-                                        </p:cTn>
-                                        <p:tgtEl>
-                                          <p:spTgt spid="3">
-                                            <p:txEl>
-                                              <p:pRg st="2" end="2"/>
-                                            </p:txEl>
-                                          </p:spTgt>
-                                        </p:tgtEl>
-                                        <p:attrNameLst>
-                                          <p:attrName>style.visibility</p:attrName>
-                                        </p:attrNameLst>
-                                      </p:cBhvr>
-                                      <p:to>
-                                        <p:strVal val="visible"/>
-                                      </p:to>
-                                    </p:set>
-                                  </p:childTnLst>
-                                </p:cTn>
-                              </p:par>
-                            </p:childTnLst>
-                          </p:cTn>
-                        </p:par>
-                      </p:childTnLst>
-                    </p:cTn>
-                  </p:par>
-                </p:childTnLst>
-              </p:cTn>
-              <p:prevCondLst>
-                <p:cond evt="onPrev" delay="0">
-                  <p:tgtEl>
-                    <p:sldTgt/>
-                  </p:tgtEl>
-                </p:cond>
-              </p:prevCondLst>
-              <p:nextCondLst>
-                <p:cond evt="onNext" delay="0">
-                  <p:tgtEl>
-                    <p:sldTgt/>
-                  </p:tgtEl>
-                </p:cond>
-              </p:nextCondLst>
-            </p:seq>
-          </p:childTnLst>
-        </p:cTn>
-      </p:par>
-    </p:tnLst>
-    <p:bldLst>
-      <p:bldP spid="3" grpId="0" uiExpand="1" build="p"/>
-    </p:bldLst>
-  </p:timing>
 </p:sld>
 </file>
 
@@ -4064,7 +3847,7 @@
             </a:pPr>
             <a:r>
               <a:rPr/>
-              <a:t>Auflösung: die üblichen Verdächtigen</a:t>
+              <a:t>Was stimmt mit diesen Daten nicht?</a:t>
             </a:r>
           </a:p>
         </p:txBody>
@@ -4091,7 +3874,7 @@
             </a:r>
             <a:r>
               <a:rPr/>
-              <a:t> 0 ist kein Verriss, sondern </a:t>
+              <a:t> 0 ist kein Bewertung, sondern </a:t>
             </a:r>
             <a:r>
               <a:rPr b="1"/>
@@ -4099,7 +3882,7 @@
             </a:r>
             <a:r>
               <a:rPr/>
-              <a:t> — über die Hälfte aller Einträge!</a:t>
+              <a:t>.</a:t>
             </a:r>
           </a:p>
           <a:p>
@@ -4121,7 +3904,7 @@
             </a:r>
             <a:r>
               <a:rPr/>
-              <a:t> mehrere ISBNs pro Werk (Auflagen!), Erscheinungsjahre 0 und 2050</a:t>
+              <a:t> mehrere ISBNs pro Werk (Auflagen), Erscheinungsjahre 0 und 2050</a:t>
             </a:r>
           </a:p>
           <a:p>
@@ -4468,7 +4251,7 @@
             </a:pPr>
             <a:r>
               <a:rPr/>
-              <a:t>Ein Diagramm entlarvt die Daten</a:t>
+              <a:t>Visualisierung als erster Schritt in der Datenanalyse</a:t>
             </a:r>
           </a:p>
         </p:txBody>
@@ -4527,6 +4310,31 @@
       </p:grpSpPr>
       <p:sp>
         <p:nvSpPr>
+          <p:cNvPr id="2" name="Title 1"/>
+          <p:cNvSpPr>
+            <a:spLocks noGrp="1"/>
+          </p:cNvSpPr>
+          <p:nvPr>
+            <p:ph type="title"/>
+          </p:nvPr>
+        </p:nvSpPr>
+        <p:spPr/>
+        <p:txBody>
+          <a:bodyPr/>
+          <a:lstStyle/>
+          <a:p>
+            <a:pPr lvl="0" indent="0" marL="0">
+              <a:buNone/>
+            </a:pPr>
+            <a:r>
+              <a:rPr/>
+              <a:t>Exkurs: Was heißt Sparsity?</a:t>
+            </a:r>
+          </a:p>
+        </p:txBody>
+      </p:sp>
+      <p:sp>
+        <p:nvSpPr>
           <p:cNvPr id="3" name="Content Placeholder 2"/>
           <p:cNvSpPr>
             <a:spLocks noGrp="1"/>
@@ -4543,7 +4351,40 @@
             <a:pPr lvl="0"/>
             <a:r>
               <a:rPr/>
-              <a:t>Altersangaben von 0 bis 244 — beim Alter wird gelogen (oder getippt)</a:t>
+              <a:t>Die Tabelle ist fast leer.</a:t>
+            </a:r>
+          </a:p>
+          <a:p>
+            <a:pPr lvl="0"/>
+            <a:r>
+              <a:rPr/>
+              <a:t>Beispiel: eine Tabelle mit einer Zeile pro Nutzer:in und einer Spalte pro Buch, in den Zellen die Bewertungen</a:t>
+            </a:r>
+          </a:p>
+          <a:p>
+            <a:pPr lvl="0"/>
+            <a:r>
+              <a:rPr/>
+              <a:t>278.000 × 271.000 ≈ </a:t>
+            </a:r>
+            <a:r>
+              <a:rPr b="1"/>
+              <a:t>75 Milliarden Zellen</a:t>
+            </a:r>
+            <a:r>
+              <a:rPr/>
+              <a:t> — gefüllt sind ~1 Mio., also </a:t>
+            </a:r>
+            <a:r>
+              <a:rPr b="1"/>
+              <a:t>0,002 %</a:t>
+            </a:r>
+          </a:p>
+          <a:p>
+            <a:pPr lvl="0"/>
+            <a:r>
+              <a:rPr/>
+              <a:t>Selbst die eifrigste Viel-Leserin füllt ihre Zeile zu weniger als 0,1 %</a:t>
             </a:r>
           </a:p>
         </p:txBody>
@@ -4587,6 +4428,153 @@
                                           <p:spTgt spid="3">
                                             <p:txEl>
                                               <p:pRg st="0" end="0"/>
+                                            </p:txEl>
+                                          </p:spTgt>
+                                        </p:tgtEl>
+                                        <p:attrNameLst>
+                                          <p:attrName>style.visibility</p:attrName>
+                                        </p:attrNameLst>
+                                      </p:cBhvr>
+                                      <p:to>
+                                        <p:strVal val="visible"/>
+                                      </p:to>
+                                    </p:set>
+                                  </p:childTnLst>
+                                </p:cTn>
+                              </p:par>
+                            </p:childTnLst>
+                          </p:cTn>
+                        </p:par>
+                      </p:childTnLst>
+                    </p:cTn>
+                  </p:par>
+                  <p:par>
+                    <p:cTn id="7" fill="hold">
+                      <p:stCondLst>
+                        <p:cond delay="indefinite"/>
+                      </p:stCondLst>
+                      <p:childTnLst>
+                        <p:par>
+                          <p:cTn id="8" fill="hold">
+                            <p:stCondLst>
+                              <p:cond delay="0"/>
+                            </p:stCondLst>
+                            <p:childTnLst>
+                              <p:par>
+                                <p:cTn id="9" presetID="1" presetClass="entr" presetSubtype="0" fill="hold" grpId="0" nodeType="clickEffect">
+                                  <p:stCondLst>
+                                    <p:cond delay="0"/>
+                                  </p:stCondLst>
+                                  <p:childTnLst>
+                                    <p:set>
+                                      <p:cBhvr>
+                                        <p:cTn id="10" dur="1" fill="hold">
+                                          <p:stCondLst>
+                                            <p:cond delay="0"/>
+                                          </p:stCondLst>
+                                        </p:cTn>
+                                        <p:tgtEl>
+                                          <p:spTgt spid="3">
+                                            <p:txEl>
+                                              <p:pRg st="1" end="1"/>
+                                            </p:txEl>
+                                          </p:spTgt>
+                                        </p:tgtEl>
+                                        <p:attrNameLst>
+                                          <p:attrName>style.visibility</p:attrName>
+                                        </p:attrNameLst>
+                                      </p:cBhvr>
+                                      <p:to>
+                                        <p:strVal val="visible"/>
+                                      </p:to>
+                                    </p:set>
+                                  </p:childTnLst>
+                                </p:cTn>
+                              </p:par>
+                            </p:childTnLst>
+                          </p:cTn>
+                        </p:par>
+                      </p:childTnLst>
+                    </p:cTn>
+                  </p:par>
+                  <p:par>
+                    <p:cTn id="11" fill="hold">
+                      <p:stCondLst>
+                        <p:cond delay="indefinite"/>
+                      </p:stCondLst>
+                      <p:childTnLst>
+                        <p:par>
+                          <p:cTn id="12" fill="hold">
+                            <p:stCondLst>
+                              <p:cond delay="0"/>
+                            </p:stCondLst>
+                            <p:childTnLst>
+                              <p:par>
+                                <p:cTn id="13" presetID="1" presetClass="entr" presetSubtype="0" fill="hold" grpId="0" nodeType="clickEffect">
+                                  <p:stCondLst>
+                                    <p:cond delay="0"/>
+                                  </p:stCondLst>
+                                  <p:childTnLst>
+                                    <p:set>
+                                      <p:cBhvr>
+                                        <p:cTn id="14" dur="1" fill="hold">
+                                          <p:stCondLst>
+                                            <p:cond delay="0"/>
+                                          </p:stCondLst>
+                                        </p:cTn>
+                                        <p:tgtEl>
+                                          <p:spTgt spid="3">
+                                            <p:txEl>
+                                              <p:pRg st="2" end="2"/>
+                                            </p:txEl>
+                                          </p:spTgt>
+                                        </p:tgtEl>
+                                        <p:attrNameLst>
+                                          <p:attrName>style.visibility</p:attrName>
+                                        </p:attrNameLst>
+                                      </p:cBhvr>
+                                      <p:to>
+                                        <p:strVal val="visible"/>
+                                      </p:to>
+                                    </p:set>
+                                  </p:childTnLst>
+                                </p:cTn>
+                              </p:par>
+                            </p:childTnLst>
+                          </p:cTn>
+                        </p:par>
+                      </p:childTnLst>
+                    </p:cTn>
+                  </p:par>
+                  <p:par>
+                    <p:cTn id="15" fill="hold">
+                      <p:stCondLst>
+                        <p:cond delay="indefinite"/>
+                      </p:stCondLst>
+                      <p:childTnLst>
+                        <p:par>
+                          <p:cTn id="16" fill="hold">
+                            <p:stCondLst>
+                              <p:cond delay="0"/>
+                            </p:stCondLst>
+                            <p:childTnLst>
+                              <p:par>
+                                <p:cTn id="17" presetID="1" presetClass="entr" presetSubtype="0" fill="hold" grpId="0" nodeType="clickEffect">
+                                  <p:stCondLst>
+                                    <p:cond delay="0"/>
+                                  </p:stCondLst>
+                                  <p:childTnLst>
+                                    <p:set>
+                                      <p:cBhvr>
+                                        <p:cTn id="18" dur="1" fill="hold">
+                                          <p:stCondLst>
+                                            <p:cond delay="0"/>
+                                          </p:stCondLst>
+                                        </p:cTn>
+                                        <p:tgtEl>
+                                          <p:spTgt spid="3">
+                                            <p:txEl>
+                                              <p:pRg st="3" end="3"/>
                                             </p:txEl>
                                           </p:spTgt>
                                         </p:tgtEl>
@@ -4672,7 +4660,7 @@
             </a:pPr>
             <a:r>
               <a:rPr/>
-              <a:t>Exkurs: Was heißt Sparsity?</a:t>
+              <a:t>Sparsity: die Folgen</a:t>
             </a:r>
           </a:p>
         </p:txBody>
@@ -4695,33 +4683,29 @@
             <a:pPr lvl="0"/>
             <a:r>
               <a:rPr/>
-              <a:t>Denkbild: eine Tabelle mit einer Zeile pro Nutzer:in und einer Spalte pro Buch, in den Zellen die Bewertungen</a:t>
+              <a:t>Selbst populäre Buchpaare tauchen nur in einem Promille der Körbe auf — Schwellenwerte müssen winzig sein</a:t>
             </a:r>
           </a:p>
           <a:p>
             <a:pPr lvl="0"/>
             <a:r>
               <a:rPr/>
-              <a:t>278.000 × 271.000 ≈ </a:t>
+              <a:t>Zwei beliebige Nutzer:innen haben oft </a:t>
             </a:r>
             <a:r>
               <a:rPr b="1"/>
-              <a:t>75 Milliarden Zellen</a:t>
-            </a:r>
-            <a:r>
-              <a:rPr/>
-              <a:t> — gefüllt sind ~1 Mio., also </a:t>
-            </a:r>
-            <a:r>
-              <a:rPr b="1"/>
-              <a:t>0,002 %</a:t>
+              <a:t>kein einziges</a:t>
+            </a:r>
+            <a:r>
+              <a:rPr/>
+              <a:t> gemeinsames Buch — Ähnlichkeit lässt sich gar nicht berechnen</a:t>
             </a:r>
           </a:p>
           <a:p>
             <a:pPr lvl="0"/>
             <a:r>
               <a:rPr/>
-              <a:t>Selbst die eifrigste Viel-Leserin füllt ihre Zeile zu weniger als 0,1 %</a:t>
+              <a:t>Muster entstehen erst, weil sich Millionen fast leerer Zeilen überlagern</a:t>
             </a:r>
           </a:p>
         </p:txBody>
@@ -4948,7 +4932,7 @@
             </a:pPr>
             <a:r>
               <a:rPr/>
-              <a:t>Sparsity: die Folgen</a:t>
+              <a:t>FRBR und Sparsity</a:t>
             </a:r>
           </a:p>
         </p:txBody>
@@ -4971,307 +4955,36 @@
             <a:pPr lvl="0"/>
             <a:r>
               <a:rPr/>
-              <a:t>Selbst populäre Buchpaare tauchen nur in einem Promille der Körbe auf — Schwellenwerte müssen winzig sein</a:t>
+              <a:t>Sparsity entsteht, weil Nutzer:innen zu wenige Bücher bewertet haben.</a:t>
             </a:r>
           </a:p>
           <a:p>
             <a:pPr lvl="0"/>
             <a:r>
               <a:rPr/>
-              <a:t>Zwei beliebige Nutzer:innen haben oft </a:t>
+              <a:t>FRBR: dasselbe Werk taucht unter vielen ISBNs auf: Sparsity wird verschärft, weil wenige Bewertungen für ein Werk auf mehrere ISBNs verteilt werden</a:t>
+            </a:r>
+          </a:p>
+          <a:p>
+            <a:pPr lvl="0"/>
+            <a:r>
+              <a:rPr/>
+              <a:t>BookCrossing kennt </a:t>
             </a:r>
             <a:r>
               <a:rPr b="1"/>
-              <a:t>kein einziges</a:t>
-            </a:r>
-            <a:r>
-              <a:rPr/>
-              <a:t> gemeinsames Buch — Ähnlichkeit lässt sich gar nicht berechnen</a:t>
+              <a:t>nur ISBNs = Manifestationen</a:t>
+            </a:r>
+            <a:r>
+              <a:rPr/>
+              <a:t> — das Werk müssen wir per Data Mining rekonstruieren</a:t>
             </a:r>
           </a:p>
           <a:p>
             <a:pPr lvl="0"/>
             <a:r>
               <a:rPr/>
-              <a:t>Muster entstehen erst, weil sich Millionen fast leerer Zeilen überlagern</a:t>
-            </a:r>
-          </a:p>
-        </p:txBody>
-      </p:sp>
-    </p:spTree>
-  </p:cSld>
-  <p:timing>
-    <p:tnLst>
-      <p:par>
-        <p:cTn id="1" dur="indefinite" restart="never" nodeType="tmRoot">
-          <p:childTnLst>
-            <p:seq concurrent="1" nextAc="seek">
-              <p:cTn id="2" dur="indefinite" nodeType="mainSeq">
-                <p:childTnLst>
-                  <p:par>
-                    <p:cTn id="3" fill="hold">
-                      <p:stCondLst>
-                        <p:cond delay="indefinite"/>
-                      </p:stCondLst>
-                      <p:childTnLst>
-                        <p:par>
-                          <p:cTn id="4" fill="hold">
-                            <p:stCondLst>
-                              <p:cond delay="0"/>
-                            </p:stCondLst>
-                            <p:childTnLst>
-                              <p:par>
-                                <p:cTn id="5" presetID="1" presetClass="entr" presetSubtype="0" fill="hold" grpId="0" nodeType="clickEffect">
-                                  <p:stCondLst>
-                                    <p:cond delay="0"/>
-                                  </p:stCondLst>
-                                  <p:childTnLst>
-                                    <p:set>
-                                      <p:cBhvr>
-                                        <p:cTn id="6" dur="1" fill="hold">
-                                          <p:stCondLst>
-                                            <p:cond delay="0"/>
-                                          </p:stCondLst>
-                                        </p:cTn>
-                                        <p:tgtEl>
-                                          <p:spTgt spid="3">
-                                            <p:txEl>
-                                              <p:pRg st="0" end="0"/>
-                                            </p:txEl>
-                                          </p:spTgt>
-                                        </p:tgtEl>
-                                        <p:attrNameLst>
-                                          <p:attrName>style.visibility</p:attrName>
-                                        </p:attrNameLst>
-                                      </p:cBhvr>
-                                      <p:to>
-                                        <p:strVal val="visible"/>
-                                      </p:to>
-                                    </p:set>
-                                  </p:childTnLst>
-                                </p:cTn>
-                              </p:par>
-                            </p:childTnLst>
-                          </p:cTn>
-                        </p:par>
-                      </p:childTnLst>
-                    </p:cTn>
-                  </p:par>
-                  <p:par>
-                    <p:cTn id="7" fill="hold">
-                      <p:stCondLst>
-                        <p:cond delay="indefinite"/>
-                      </p:stCondLst>
-                      <p:childTnLst>
-                        <p:par>
-                          <p:cTn id="8" fill="hold">
-                            <p:stCondLst>
-                              <p:cond delay="0"/>
-                            </p:stCondLst>
-                            <p:childTnLst>
-                              <p:par>
-                                <p:cTn id="9" presetID="1" presetClass="entr" presetSubtype="0" fill="hold" grpId="0" nodeType="clickEffect">
-                                  <p:stCondLst>
-                                    <p:cond delay="0"/>
-                                  </p:stCondLst>
-                                  <p:childTnLst>
-                                    <p:set>
-                                      <p:cBhvr>
-                                        <p:cTn id="10" dur="1" fill="hold">
-                                          <p:stCondLst>
-                                            <p:cond delay="0"/>
-                                          </p:stCondLst>
-                                        </p:cTn>
-                                        <p:tgtEl>
-                                          <p:spTgt spid="3">
-                                            <p:txEl>
-                                              <p:pRg st="1" end="1"/>
-                                            </p:txEl>
-                                          </p:spTgt>
-                                        </p:tgtEl>
-                                        <p:attrNameLst>
-                                          <p:attrName>style.visibility</p:attrName>
-                                        </p:attrNameLst>
-                                      </p:cBhvr>
-                                      <p:to>
-                                        <p:strVal val="visible"/>
-                                      </p:to>
-                                    </p:set>
-                                  </p:childTnLst>
-                                </p:cTn>
-                              </p:par>
-                            </p:childTnLst>
-                          </p:cTn>
-                        </p:par>
-                      </p:childTnLst>
-                    </p:cTn>
-                  </p:par>
-                  <p:par>
-                    <p:cTn id="11" fill="hold">
-                      <p:stCondLst>
-                        <p:cond delay="indefinite"/>
-                      </p:stCondLst>
-                      <p:childTnLst>
-                        <p:par>
-                          <p:cTn id="12" fill="hold">
-                            <p:stCondLst>
-                              <p:cond delay="0"/>
-                            </p:stCondLst>
-                            <p:childTnLst>
-                              <p:par>
-                                <p:cTn id="13" presetID="1" presetClass="entr" presetSubtype="0" fill="hold" grpId="0" nodeType="clickEffect">
-                                  <p:stCondLst>
-                                    <p:cond delay="0"/>
-                                  </p:stCondLst>
-                                  <p:childTnLst>
-                                    <p:set>
-                                      <p:cBhvr>
-                                        <p:cTn id="14" dur="1" fill="hold">
-                                          <p:stCondLst>
-                                            <p:cond delay="0"/>
-                                          </p:stCondLst>
-                                        </p:cTn>
-                                        <p:tgtEl>
-                                          <p:spTgt spid="3">
-                                            <p:txEl>
-                                              <p:pRg st="2" end="2"/>
-                                            </p:txEl>
-                                          </p:spTgt>
-                                        </p:tgtEl>
-                                        <p:attrNameLst>
-                                          <p:attrName>style.visibility</p:attrName>
-                                        </p:attrNameLst>
-                                      </p:cBhvr>
-                                      <p:to>
-                                        <p:strVal val="visible"/>
-                                      </p:to>
-                                    </p:set>
-                                  </p:childTnLst>
-                                </p:cTn>
-                              </p:par>
-                            </p:childTnLst>
-                          </p:cTn>
-                        </p:par>
-                      </p:childTnLst>
-                    </p:cTn>
-                  </p:par>
-                </p:childTnLst>
-              </p:cTn>
-              <p:prevCondLst>
-                <p:cond evt="onPrev" delay="0">
-                  <p:tgtEl>
-                    <p:sldTgt/>
-                  </p:tgtEl>
-                </p:cond>
-              </p:prevCondLst>
-              <p:nextCondLst>
-                <p:cond evt="onNext" delay="0">
-                  <p:tgtEl>
-                    <p:sldTgt/>
-                  </p:tgtEl>
-                </p:cond>
-              </p:nextCondLst>
-            </p:seq>
-          </p:childTnLst>
-        </p:cTn>
-      </p:par>
-    </p:tnLst>
-    <p:bldLst>
-      <p:bldP spid="3" grpId="0" uiExpand="1" build="p"/>
-    </p:bldLst>
-  </p:timing>
-</p:sld>
-</file>
-
-<file path=ppt/slides/slide18.xml><?xml version="1.0" encoding="utf-8"?>
-<p:sld xmlns:a="http://schemas.openxmlformats.org/drawingml/2006/main" xmlns:r="http://schemas.openxmlformats.org/officeDocument/2006/relationships" xmlns:p="http://schemas.openxmlformats.org/presentationml/2006/main">
-  <p:cSld>
-    <p:spTree>
-      <p:nvGrpSpPr>
-        <p:cNvPr id="1" name=""/>
-        <p:cNvGrpSpPr/>
-        <p:nvPr/>
-      </p:nvGrpSpPr>
-      <p:grpSpPr>
-        <a:xfrm>
-          <a:off x="0" y="0"/>
-          <a:ext cx="0" cy="0"/>
-          <a:chOff x="0" y="0"/>
-          <a:chExt cx="0" cy="0"/>
-        </a:xfrm>
-      </p:grpSpPr>
-      <p:sp>
-        <p:nvSpPr>
-          <p:cNvPr id="2" name="Title 1"/>
-          <p:cNvSpPr>
-            <a:spLocks noGrp="1"/>
-          </p:cNvSpPr>
-          <p:nvPr>
-            <p:ph type="title"/>
-          </p:nvPr>
-        </p:nvSpPr>
-        <p:spPr/>
-        <p:txBody>
-          <a:bodyPr/>
-          <a:lstStyle/>
-          <a:p>
-            <a:pPr lvl="0" indent="0" marL="0">
-              <a:buNone/>
-            </a:pPr>
-            <a:r>
-              <a:rPr/>
-              <a:t>Kommt Ihnen das bekannt vor?</a:t>
-            </a:r>
-          </a:p>
-        </p:txBody>
-      </p:sp>
-      <p:sp>
-        <p:nvSpPr>
-          <p:cNvPr id="3" name="Content Placeholder 2"/>
-          <p:cNvSpPr>
-            <a:spLocks noGrp="1"/>
-          </p:cNvSpPr>
-          <p:nvPr>
-            <p:ph idx="1"/>
-          </p:nvPr>
-        </p:nvSpPr>
-        <p:spPr/>
-        <p:txBody>
-          <a:bodyPr/>
-          <a:lstStyle/>
-          <a:p>
-            <a:pPr lvl="0"/>
-            <a:r>
-              <a:rPr/>
-              <a:t>Werk vs. Manifestation → FRBR</a:t>
-            </a:r>
-          </a:p>
-          <a:p>
-            <a:pPr lvl="0"/>
-            <a:r>
-              <a:rPr/>
-              <a:t>Uneinheitliche Namen → Normdaten</a:t>
-            </a:r>
-          </a:p>
-          <a:p>
-            <a:pPr lvl="0"/>
-            <a:r>
-              <a:rPr/>
-              <a:t>Mehrfache ISBNs → Dublettenkontrolle</a:t>
-            </a:r>
-          </a:p>
-          <a:p>
-            <a:pPr lvl="0"/>
-            <a:r>
-              <a:rPr b="1"/>
-              <a:t>Bibliothekar:innen haben hier Fachkompetenz, die Data-Science-Teams fehlt</a:t>
-            </a:r>
-          </a:p>
-          <a:p>
-            <a:pPr lvl="0"/>
-            <a:r>
-              <a:rPr/>
-              <a:t>→ Rolle: Subject Matter Expert</a:t>
+              <a:t>Genau das macht Record Linkage (später)</a:t>
             </a:r>
           </a:p>
         </p:txBody>
@@ -5482,55 +5195,6 @@
                       </p:childTnLst>
                     </p:cTn>
                   </p:par>
-                  <p:par>
-                    <p:cTn id="19" fill="hold">
-                      <p:stCondLst>
-                        <p:cond delay="indefinite"/>
-                      </p:stCondLst>
-                      <p:childTnLst>
-                        <p:par>
-                          <p:cTn id="20" fill="hold">
-                            <p:stCondLst>
-                              <p:cond delay="0"/>
-                            </p:stCondLst>
-                            <p:childTnLst>
-                              <p:par>
-                                <p:cTn id="21" presetID="1" presetClass="entr" presetSubtype="0" fill="hold" grpId="0" nodeType="clickEffect">
-                                  <p:stCondLst>
-                                    <p:cond delay="0"/>
-                                  </p:stCondLst>
-                                  <p:childTnLst>
-                                    <p:set>
-                                      <p:cBhvr>
-                                        <p:cTn id="22" dur="1" fill="hold">
-                                          <p:stCondLst>
-                                            <p:cond delay="0"/>
-                                          </p:stCondLst>
-                                        </p:cTn>
-                                        <p:tgtEl>
-                                          <p:spTgt spid="3">
-                                            <p:txEl>
-                                              <p:pRg st="4" end="4"/>
-                                            </p:txEl>
-                                          </p:spTgt>
-                                        </p:tgtEl>
-                                        <p:attrNameLst>
-                                          <p:attrName>style.visibility</p:attrName>
-                                        </p:attrNameLst>
-                                      </p:cBhvr>
-                                      <p:to>
-                                        <p:strVal val="visible"/>
-                                      </p:to>
-                                    </p:set>
-                                  </p:childTnLst>
-                                </p:cTn>
-                              </p:par>
-                            </p:childTnLst>
-                          </p:cTn>
-                        </p:par>
-                      </p:childTnLst>
-                    </p:cTn>
-                  </p:par>
                 </p:childTnLst>
               </p:cTn>
               <p:prevCondLst>
@@ -5556,6 +5220,58 @@
       <p:bldP spid="3" grpId="0" uiExpand="1" build="p"/>
     </p:bldLst>
   </p:timing>
+</p:sld>
+</file>
+
+<file path=ppt/slides/slide18.xml><?xml version="1.0" encoding="utf-8"?>
+<p:sld xmlns:a="http://schemas.openxmlformats.org/drawingml/2006/main" xmlns:r="http://schemas.openxmlformats.org/officeDocument/2006/relationships" xmlns:p="http://schemas.openxmlformats.org/presentationml/2006/main">
+  <p:cSld>
+    <p:spTree>
+      <p:nvGrpSpPr>
+        <p:cNvPr id="1" name=""/>
+        <p:cNvGrpSpPr/>
+        <p:nvPr/>
+      </p:nvGrpSpPr>
+      <p:grpSpPr>
+        <a:xfrm>
+          <a:off x="0" y="0"/>
+          <a:ext cx="0" cy="0"/>
+          <a:chOff x="0" y="0"/>
+          <a:chExt cx="0" cy="0"/>
+        </a:xfrm>
+      </p:grpSpPr>
+      <p:sp>
+        <p:nvSpPr>
+          <p:cNvPr id="2" name="Title 1"/>
+          <p:cNvSpPr>
+            <a:spLocks noGrp="1"/>
+          </p:cNvSpPr>
+          <p:nvPr>
+            <p:ph type="title"/>
+          </p:nvPr>
+        </p:nvSpPr>
+        <p:spPr>
+          <a:xfrm>
+            <a:off x="722313" y="3305176"/>
+            <a:ext cx="7772400" cy="1021556"/>
+          </a:xfrm>
+        </p:spPr>
+        <p:txBody>
+          <a:bodyPr/>
+          <a:lstStyle/>
+          <a:p>
+            <a:pPr lvl="0" indent="0" marL="0">
+              <a:buNone/>
+            </a:pPr>
+            <a:r>
+              <a:rPr/>
+              <a:t>Data Mining-Ansätze für den BookCrossing-Datensatz</a:t>
+            </a:r>
+          </a:p>
+        </p:txBody>
+      </p:sp>
+    </p:spTree>
+  </p:cSld>
 </p:sld>
 </file>
 
@@ -5596,7 +5312,7 @@
             </a:pPr>
             <a:r>
               <a:rPr/>
-              <a:t>Zur Erinnerung: FRBR (Sie kennen das besser als ich)</a:t>
+              <a:t>Software</a:t>
             </a:r>
           </a:p>
         </p:txBody>
@@ -5619,48 +5335,28 @@
             <a:pPr lvl="0"/>
             <a:r>
               <a:rPr/>
-              <a:t>IFLA-Referenzmodell (1998, heute Teil des IFLA LRM): </a:t>
-            </a:r>
-            <a:r>
-              <a:rPr b="1"/>
-              <a:t>Werk → Expression → Manifestation → Exemplar</a:t>
+              <a:t>R: Programmiersprache und -umgebung von Statistikern für Statistiker, Open Source</a:t>
             </a:r>
           </a:p>
           <a:p>
             <a:pPr lvl="0"/>
             <a:r>
               <a:rPr/>
-              <a:t>Am Beispiel: </a:t>
-            </a:r>
-            <a:r>
-              <a:rPr i="1"/>
-              <a:t>The Green Mile</a:t>
-            </a:r>
-            <a:r>
-              <a:rPr/>
-              <a:t> (Werk) → deutsche Übersetzung (Expression) → Signet-Taschenbuch mit eigener ISBN (Manifestation) → das Buch im Regal (Exemplar)</a:t>
+              <a:t>RStudio: Integrierte Entwicklungsumgebung, kostenlos für viele Zwecke</a:t>
             </a:r>
           </a:p>
           <a:p>
             <a:pPr lvl="0"/>
             <a:r>
               <a:rPr/>
-              <a:t>Book-Crossing kennt </a:t>
-            </a:r>
-            <a:r>
-              <a:rPr b="1"/>
-              <a:t>nur ISBNs = Manifestationen</a:t>
-            </a:r>
-            <a:r>
-              <a:rPr/>
-              <a:t> — das Werk müssen wir per Data Mining rekonstruieren</a:t>
+              <a:t>Notebook im GitHub, kann mit der Software genutzt werden</a:t>
             </a:r>
           </a:p>
           <a:p>
             <a:pPr lvl="0"/>
             <a:r>
               <a:rPr/>
-              <a:t>Genau das macht gleich das Record Linkage</a:t>
+              <a:t>Was ist ein Notebook?</a:t>
             </a:r>
           </a:p>
         </p:txBody>
@@ -5941,7 +5637,7 @@
             </a:pPr>
             <a:r>
               <a:rPr/>
-              <a:t>Block 1: Konzepte klären</a:t>
+              <a:t>Konzepte klären</a:t>
             </a:r>
           </a:p>
         </p:txBody>
@@ -6924,7 +6620,7 @@
             </a:pPr>
             <a:r>
               <a:rPr/>
-              <a:t>Vom Supermarkt zu Book-Crossing</a:t>
+              <a:t>Vom Supermarkt zu BookCrossing</a:t>
             </a:r>
           </a:p>
         </p:txBody>
@@ -9122,14 +8818,14 @@
             <a:pPr lvl="0"/>
             <a:r>
               <a:rPr/>
-              <a:t>Die Begriffe sauber sortieren: KI, ML, Data Science, Data Mining</a:t>
+              <a:t>Die Begriffe sauber sortieren: KI, ML, LLMs, Data Science, Data Mining</a:t>
             </a:r>
           </a:p>
           <a:p>
             <a:pPr lvl="0"/>
             <a:r>
               <a:rPr/>
-              <a:t>Book-Crossing: vom rohen Datensatz zur Buchempfehlung</a:t>
+              <a:t>Data Mining mit dem BookCrossing-Datensatz</a:t>
             </a:r>
           </a:p>
         </p:txBody>
@@ -12190,7 +11886,7 @@
             <a:pPr lvl="0"/>
             <a:r>
               <a:rPr/>
-              <a:t>Alle folgenden Verfahren laufen auf demselben Book-Crossing-Datensatz</a:t>
+              <a:t>Alle folgenden Verfahren laufen auf demselben BookCrossing-Datensatz</a:t>
             </a:r>
           </a:p>
         </p:txBody>
@@ -12604,7 +12300,7 @@
                       </a:pPr>
                       <a:r>
                         <a:rPr/>
-                        <a:t>Begriffe, KI-Geschichte, CRISP-DM</a:t>
+                        <a:t>Begriffe &amp; Konzepte</a:t>
                       </a:r>
                     </a:p>
                   </a:txBody>
@@ -12662,7 +12358,7 @@
                       </a:pPr>
                       <a:r>
                         <a:rPr/>
-                        <a:t>Book-Crossing: Datenqualität &amp; Apriori</a:t>
+                        <a:t>Hands-on Data Mining</a:t>
                       </a:r>
                     </a:p>
                   </a:txBody>
@@ -15406,7 +15102,7 @@
             </a:pPr>
             <a:r>
               <a:rPr/>
-              <a:t>Clustering: Welche Lesertypen stecken in Book-Crossing?</a:t>
+              <a:t>Clustering: Welche Lesertypen stecken in BookCrossing?</a:t>
             </a:r>
           </a:p>
         </p:txBody>
@@ -15977,6 +15673,13 @@
               <a:t>tom@alby.de</a:t>
             </a:r>
           </a:p>
+          <a:p>
+            <a:pPr lvl="0"/>
+            <a:r>
+              <a:rPr/>
+              <a:t>Material auf GitHub (Link im Moodle)</a:t>
+            </a:r>
+          </a:p>
         </p:txBody>
       </p:sp>
     </p:spTree>
@@ -16067,6 +15770,55 @@
                                           <p:spTgt spid="3">
                                             <p:txEl>
                                               <p:pRg st="1" end="1"/>
+                                            </p:txEl>
+                                          </p:spTgt>
+                                        </p:tgtEl>
+                                        <p:attrNameLst>
+                                          <p:attrName>style.visibility</p:attrName>
+                                        </p:attrNameLst>
+                                      </p:cBhvr>
+                                      <p:to>
+                                        <p:strVal val="visible"/>
+                                      </p:to>
+                                    </p:set>
+                                  </p:childTnLst>
+                                </p:cTn>
+                              </p:par>
+                            </p:childTnLst>
+                          </p:cTn>
+                        </p:par>
+                      </p:childTnLst>
+                    </p:cTn>
+                  </p:par>
+                  <p:par>
+                    <p:cTn id="11" fill="hold">
+                      <p:stCondLst>
+                        <p:cond delay="indefinite"/>
+                      </p:stCondLst>
+                      <p:childTnLst>
+                        <p:par>
+                          <p:cTn id="12" fill="hold">
+                            <p:stCondLst>
+                              <p:cond delay="0"/>
+                            </p:stCondLst>
+                            <p:childTnLst>
+                              <p:par>
+                                <p:cTn id="13" presetID="1" presetClass="entr" presetSubtype="0" fill="hold" grpId="0" nodeType="clickEffect">
+                                  <p:stCondLst>
+                                    <p:cond delay="0"/>
+                                  </p:stCondLst>
+                                  <p:childTnLst>
+                                    <p:set>
+                                      <p:cBhvr>
+                                        <p:cTn id="14" dur="1" fill="hold">
+                                          <p:stCondLst>
+                                            <p:cond delay="0"/>
+                                          </p:stCondLst>
+                                        </p:cTn>
+                                        <p:tgtEl>
+                                          <p:spTgt spid="3">
+                                            <p:txEl>
+                                              <p:pRg st="2" end="2"/>
                                             </p:txEl>
                                           </p:spTgt>
                                         </p:tgtEl>
@@ -16468,7 +16220,7 @@
             <a:pPr lvl="0"/>
             <a:r>
               <a:rPr/>
-              <a:t>Unsere Frage an Book-Crossing: </a:t>
+              <a:t>Unsere Frage an BookCrossing: </a:t>
             </a:r>
             <a:r>
               <a:rPr b="1"/>
@@ -21222,55 +20974,66 @@
             <a:pPr lvl="0"/>
             <a:r>
               <a:rPr b="1"/>
-              <a:t>KI</a:t>
-            </a:r>
-            <a:r>
-              <a:rPr/>
-              <a:t>: Oberbegriff — Maschinen tun Dinge, die Intelligenz erfordern</a:t>
+              <a:t>KI:</a:t>
+            </a:r>
+            <a:r>
+              <a:rPr/>
+              <a:t> Oberbegriff — Maschinen verhalten sich intelligent.</a:t>
             </a:r>
           </a:p>
           <a:p>
             <a:pPr lvl="0"/>
             <a:r>
               <a:rPr b="1"/>
-              <a:t>Machine Learning</a:t>
-            </a:r>
-            <a:r>
-              <a:rPr/>
-              <a:t>: Teilmenge der KI — Lernen aus Daten statt fester Regeln</a:t>
+              <a:t>Machine Learning:</a:t>
+            </a:r>
+            <a:r>
+              <a:rPr/>
+              <a:t> Teilmenge der KI — Systeme lernen selbstständig aus Daten.</a:t>
             </a:r>
           </a:p>
           <a:p>
             <a:pPr lvl="0"/>
             <a:r>
               <a:rPr b="1"/>
-              <a:t>Data Mining</a:t>
-            </a:r>
-            <a:r>
-              <a:rPr/>
-              <a:t>: Mustersuche in (strukturierten) Daten — der Prozess</a:t>
+              <a:t>LLMs:</a:t>
+            </a:r>
+            <a:r>
+              <a:rPr/>
+              <a:t> Spezialform von ML — Modelle, die menschliche Sprache verstehen und generieren.</a:t>
             </a:r>
           </a:p>
           <a:p>
             <a:pPr lvl="0"/>
             <a:r>
               <a:rPr b="1"/>
-              <a:t>Text Mining</a:t>
-            </a:r>
-            <a:r>
-              <a:rPr/>
-              <a:t>: dasselbe für unstrukturierte Texte</a:t>
+              <a:t>Data Mining:</a:t>
+            </a:r>
+            <a:r>
+              <a:rPr/>
+              <a:t> Mustererkennung in strukturierten Daten.</a:t>
             </a:r>
           </a:p>
           <a:p>
             <a:pPr lvl="0"/>
             <a:r>
               <a:rPr b="1"/>
-              <a:t>Data Science</a:t>
-            </a:r>
-            <a:r>
-              <a:rPr/>
-              <a:t>: die Disziplin drumherum — inkl. Business Understanding, Kommunikation, Deployment</a:t>
+              <a:t>Text Mining:</a:t>
+            </a:r>
+            <a:r>
+              <a:rPr/>
+              <a:t> Mustererkennung in unstrukturierten Texten (heute oft durch LLMs gelöst).</a:t>
+            </a:r>
+          </a:p>
+          <a:p>
+            <a:pPr lvl="0"/>
+            <a:r>
+              <a:rPr b="1"/>
+              <a:t>Data Science:</a:t>
+            </a:r>
+            <a:r>
+              <a:rPr/>
+              <a:t> Die Disziplin drumherum — von der Analyse bis zum Business-Einsatz.</a:t>
             </a:r>
           </a:p>
         </p:txBody>
@@ -21510,6 +21273,55 @@
                                           <p:spTgt spid="3">
                                             <p:txEl>
                                               <p:pRg st="4" end="4"/>
+                                            </p:txEl>
+                                          </p:spTgt>
+                                        </p:tgtEl>
+                                        <p:attrNameLst>
+                                          <p:attrName>style.visibility</p:attrName>
+                                        </p:attrNameLst>
+                                      </p:cBhvr>
+                                      <p:to>
+                                        <p:strVal val="visible"/>
+                                      </p:to>
+                                    </p:set>
+                                  </p:childTnLst>
+                                </p:cTn>
+                              </p:par>
+                            </p:childTnLst>
+                          </p:cTn>
+                        </p:par>
+                      </p:childTnLst>
+                    </p:cTn>
+                  </p:par>
+                  <p:par>
+                    <p:cTn id="23" fill="hold">
+                      <p:stCondLst>
+                        <p:cond delay="indefinite"/>
+                      </p:stCondLst>
+                      <p:childTnLst>
+                        <p:par>
+                          <p:cTn id="24" fill="hold">
+                            <p:stCondLst>
+                              <p:cond delay="0"/>
+                            </p:stCondLst>
+                            <p:childTnLst>
+                              <p:par>
+                                <p:cTn id="25" presetID="1" presetClass="entr" presetSubtype="0" fill="hold" grpId="0" nodeType="clickEffect">
+                                  <p:stCondLst>
+                                    <p:cond delay="0"/>
+                                  </p:stCondLst>
+                                  <p:childTnLst>
+                                    <p:set>
+                                      <p:cBhvr>
+                                        <p:cTn id="26" dur="1" fill="hold">
+                                          <p:stCondLst>
+                                            <p:cond delay="0"/>
+                                          </p:stCondLst>
+                                        </p:cTn>
+                                        <p:tgtEl>
+                                          <p:spTgt spid="3">
+                                            <p:txEl>
+                                              <p:pRg st="5" end="5"/>
                                             </p:txEl>
                                           </p:spTgt>
                                         </p:tgtEl>
@@ -22556,7 +22368,7 @@
             </a:pPr>
             <a:r>
               <a:rPr/>
-              <a:t>Diskussion</a:t>
+              <a:t>Standortbestimmung</a:t>
             </a:r>
           </a:p>
         </p:txBody>
@@ -22579,21 +22391,21 @@
             <a:pPr lvl="0"/>
             <a:r>
               <a:rPr/>
-              <a:t>Mandl: Data Mining = strukturierte Daten, Text Mining = unstrukturierte Texte</a:t>
+              <a:t>Wo begegnen / nutzen Sie KI / Data Mining heute schon?</a:t>
             </a:r>
           </a:p>
           <a:p>
             <a:pPr lvl="0"/>
             <a:r>
-              <a:rPr b="1"/>
-              <a:t>Wo liegen Bibliothekskataloge auf diesem Spektrum?</a:t>
+              <a:rPr/>
+              <a:t>Wo würden Sie gerne KI / Data Mining nutzen?</a:t>
             </a:r>
           </a:p>
           <a:p>
             <a:pPr lvl="0"/>
             <a:r>
               <a:rPr/>
-              <a:t>Metadaten vs. Abstracts vs. Volltexte</a:t>
+              <a:t>Welche KI-Versprechen hören Bibliotheken aktuell von Anbietern?</a:t>
             </a:r>
           </a:p>
         </p:txBody>
@@ -22820,7 +22632,7 @@
             </a:pPr>
             <a:r>
               <a:rPr/>
-              <a:t>AI Springs &amp; Winters</a:t>
+              <a:t>Diskussion</a:t>
             </a:r>
           </a:p>
         </p:txBody>
@@ -22843,35 +22655,21 @@
             <a:pPr lvl="0"/>
             <a:r>
               <a:rPr/>
-              <a:t>1950er/60er: erster Frühling — Turing, Dartmouth, große Versprechen</a:t>
+              <a:t>Mandl: Data Mining = strukturierte Daten, Text Mining = unstrukturierte Texte</a:t>
             </a:r>
           </a:p>
           <a:p>
             <a:pPr lvl="0"/>
             <a:r>
               <a:rPr/>
-              <a:t>1970er: erster Winter — die Versprechen platzen</a:t>
+              <a:t>Wo liegen Bibliothekskataloge auf diesem Spektrum?</a:t>
             </a:r>
           </a:p>
           <a:p>
             <a:pPr lvl="0"/>
             <a:r>
               <a:rPr/>
-              <a:t>1980er: Expertensysteme — und der zweite Winter</a:t>
-            </a:r>
-          </a:p>
-          <a:p>
-            <a:pPr lvl="0"/>
-            <a:r>
-              <a:rPr/>
-              <a:t>Heute: dritter Frühling?</a:t>
-            </a:r>
-          </a:p>
-          <a:p>
-            <a:pPr lvl="0"/>
-            <a:r>
-              <a:rPr b="1"/>
-              <a:t>Woran würden Sie den nächsten Winter erkennen?</a:t>
+              <a:t>Metadaten vs. Abstracts vs. Volltexte</a:t>
             </a:r>
           </a:p>
         </p:txBody>
@@ -23013,104 +22811,6 @@
                                           <p:spTgt spid="3">
                                             <p:txEl>
                                               <p:pRg st="2" end="2"/>
-                                            </p:txEl>
-                                          </p:spTgt>
-                                        </p:tgtEl>
-                                        <p:attrNameLst>
-                                          <p:attrName>style.visibility</p:attrName>
-                                        </p:attrNameLst>
-                                      </p:cBhvr>
-                                      <p:to>
-                                        <p:strVal val="visible"/>
-                                      </p:to>
-                                    </p:set>
-                                  </p:childTnLst>
-                                </p:cTn>
-                              </p:par>
-                            </p:childTnLst>
-                          </p:cTn>
-                        </p:par>
-                      </p:childTnLst>
-                    </p:cTn>
-                  </p:par>
-                  <p:par>
-                    <p:cTn id="15" fill="hold">
-                      <p:stCondLst>
-                        <p:cond delay="indefinite"/>
-                      </p:stCondLst>
-                      <p:childTnLst>
-                        <p:par>
-                          <p:cTn id="16" fill="hold">
-                            <p:stCondLst>
-                              <p:cond delay="0"/>
-                            </p:stCondLst>
-                            <p:childTnLst>
-                              <p:par>
-                                <p:cTn id="17" presetID="1" presetClass="entr" presetSubtype="0" fill="hold" grpId="0" nodeType="clickEffect">
-                                  <p:stCondLst>
-                                    <p:cond delay="0"/>
-                                  </p:stCondLst>
-                                  <p:childTnLst>
-                                    <p:set>
-                                      <p:cBhvr>
-                                        <p:cTn id="18" dur="1" fill="hold">
-                                          <p:stCondLst>
-                                            <p:cond delay="0"/>
-                                          </p:stCondLst>
-                                        </p:cTn>
-                                        <p:tgtEl>
-                                          <p:spTgt spid="3">
-                                            <p:txEl>
-                                              <p:pRg st="3" end="3"/>
-                                            </p:txEl>
-                                          </p:spTgt>
-                                        </p:tgtEl>
-                                        <p:attrNameLst>
-                                          <p:attrName>style.visibility</p:attrName>
-                                        </p:attrNameLst>
-                                      </p:cBhvr>
-                                      <p:to>
-                                        <p:strVal val="visible"/>
-                                      </p:to>
-                                    </p:set>
-                                  </p:childTnLst>
-                                </p:cTn>
-                              </p:par>
-                            </p:childTnLst>
-                          </p:cTn>
-                        </p:par>
-                      </p:childTnLst>
-                    </p:cTn>
-                  </p:par>
-                  <p:par>
-                    <p:cTn id="19" fill="hold">
-                      <p:stCondLst>
-                        <p:cond delay="indefinite"/>
-                      </p:stCondLst>
-                      <p:childTnLst>
-                        <p:par>
-                          <p:cTn id="20" fill="hold">
-                            <p:stCondLst>
-                              <p:cond delay="0"/>
-                            </p:stCondLst>
-                            <p:childTnLst>
-                              <p:par>
-                                <p:cTn id="21" presetID="1" presetClass="entr" presetSubtype="0" fill="hold" grpId="0" nodeType="clickEffect">
-                                  <p:stCondLst>
-                                    <p:cond delay="0"/>
-                                  </p:stCondLst>
-                                  <p:childTnLst>
-                                    <p:set>
-                                      <p:cBhvr>
-                                        <p:cTn id="22" dur="1" fill="hold">
-                                          <p:stCondLst>
-                                            <p:cond delay="0"/>
-                                          </p:stCondLst>
-                                        </p:cTn>
-                                        <p:tgtEl>
-                                          <p:spTgt spid="3">
-                                            <p:txEl>
-                                              <p:pRg st="4" end="4"/>
                                             </p:txEl>
                                           </p:spTgt>
                                         </p:tgtEl>

--- a/Konsultation_IBI_Deck.pptx
+++ b/Konsultation_IBI_Deck.pptx
@@ -81,6 +81,9 @@
     <p:sldId id="329" r:id="rId75"/>
     <p:sldId id="330" r:id="rId76"/>
     <p:sldId id="331" r:id="rId77"/>
+    <p:sldId id="332" r:id="rId78"/>
+    <p:sldId id="333" r:id="rId79"/>
+    <p:sldId id="334" r:id="rId80"/>
   </p:sldIdLst>
   <p:sldSz cx="9144000" cy="5143500" type="screen16x9"/>
   <p:notesSz cx="6858000" cy="9144000"/>
@@ -3521,7 +3524,7 @@
         </p:nvGraphicFramePr>
         <p:xfrm>
           <a:off x="457200" y="1193800"/>
-          <a:ext cx="8229600" cy="1188720"/>
+          <a:ext cx="8229600" cy="3390900"/>
         </p:xfrm>
         <a:graphic>
           <a:graphicData uri="http://schemas.openxmlformats.org/drawingml/2006/table">
@@ -6870,7 +6873,7 @@
         </p:nvGraphicFramePr>
         <p:xfrm>
           <a:off x="457200" y="1193800"/>
-          <a:ext cx="8229600" cy="2674620"/>
+          <a:ext cx="8229600" cy="3390900"/>
         </p:xfrm>
         <a:graphic>
           <a:graphicData uri="http://schemas.openxmlformats.org/drawingml/2006/table">
@@ -8594,7 +8597,7 @@
         </p:nvGraphicFramePr>
         <p:xfrm>
           <a:off x="3568700" y="203200"/>
-          <a:ext cx="5080000" cy="800100"/>
+          <a:ext cx="5105400" cy="4381500"/>
         </p:xfrm>
         <a:graphic>
           <a:graphicData uri="http://schemas.openxmlformats.org/drawingml/2006/table">
@@ -12585,7 +12588,7 @@
         </p:nvGraphicFramePr>
         <p:xfrm>
           <a:off x="457200" y="1193800"/>
-          <a:ext cx="8229600" cy="1188720"/>
+          <a:ext cx="8229600" cy="3390900"/>
         </p:xfrm>
         <a:graphic>
           <a:graphicData uri="http://schemas.openxmlformats.org/drawingml/2006/table">
@@ -14154,7 +14157,7 @@
               <a:buNone/>
             </a:pPr>
             <a:r>
-              <a:t>Collaborative Filtering: Funktioniert das wirklich?</a:t>
+              <a:t>Collaborative Filtering: Wie es funktioniert (IBCF)</a:t>
             </a:r>
           </a:p>
         </p:txBody>
@@ -14176,32 +14179,32 @@
           <a:p>
             <a:pPr lvl="0"/>
             <a:r>
-              <a:t>Der Test funktioniert wie in der Schule: Wir verstecken einen Teil der Bewertungen und lassen das Verfahren raten</a:t>
+              <a:t>Dieselbe Tabelle — aber jetzt vergleichen wir </a:t>
+            </a:r>
+            <a:r>
+              <a:rPr b="1"/>
+              <a:t>Spalten</a:t>
+            </a:r>
+            <a:r>
+              <a:t> (Bücher), nicht Zeilen</a:t>
             </a:r>
           </a:p>
           <a:p>
             <a:pPr lvl="0"/>
             <a:r>
-              <a:t>Ergebnis: deutlich besser als Zufallsempfehlungen (ROC-Kurve → Notebook)</a:t>
+              <a:t>Schritt 1: Berechne für jedes Buchpaar eine Ähnlichkeit — Bücher sind ähnlich, wenn ihr gemeinsames Bewertungsprofil übereinstimmt</a:t>
             </a:r>
           </a:p>
           <a:p>
             <a:pPr lvl="0"/>
             <a:r>
-              <a:t>Die Empfehlungslisten sind in sich stimmig — obwohl niemand dem System je „Genre” beigebracht hat</a:t>
+              <a:t>Schritt 2: Empfohlen werden die Bücher, die Ihren Favoriten am ähnlichsten sind — die Sie aber noch nicht bewertet haben</a:t>
             </a:r>
           </a:p>
           <a:p>
             <a:pPr lvl="0"/>
             <a:r>
-              <a:t>Schwäche: Wer noch nichts bewertet hat, bekommt nichts; was neu ist, wird nicht empfohlen (</a:t>
-            </a:r>
-            <a:r>
-              <a:rPr b="1"/>
-              <a:t>Cold Start</a:t>
-            </a:r>
-            <a:r>
-              <a:t>)</a:t>
+              <a:t>Kein Blick auf andere Nutzer:innen — nur auf die Ähnlichkeit zwischen Büchern</a:t>
             </a:r>
           </a:p>
         </p:txBody>
@@ -14479,7 +14482,900 @@
               <a:buNone/>
             </a:pPr>
             <a:r>
-              <a:t>Wie liest man das Testergebnis?</a:t>
+              <a:t>IBCF: Ein Beispiel</a:t>
+            </a:r>
+          </a:p>
+        </p:txBody>
+      </p:sp>
+      <p:graphicFrame>
+        <p:nvGraphicFramePr>
+          <p:cNvPr id="6" name="Content Placeholder 5"/>
+          <p:cNvGraphicFramePr>
+            <a:graphicFrameLocks noGrp="1"/>
+          </p:cNvGraphicFramePr>
+          <p:nvPr>
+            <p:ph idx="1"/>
+          </p:nvPr>
+        </p:nvGraphicFramePr>
+        <p:xfrm>
+          <a:off x="457200" y="1193800"/>
+          <a:ext cx="8191500" cy="1783080"/>
+        </p:xfrm>
+        <a:graphic>
+          <a:graphicData uri="http://schemas.openxmlformats.org/drawingml/2006/table">
+            <a:tbl>
+              <a:tblPr firstRow="1" bandRow="1">
+                <a:tableStyleId>{5C22544A-7EE6-4342-B048-85BDC9FD1C3A}</a:tableStyleId>
+              </a:tblPr>
+              <a:tblGrid>
+                <a:gridCol w="1638300">
+                  <a:extLst>
+                    <a:ext uri="{9D8B030D-6E8A-4147-A177-3AD203B41FA5}">
+                      <a16:colId xmlns:a16="http://schemas.microsoft.com/office/drawing/2014/main" val="20000"/>
+                    </a:ext>
+                  </a:extLst>
+                </a:gridCol>
+                <a:gridCol w="1638300">
+                  <a:extLst>
+                    <a:ext uri="{9D8B030D-6E8A-4147-A177-3AD203B41FA5}">
+                      <a16:colId xmlns:a16="http://schemas.microsoft.com/office/drawing/2014/main" val="20001"/>
+                    </a:ext>
+                  </a:extLst>
+                </a:gridCol>
+                <a:gridCol w="1638300">
+                  <a:extLst>
+                    <a:ext uri="{9D8B030D-6E8A-4147-A177-3AD203B41FA5}">
+                      <a16:colId xmlns:a16="http://schemas.microsoft.com/office/drawing/2014/main" val="20002"/>
+                    </a:ext>
+                  </a:extLst>
+                </a:gridCol>
+                <a:gridCol w="1638300">
+                  <a:extLst>
+                    <a:ext uri="{9D8B030D-6E8A-4147-A177-3AD203B41FA5}">
+                      <a16:colId xmlns:a16="http://schemas.microsoft.com/office/drawing/2014/main" val="20003"/>
+                    </a:ext>
+                  </a:extLst>
+                </a:gridCol>
+                <a:gridCol w="1638300">
+                  <a:extLst>
+                    <a:ext uri="{9D8B030D-6E8A-4147-A177-3AD203B41FA5}">
+                      <a16:colId xmlns:a16="http://schemas.microsoft.com/office/drawing/2014/main" val="20004"/>
+                    </a:ext>
+                  </a:extLst>
+                </a:gridCol>
+              </a:tblGrid>
+              <a:tr h="0">
+                <a:tc>
+                  <a:txBody>
+                    <a:bodyPr/>
+                    <a:lstStyle/>
+                    <a:p>
+                      <a:endParaRPr/>
+                    </a:p>
+                  </a:txBody>
+                  <a:tcPr/>
+                </a:tc>
+                <a:tc>
+                  <a:txBody>
+                    <a:bodyPr/>
+                    <a:lstStyle/>
+                    <a:p>
+                      <a:pPr marL="0" lvl="0" indent="0">
+                        <a:buNone/>
+                      </a:pPr>
+                      <a:r>
+                        <a:t>Da Vinci</a:t>
+                      </a:r>
+                    </a:p>
+                  </a:txBody>
+                  <a:tcPr/>
+                </a:tc>
+                <a:tc>
+                  <a:txBody>
+                    <a:bodyPr/>
+                    <a:lstStyle/>
+                    <a:p>
+                      <a:pPr marL="0" lvl="0" indent="0">
+                        <a:buNone/>
+                      </a:pPr>
+                      <a:r>
+                        <a:t>Angels</a:t>
+                      </a:r>
+                    </a:p>
+                  </a:txBody>
+                  <a:tcPr/>
+                </a:tc>
+                <a:tc>
+                  <a:txBody>
+                    <a:bodyPr/>
+                    <a:lstStyle/>
+                    <a:p>
+                      <a:pPr marL="0" lvl="0" indent="0">
+                        <a:buNone/>
+                      </a:pPr>
+                      <a:r>
+                        <a:t>Life of Pi</a:t>
+                      </a:r>
+                    </a:p>
+                  </a:txBody>
+                  <a:tcPr/>
+                </a:tc>
+                <a:tc>
+                  <a:txBody>
+                    <a:bodyPr/>
+                    <a:lstStyle/>
+                    <a:p>
+                      <a:pPr marL="0" lvl="0" indent="0">
+                        <a:buNone/>
+                      </a:pPr>
+                      <a:r>
+                        <a:t>Harry Potter</a:t>
+                      </a:r>
+                    </a:p>
+                  </a:txBody>
+                  <a:tcPr/>
+                </a:tc>
+                <a:extLst>
+                  <a:ext uri="{0D108BD9-81ED-4DB2-BD59-A6C34878D82A}">
+                    <a16:rowId xmlns:a16="http://schemas.microsoft.com/office/drawing/2014/main" val="10000"/>
+                  </a:ext>
+                </a:extLst>
+              </a:tr>
+              <a:tr h="0">
+                <a:tc>
+                  <a:txBody>
+                    <a:bodyPr/>
+                    <a:lstStyle/>
+                    <a:p>
+                      <a:pPr marL="0" lvl="0" indent="0">
+                        <a:buNone/>
+                      </a:pPr>
+                      <a:r>
+                        <a:t>A</a:t>
+                      </a:r>
+                    </a:p>
+                  </a:txBody>
+                  <a:tcPr/>
+                </a:tc>
+                <a:tc>
+                  <a:txBody>
+                    <a:bodyPr/>
+                    <a:lstStyle/>
+                    <a:p>
+                      <a:pPr marL="0" lvl="0" indent="0">
+                        <a:buNone/>
+                      </a:pPr>
+                      <a:r>
+                        <a:t>8</a:t>
+                      </a:r>
+                    </a:p>
+                  </a:txBody>
+                  <a:tcPr/>
+                </a:tc>
+                <a:tc>
+                  <a:txBody>
+                    <a:bodyPr/>
+                    <a:lstStyle/>
+                    <a:p>
+                      <a:pPr marL="0" lvl="0" indent="0">
+                        <a:buNone/>
+                      </a:pPr>
+                      <a:r>
+                        <a:t>9</a:t>
+                      </a:r>
+                    </a:p>
+                  </a:txBody>
+                  <a:tcPr/>
+                </a:tc>
+                <a:tc>
+                  <a:txBody>
+                    <a:bodyPr/>
+                    <a:lstStyle/>
+                    <a:p>
+                      <a:pPr marL="0" lvl="0" indent="0">
+                        <a:buNone/>
+                      </a:pPr>
+                      <a:r>
+                        <a:t>—</a:t>
+                      </a:r>
+                    </a:p>
+                  </a:txBody>
+                  <a:tcPr/>
+                </a:tc>
+                <a:tc>
+                  <a:txBody>
+                    <a:bodyPr/>
+                    <a:lstStyle/>
+                    <a:p>
+                      <a:pPr marL="0" lvl="0" indent="0">
+                        <a:buNone/>
+                      </a:pPr>
+                      <a:r>
+                        <a:t>7</a:t>
+                      </a:r>
+                    </a:p>
+                  </a:txBody>
+                  <a:tcPr/>
+                </a:tc>
+                <a:extLst>
+                  <a:ext uri="{0D108BD9-81ED-4DB2-BD59-A6C34878D82A}">
+                    <a16:rowId xmlns:a16="http://schemas.microsoft.com/office/drawing/2014/main" val="10001"/>
+                  </a:ext>
+                </a:extLst>
+              </a:tr>
+              <a:tr h="0">
+                <a:tc>
+                  <a:txBody>
+                    <a:bodyPr/>
+                    <a:lstStyle/>
+                    <a:p>
+                      <a:pPr marL="0" lvl="0" indent="0">
+                        <a:buNone/>
+                      </a:pPr>
+                      <a:r>
+                        <a:t>B</a:t>
+                      </a:r>
+                    </a:p>
+                  </a:txBody>
+                  <a:tcPr/>
+                </a:tc>
+                <a:tc>
+                  <a:txBody>
+                    <a:bodyPr/>
+                    <a:lstStyle/>
+                    <a:p>
+                      <a:pPr marL="0" lvl="0" indent="0">
+                        <a:buNone/>
+                      </a:pPr>
+                      <a:r>
+                        <a:t>7</a:t>
+                      </a:r>
+                    </a:p>
+                  </a:txBody>
+                  <a:tcPr/>
+                </a:tc>
+                <a:tc>
+                  <a:txBody>
+                    <a:bodyPr/>
+                    <a:lstStyle/>
+                    <a:p>
+                      <a:pPr marL="0" lvl="0" indent="0">
+                        <a:buNone/>
+                      </a:pPr>
+                      <a:r>
+                        <a:t>8</a:t>
+                      </a:r>
+                    </a:p>
+                  </a:txBody>
+                  <a:tcPr/>
+                </a:tc>
+                <a:tc>
+                  <a:txBody>
+                    <a:bodyPr/>
+                    <a:lstStyle/>
+                    <a:p>
+                      <a:pPr marL="0" lvl="0" indent="0">
+                        <a:buNone/>
+                      </a:pPr>
+                      <a:r>
+                        <a:t>6</a:t>
+                      </a:r>
+                    </a:p>
+                  </a:txBody>
+                  <a:tcPr/>
+                </a:tc>
+                <a:tc>
+                  <a:txBody>
+                    <a:bodyPr/>
+                    <a:lstStyle/>
+                    <a:p>
+                      <a:pPr marL="0" lvl="0" indent="0">
+                        <a:buNone/>
+                      </a:pPr>
+                      <a:r>
+                        <a:t>—</a:t>
+                      </a:r>
+                    </a:p>
+                  </a:txBody>
+                  <a:tcPr/>
+                </a:tc>
+                <a:extLst>
+                  <a:ext uri="{0D108BD9-81ED-4DB2-BD59-A6C34878D82A}">
+                    <a16:rowId xmlns:a16="http://schemas.microsoft.com/office/drawing/2014/main" val="10002"/>
+                  </a:ext>
+                </a:extLst>
+              </a:tr>
+              <a:tr h="0">
+                <a:tc>
+                  <a:txBody>
+                    <a:bodyPr/>
+                    <a:lstStyle/>
+                    <a:p>
+                      <a:pPr marL="0" lvl="0" indent="0">
+                        <a:buNone/>
+                      </a:pPr>
+                      <a:r>
+                        <a:t>C</a:t>
+                      </a:r>
+                    </a:p>
+                  </a:txBody>
+                  <a:tcPr/>
+                </a:tc>
+                <a:tc>
+                  <a:txBody>
+                    <a:bodyPr/>
+                    <a:lstStyle/>
+                    <a:p>
+                      <a:pPr marL="0" lvl="0" indent="0">
+                        <a:buNone/>
+                      </a:pPr>
+                      <a:r>
+                        <a:rPr b="1"/>
+                        <a:t>9</a:t>
+                      </a:r>
+                    </a:p>
+                  </a:txBody>
+                  <a:tcPr/>
+                </a:tc>
+                <a:tc>
+                  <a:txBody>
+                    <a:bodyPr/>
+                    <a:lstStyle/>
+                    <a:p>
+                      <a:pPr marL="0" lvl="0" indent="0">
+                        <a:buNone/>
+                      </a:pPr>
+                      <a:r>
+                        <a:t>?</a:t>
+                      </a:r>
+                    </a:p>
+                  </a:txBody>
+                  <a:tcPr/>
+                </a:tc>
+                <a:tc>
+                  <a:txBody>
+                    <a:bodyPr/>
+                    <a:lstStyle/>
+                    <a:p>
+                      <a:pPr marL="0" lvl="0" indent="0">
+                        <a:buNone/>
+                      </a:pPr>
+                      <a:r>
+                        <a:t>—</a:t>
+                      </a:r>
+                    </a:p>
+                  </a:txBody>
+                  <a:tcPr/>
+                </a:tc>
+                <a:tc>
+                  <a:txBody>
+                    <a:bodyPr/>
+                    <a:lstStyle/>
+                    <a:p>
+                      <a:pPr marL="0" lvl="0" indent="0">
+                        <a:buNone/>
+                      </a:pPr>
+                      <a:r>
+                        <a:rPr b="1"/>
+                        <a:t>8</a:t>
+                      </a:r>
+                    </a:p>
+                  </a:txBody>
+                  <a:tcPr/>
+                </a:tc>
+                <a:extLst>
+                  <a:ext uri="{0D108BD9-81ED-4DB2-BD59-A6C34878D82A}">
+                    <a16:rowId xmlns:a16="http://schemas.microsoft.com/office/drawing/2014/main" val="10003"/>
+                  </a:ext>
+                </a:extLst>
+              </a:tr>
+              <a:tr h="0">
+                <a:tc>
+                  <a:txBody>
+                    <a:bodyPr/>
+                    <a:lstStyle/>
+                    <a:p>
+                      <a:pPr marL="0" lvl="0" indent="0">
+                        <a:buNone/>
+                      </a:pPr>
+                      <a:r>
+                        <a:t>D</a:t>
+                      </a:r>
+                    </a:p>
+                  </a:txBody>
+                  <a:tcPr/>
+                </a:tc>
+                <a:tc>
+                  <a:txBody>
+                    <a:bodyPr/>
+                    <a:lstStyle/>
+                    <a:p>
+                      <a:pPr marL="0" lvl="0" indent="0">
+                        <a:buNone/>
+                      </a:pPr>
+                      <a:r>
+                        <a:t>—</a:t>
+                      </a:r>
+                    </a:p>
+                  </a:txBody>
+                  <a:tcPr/>
+                </a:tc>
+                <a:tc>
+                  <a:txBody>
+                    <a:bodyPr/>
+                    <a:lstStyle/>
+                    <a:p>
+                      <a:pPr marL="0" lvl="0" indent="0">
+                        <a:buNone/>
+                      </a:pPr>
+                      <a:r>
+                        <a:t>—</a:t>
+                      </a:r>
+                    </a:p>
+                  </a:txBody>
+                  <a:tcPr/>
+                </a:tc>
+                <a:tc>
+                  <a:txBody>
+                    <a:bodyPr/>
+                    <a:lstStyle/>
+                    <a:p>
+                      <a:pPr marL="0" lvl="0" indent="0">
+                        <a:buNone/>
+                      </a:pPr>
+                      <a:r>
+                        <a:t>9</a:t>
+                      </a:r>
+                    </a:p>
+                  </a:txBody>
+                  <a:tcPr/>
+                </a:tc>
+                <a:tc>
+                  <a:txBody>
+                    <a:bodyPr/>
+                    <a:lstStyle/>
+                    <a:p>
+                      <a:pPr marL="0" lvl="0" indent="0">
+                        <a:buNone/>
+                      </a:pPr>
+                      <a:r>
+                        <a:t>—</a:t>
+                      </a:r>
+                    </a:p>
+                  </a:txBody>
+                  <a:tcPr/>
+                </a:tc>
+                <a:extLst>
+                  <a:ext uri="{0D108BD9-81ED-4DB2-BD59-A6C34878D82A}">
+                    <a16:rowId xmlns:a16="http://schemas.microsoft.com/office/drawing/2014/main" val="10004"/>
+                  </a:ext>
+                </a:extLst>
+              </a:tr>
+              <a:tr h="0">
+                <a:tc>
+                  <a:txBody>
+                    <a:bodyPr/>
+                    <a:lstStyle/>
+                    <a:p>
+                      <a:pPr marL="0" lvl="0" indent="0">
+                        <a:buNone/>
+                      </a:pPr>
+                      <a:r>
+                        <a:t>E</a:t>
+                      </a:r>
+                    </a:p>
+                  </a:txBody>
+                  <a:tcPr/>
+                </a:tc>
+                <a:tc>
+                  <a:txBody>
+                    <a:bodyPr/>
+                    <a:lstStyle/>
+                    <a:p>
+                      <a:pPr marL="0" lvl="0" indent="0">
+                        <a:buNone/>
+                      </a:pPr>
+                      <a:r>
+                        <a:t>6</a:t>
+                      </a:r>
+                    </a:p>
+                  </a:txBody>
+                  <a:tcPr/>
+                </a:tc>
+                <a:tc>
+                  <a:txBody>
+                    <a:bodyPr/>
+                    <a:lstStyle/>
+                    <a:p>
+                      <a:pPr marL="0" lvl="0" indent="0">
+                        <a:buNone/>
+                      </a:pPr>
+                      <a:r>
+                        <a:t>7</a:t>
+                      </a:r>
+                    </a:p>
+                  </a:txBody>
+                  <a:tcPr/>
+                </a:tc>
+                <a:tc>
+                  <a:txBody>
+                    <a:bodyPr/>
+                    <a:lstStyle/>
+                    <a:p>
+                      <a:pPr marL="0" lvl="0" indent="0">
+                        <a:buNone/>
+                      </a:pPr>
+                      <a:r>
+                        <a:t>—</a:t>
+                      </a:r>
+                    </a:p>
+                  </a:txBody>
+                  <a:tcPr/>
+                </a:tc>
+                <a:tc>
+                  <a:txBody>
+                    <a:bodyPr/>
+                    <a:lstStyle/>
+                    <a:p>
+                      <a:pPr marL="0" lvl="0" indent="0">
+                        <a:buNone/>
+                      </a:pPr>
+                      <a:r>
+                        <a:t>6</a:t>
+                      </a:r>
+                    </a:p>
+                  </a:txBody>
+                  <a:tcPr/>
+                </a:tc>
+                <a:extLst>
+                  <a:ext uri="{0D108BD9-81ED-4DB2-BD59-A6C34878D82A}">
+                    <a16:rowId xmlns:a16="http://schemas.microsoft.com/office/drawing/2014/main" val="10005"/>
+                  </a:ext>
+                </a:extLst>
+              </a:tr>
+            </a:tbl>
+          </a:graphicData>
+        </a:graphic>
+      </p:graphicFrame>
+    </p:spTree>
+  </p:cSld>
+  <p:clrMapOvr>
+    <a:masterClrMapping/>
+  </p:clrMapOvr>
+</p:sld>
+</file>
+
+<file path=ppt/slides/slide46.xml><?xml version="1.0" encoding="utf-8"?>
+<p:sld xmlns:a="http://schemas.openxmlformats.org/drawingml/2006/main" xmlns:r="http://schemas.openxmlformats.org/officeDocument/2006/relationships" xmlns:p="http://schemas.openxmlformats.org/presentationml/2006/main">
+  <p:cSld>
+    <p:spTree>
+      <p:nvGrpSpPr>
+        <p:cNvPr id="1" name=""/>
+        <p:cNvGrpSpPr/>
+        <p:nvPr/>
+      </p:nvGrpSpPr>
+      <p:grpSpPr>
+        <a:xfrm>
+          <a:off x="0" y="0"/>
+          <a:ext cx="0" cy="0"/>
+          <a:chOff x="0" y="0"/>
+          <a:chExt cx="0" cy="0"/>
+        </a:xfrm>
+      </p:grpSpPr>
+      <p:sp>
+        <p:nvSpPr>
+          <p:cNvPr id="3" name="Content Placeholder 2"/>
+          <p:cNvSpPr>
+            <a:spLocks noGrp="1"/>
+          </p:cNvSpPr>
+          <p:nvPr>
+            <p:ph idx="1"/>
+          </p:nvPr>
+        </p:nvSpPr>
+        <p:spPr/>
+        <p:txBody>
+          <a:bodyPr/>
+          <a:lstStyle/>
+          <a:p>
+            <a:pPr lvl="0"/>
+            <a:r>
+              <a:t>„Da Vinci” und „Angels”: überall wo beide bewertet wurden, liegen die Zahlen nah beieinander → hohe Ähnlichkeit</a:t>
+            </a:r>
+          </a:p>
+          <a:p>
+            <a:pPr lvl="0"/>
+            <a:r>
+              <a:t>„Da Vinci” und „Life of Pi”: nur B hat beide bewertet → kaum Überlappung → niedrige Ähnlichkeit</a:t>
+            </a:r>
+          </a:p>
+          <a:p>
+            <a:pPr lvl="0"/>
+            <a:r>
+              <a:t>Nutzerin C hat Da Vinci (9) gut gefunden → Angels wird empfohlen, weil es Da Vinci am ähnlichsten ist</a:t>
+            </a:r>
+          </a:p>
+          <a:p>
+            <a:pPr lvl="0"/>
+            <a:r>
+              <a:t>Kein Schritt hat gefragt: „Wer hat ähnlichen Geschmack wie C?” — das wäre UBCF</a:t>
+            </a:r>
+          </a:p>
+        </p:txBody>
+      </p:sp>
+    </p:spTree>
+  </p:cSld>
+  <p:clrMapOvr>
+    <a:masterClrMapping/>
+  </p:clrMapOvr>
+  <p:timing>
+    <p:tnLst>
+      <p:par>
+        <p:cTn id="1" dur="indefinite" restart="never" nodeType="tmRoot">
+          <p:childTnLst>
+            <p:seq concurrent="1" nextAc="seek">
+              <p:cTn id="2" dur="indefinite" nodeType="mainSeq">
+                <p:childTnLst>
+                  <p:par>
+                    <p:cTn id="3" fill="hold">
+                      <p:stCondLst>
+                        <p:cond delay="indefinite"/>
+                      </p:stCondLst>
+                      <p:childTnLst>
+                        <p:par>
+                          <p:cTn id="4" fill="hold">
+                            <p:stCondLst>
+                              <p:cond delay="0"/>
+                            </p:stCondLst>
+                            <p:childTnLst>
+                              <p:par>
+                                <p:cTn id="5" presetID="1" presetClass="entr" presetSubtype="0" fill="hold" grpId="0" nodeType="clickEffect">
+                                  <p:stCondLst>
+                                    <p:cond delay="0"/>
+                                  </p:stCondLst>
+                                  <p:childTnLst>
+                                    <p:set>
+                                      <p:cBhvr>
+                                        <p:cTn id="6" dur="1" fill="hold">
+                                          <p:stCondLst>
+                                            <p:cond delay="0"/>
+                                          </p:stCondLst>
+                                        </p:cTn>
+                                        <p:tgtEl>
+                                          <p:spTgt spid="3">
+                                            <p:txEl>
+                                              <p:pRg st="0" end="0"/>
+                                            </p:txEl>
+                                          </p:spTgt>
+                                        </p:tgtEl>
+                                        <p:attrNameLst>
+                                          <p:attrName>style.visibility</p:attrName>
+                                        </p:attrNameLst>
+                                      </p:cBhvr>
+                                      <p:to>
+                                        <p:strVal val="visible"/>
+                                      </p:to>
+                                    </p:set>
+                                  </p:childTnLst>
+                                </p:cTn>
+                              </p:par>
+                            </p:childTnLst>
+                          </p:cTn>
+                        </p:par>
+                      </p:childTnLst>
+                    </p:cTn>
+                  </p:par>
+                  <p:par>
+                    <p:cTn id="7" fill="hold">
+                      <p:stCondLst>
+                        <p:cond delay="indefinite"/>
+                      </p:stCondLst>
+                      <p:childTnLst>
+                        <p:par>
+                          <p:cTn id="8" fill="hold">
+                            <p:stCondLst>
+                              <p:cond delay="0"/>
+                            </p:stCondLst>
+                            <p:childTnLst>
+                              <p:par>
+                                <p:cTn id="9" presetID="1" presetClass="entr" presetSubtype="0" fill="hold" grpId="0" nodeType="clickEffect">
+                                  <p:stCondLst>
+                                    <p:cond delay="0"/>
+                                  </p:stCondLst>
+                                  <p:childTnLst>
+                                    <p:set>
+                                      <p:cBhvr>
+                                        <p:cTn id="10" dur="1" fill="hold">
+                                          <p:stCondLst>
+                                            <p:cond delay="0"/>
+                                          </p:stCondLst>
+                                        </p:cTn>
+                                        <p:tgtEl>
+                                          <p:spTgt spid="3">
+                                            <p:txEl>
+                                              <p:pRg st="1" end="1"/>
+                                            </p:txEl>
+                                          </p:spTgt>
+                                        </p:tgtEl>
+                                        <p:attrNameLst>
+                                          <p:attrName>style.visibility</p:attrName>
+                                        </p:attrNameLst>
+                                      </p:cBhvr>
+                                      <p:to>
+                                        <p:strVal val="visible"/>
+                                      </p:to>
+                                    </p:set>
+                                  </p:childTnLst>
+                                </p:cTn>
+                              </p:par>
+                            </p:childTnLst>
+                          </p:cTn>
+                        </p:par>
+                      </p:childTnLst>
+                    </p:cTn>
+                  </p:par>
+                  <p:par>
+                    <p:cTn id="11" fill="hold">
+                      <p:stCondLst>
+                        <p:cond delay="indefinite"/>
+                      </p:stCondLst>
+                      <p:childTnLst>
+                        <p:par>
+                          <p:cTn id="12" fill="hold">
+                            <p:stCondLst>
+                              <p:cond delay="0"/>
+                            </p:stCondLst>
+                            <p:childTnLst>
+                              <p:par>
+                                <p:cTn id="13" presetID="1" presetClass="entr" presetSubtype="0" fill="hold" grpId="0" nodeType="clickEffect">
+                                  <p:stCondLst>
+                                    <p:cond delay="0"/>
+                                  </p:stCondLst>
+                                  <p:childTnLst>
+                                    <p:set>
+                                      <p:cBhvr>
+                                        <p:cTn id="14" dur="1" fill="hold">
+                                          <p:stCondLst>
+                                            <p:cond delay="0"/>
+                                          </p:stCondLst>
+                                        </p:cTn>
+                                        <p:tgtEl>
+                                          <p:spTgt spid="3">
+                                            <p:txEl>
+                                              <p:pRg st="2" end="2"/>
+                                            </p:txEl>
+                                          </p:spTgt>
+                                        </p:tgtEl>
+                                        <p:attrNameLst>
+                                          <p:attrName>style.visibility</p:attrName>
+                                        </p:attrNameLst>
+                                      </p:cBhvr>
+                                      <p:to>
+                                        <p:strVal val="visible"/>
+                                      </p:to>
+                                    </p:set>
+                                  </p:childTnLst>
+                                </p:cTn>
+                              </p:par>
+                            </p:childTnLst>
+                          </p:cTn>
+                        </p:par>
+                      </p:childTnLst>
+                    </p:cTn>
+                  </p:par>
+                  <p:par>
+                    <p:cTn id="15" fill="hold">
+                      <p:stCondLst>
+                        <p:cond delay="indefinite"/>
+                      </p:stCondLst>
+                      <p:childTnLst>
+                        <p:par>
+                          <p:cTn id="16" fill="hold">
+                            <p:stCondLst>
+                              <p:cond delay="0"/>
+                            </p:stCondLst>
+                            <p:childTnLst>
+                              <p:par>
+                                <p:cTn id="17" presetID="1" presetClass="entr" presetSubtype="0" fill="hold" grpId="0" nodeType="clickEffect">
+                                  <p:stCondLst>
+                                    <p:cond delay="0"/>
+                                  </p:stCondLst>
+                                  <p:childTnLst>
+                                    <p:set>
+                                      <p:cBhvr>
+                                        <p:cTn id="18" dur="1" fill="hold">
+                                          <p:stCondLst>
+                                            <p:cond delay="0"/>
+                                          </p:stCondLst>
+                                        </p:cTn>
+                                        <p:tgtEl>
+                                          <p:spTgt spid="3">
+                                            <p:txEl>
+                                              <p:pRg st="3" end="3"/>
+                                            </p:txEl>
+                                          </p:spTgt>
+                                        </p:tgtEl>
+                                        <p:attrNameLst>
+                                          <p:attrName>style.visibility</p:attrName>
+                                        </p:attrNameLst>
+                                      </p:cBhvr>
+                                      <p:to>
+                                        <p:strVal val="visible"/>
+                                      </p:to>
+                                    </p:set>
+                                  </p:childTnLst>
+                                </p:cTn>
+                              </p:par>
+                            </p:childTnLst>
+                          </p:cTn>
+                        </p:par>
+                      </p:childTnLst>
+                    </p:cTn>
+                  </p:par>
+                </p:childTnLst>
+              </p:cTn>
+              <p:prevCondLst>
+                <p:cond evt="onPrev" delay="0">
+                  <p:tgtEl>
+                    <p:sldTgt/>
+                  </p:tgtEl>
+                </p:cond>
+              </p:prevCondLst>
+              <p:nextCondLst>
+                <p:cond evt="onNext" delay="0">
+                  <p:tgtEl>
+                    <p:sldTgt/>
+                  </p:tgtEl>
+                </p:cond>
+              </p:nextCondLst>
+            </p:seq>
+          </p:childTnLst>
+        </p:cTn>
+      </p:par>
+    </p:tnLst>
+    <p:bldLst>
+      <p:bldP spid="3" grpId="0" uiExpand="1" build="p"/>
+    </p:bldLst>
+  </p:timing>
+</p:sld>
+</file>
+
+<file path=ppt/slides/slide47.xml><?xml version="1.0" encoding="utf-8"?>
+<p:sld xmlns:a="http://schemas.openxmlformats.org/drawingml/2006/main" xmlns:r="http://schemas.openxmlformats.org/officeDocument/2006/relationships" xmlns:p="http://schemas.openxmlformats.org/presentationml/2006/main">
+  <p:cSld>
+    <p:spTree>
+      <p:nvGrpSpPr>
+        <p:cNvPr id="1" name=""/>
+        <p:cNvGrpSpPr/>
+        <p:nvPr/>
+      </p:nvGrpSpPr>
+      <p:grpSpPr>
+        <a:xfrm>
+          <a:off x="0" y="0"/>
+          <a:ext cx="0" cy="0"/>
+          <a:chOff x="0" y="0"/>
+          <a:chExt cx="0" cy="0"/>
+        </a:xfrm>
+      </p:grpSpPr>
+      <p:sp>
+        <p:nvSpPr>
+          <p:cNvPr id="2" name="Title 1"/>
+          <p:cNvSpPr>
+            <a:spLocks noGrp="1"/>
+          </p:cNvSpPr>
+          <p:nvPr>
+            <p:ph type="title"/>
+          </p:nvPr>
+        </p:nvSpPr>
+        <p:spPr/>
+        <p:txBody>
+          <a:bodyPr/>
+          <a:lstStyle/>
+          <a:p>
+            <a:pPr marL="0" lvl="0" indent="0">
+              <a:buNone/>
+            </a:pPr>
+            <a:r>
+              <a:t>Collaborative Filtering: Funktioniert das wirklich?</a:t>
             </a:r>
           </a:p>
         </p:txBody>
@@ -14501,6 +15397,331 @@
           <a:p>
             <a:pPr lvl="0"/>
             <a:r>
+              <a:t>Der Test funktioniert wie in der Schule: Wir verstecken einen Teil der Bewertungen und lassen das Verfahren raten</a:t>
+            </a:r>
+          </a:p>
+          <a:p>
+            <a:pPr lvl="0"/>
+            <a:r>
+              <a:t>Ergebnis: deutlich besser als Zufallsempfehlungen (ROC-Kurve → Notebook)</a:t>
+            </a:r>
+          </a:p>
+          <a:p>
+            <a:pPr lvl="0"/>
+            <a:r>
+              <a:t>Die Empfehlungslisten sind in sich stimmig — obwohl niemand dem System je „Genre” beigebracht hat</a:t>
+            </a:r>
+          </a:p>
+          <a:p>
+            <a:pPr lvl="0"/>
+            <a:r>
+              <a:t>Schwäche: Wer noch nichts bewertet hat, bekommt nichts; was neu ist, wird nicht empfohlen (</a:t>
+            </a:r>
+            <a:r>
+              <a:rPr b="1"/>
+              <a:t>Cold Start</a:t>
+            </a:r>
+            <a:r>
+              <a:t>)</a:t>
+            </a:r>
+          </a:p>
+        </p:txBody>
+      </p:sp>
+    </p:spTree>
+  </p:cSld>
+  <p:clrMapOvr>
+    <a:masterClrMapping/>
+  </p:clrMapOvr>
+  <p:timing>
+    <p:tnLst>
+      <p:par>
+        <p:cTn id="1" dur="indefinite" restart="never" nodeType="tmRoot">
+          <p:childTnLst>
+            <p:seq concurrent="1" nextAc="seek">
+              <p:cTn id="2" dur="indefinite" nodeType="mainSeq">
+                <p:childTnLst>
+                  <p:par>
+                    <p:cTn id="3" fill="hold">
+                      <p:stCondLst>
+                        <p:cond delay="indefinite"/>
+                      </p:stCondLst>
+                      <p:childTnLst>
+                        <p:par>
+                          <p:cTn id="4" fill="hold">
+                            <p:stCondLst>
+                              <p:cond delay="0"/>
+                            </p:stCondLst>
+                            <p:childTnLst>
+                              <p:par>
+                                <p:cTn id="5" presetID="1" presetClass="entr" presetSubtype="0" fill="hold" grpId="0" nodeType="clickEffect">
+                                  <p:stCondLst>
+                                    <p:cond delay="0"/>
+                                  </p:stCondLst>
+                                  <p:childTnLst>
+                                    <p:set>
+                                      <p:cBhvr>
+                                        <p:cTn id="6" dur="1" fill="hold">
+                                          <p:stCondLst>
+                                            <p:cond delay="0"/>
+                                          </p:stCondLst>
+                                        </p:cTn>
+                                        <p:tgtEl>
+                                          <p:spTgt spid="3">
+                                            <p:txEl>
+                                              <p:pRg st="0" end="0"/>
+                                            </p:txEl>
+                                          </p:spTgt>
+                                        </p:tgtEl>
+                                        <p:attrNameLst>
+                                          <p:attrName>style.visibility</p:attrName>
+                                        </p:attrNameLst>
+                                      </p:cBhvr>
+                                      <p:to>
+                                        <p:strVal val="visible"/>
+                                      </p:to>
+                                    </p:set>
+                                  </p:childTnLst>
+                                </p:cTn>
+                              </p:par>
+                            </p:childTnLst>
+                          </p:cTn>
+                        </p:par>
+                      </p:childTnLst>
+                    </p:cTn>
+                  </p:par>
+                  <p:par>
+                    <p:cTn id="7" fill="hold">
+                      <p:stCondLst>
+                        <p:cond delay="indefinite"/>
+                      </p:stCondLst>
+                      <p:childTnLst>
+                        <p:par>
+                          <p:cTn id="8" fill="hold">
+                            <p:stCondLst>
+                              <p:cond delay="0"/>
+                            </p:stCondLst>
+                            <p:childTnLst>
+                              <p:par>
+                                <p:cTn id="9" presetID="1" presetClass="entr" presetSubtype="0" fill="hold" grpId="0" nodeType="clickEffect">
+                                  <p:stCondLst>
+                                    <p:cond delay="0"/>
+                                  </p:stCondLst>
+                                  <p:childTnLst>
+                                    <p:set>
+                                      <p:cBhvr>
+                                        <p:cTn id="10" dur="1" fill="hold">
+                                          <p:stCondLst>
+                                            <p:cond delay="0"/>
+                                          </p:stCondLst>
+                                        </p:cTn>
+                                        <p:tgtEl>
+                                          <p:spTgt spid="3">
+                                            <p:txEl>
+                                              <p:pRg st="1" end="1"/>
+                                            </p:txEl>
+                                          </p:spTgt>
+                                        </p:tgtEl>
+                                        <p:attrNameLst>
+                                          <p:attrName>style.visibility</p:attrName>
+                                        </p:attrNameLst>
+                                      </p:cBhvr>
+                                      <p:to>
+                                        <p:strVal val="visible"/>
+                                      </p:to>
+                                    </p:set>
+                                  </p:childTnLst>
+                                </p:cTn>
+                              </p:par>
+                            </p:childTnLst>
+                          </p:cTn>
+                        </p:par>
+                      </p:childTnLst>
+                    </p:cTn>
+                  </p:par>
+                  <p:par>
+                    <p:cTn id="11" fill="hold">
+                      <p:stCondLst>
+                        <p:cond delay="indefinite"/>
+                      </p:stCondLst>
+                      <p:childTnLst>
+                        <p:par>
+                          <p:cTn id="12" fill="hold">
+                            <p:stCondLst>
+                              <p:cond delay="0"/>
+                            </p:stCondLst>
+                            <p:childTnLst>
+                              <p:par>
+                                <p:cTn id="13" presetID="1" presetClass="entr" presetSubtype="0" fill="hold" grpId="0" nodeType="clickEffect">
+                                  <p:stCondLst>
+                                    <p:cond delay="0"/>
+                                  </p:stCondLst>
+                                  <p:childTnLst>
+                                    <p:set>
+                                      <p:cBhvr>
+                                        <p:cTn id="14" dur="1" fill="hold">
+                                          <p:stCondLst>
+                                            <p:cond delay="0"/>
+                                          </p:stCondLst>
+                                        </p:cTn>
+                                        <p:tgtEl>
+                                          <p:spTgt spid="3">
+                                            <p:txEl>
+                                              <p:pRg st="2" end="2"/>
+                                            </p:txEl>
+                                          </p:spTgt>
+                                        </p:tgtEl>
+                                        <p:attrNameLst>
+                                          <p:attrName>style.visibility</p:attrName>
+                                        </p:attrNameLst>
+                                      </p:cBhvr>
+                                      <p:to>
+                                        <p:strVal val="visible"/>
+                                      </p:to>
+                                    </p:set>
+                                  </p:childTnLst>
+                                </p:cTn>
+                              </p:par>
+                            </p:childTnLst>
+                          </p:cTn>
+                        </p:par>
+                      </p:childTnLst>
+                    </p:cTn>
+                  </p:par>
+                  <p:par>
+                    <p:cTn id="15" fill="hold">
+                      <p:stCondLst>
+                        <p:cond delay="indefinite"/>
+                      </p:stCondLst>
+                      <p:childTnLst>
+                        <p:par>
+                          <p:cTn id="16" fill="hold">
+                            <p:stCondLst>
+                              <p:cond delay="0"/>
+                            </p:stCondLst>
+                            <p:childTnLst>
+                              <p:par>
+                                <p:cTn id="17" presetID="1" presetClass="entr" presetSubtype="0" fill="hold" grpId="0" nodeType="clickEffect">
+                                  <p:stCondLst>
+                                    <p:cond delay="0"/>
+                                  </p:stCondLst>
+                                  <p:childTnLst>
+                                    <p:set>
+                                      <p:cBhvr>
+                                        <p:cTn id="18" dur="1" fill="hold">
+                                          <p:stCondLst>
+                                            <p:cond delay="0"/>
+                                          </p:stCondLst>
+                                        </p:cTn>
+                                        <p:tgtEl>
+                                          <p:spTgt spid="3">
+                                            <p:txEl>
+                                              <p:pRg st="3" end="3"/>
+                                            </p:txEl>
+                                          </p:spTgt>
+                                        </p:tgtEl>
+                                        <p:attrNameLst>
+                                          <p:attrName>style.visibility</p:attrName>
+                                        </p:attrNameLst>
+                                      </p:cBhvr>
+                                      <p:to>
+                                        <p:strVal val="visible"/>
+                                      </p:to>
+                                    </p:set>
+                                  </p:childTnLst>
+                                </p:cTn>
+                              </p:par>
+                            </p:childTnLst>
+                          </p:cTn>
+                        </p:par>
+                      </p:childTnLst>
+                    </p:cTn>
+                  </p:par>
+                </p:childTnLst>
+              </p:cTn>
+              <p:prevCondLst>
+                <p:cond evt="onPrev" delay="0">
+                  <p:tgtEl>
+                    <p:sldTgt/>
+                  </p:tgtEl>
+                </p:cond>
+              </p:prevCondLst>
+              <p:nextCondLst>
+                <p:cond evt="onNext" delay="0">
+                  <p:tgtEl>
+                    <p:sldTgt/>
+                  </p:tgtEl>
+                </p:cond>
+              </p:nextCondLst>
+            </p:seq>
+          </p:childTnLst>
+        </p:cTn>
+      </p:par>
+    </p:tnLst>
+    <p:bldLst>
+      <p:bldP spid="3" grpId="0" uiExpand="1" build="p"/>
+    </p:bldLst>
+  </p:timing>
+</p:sld>
+</file>
+
+<file path=ppt/slides/slide48.xml><?xml version="1.0" encoding="utf-8"?>
+<p:sld xmlns:a="http://schemas.openxmlformats.org/drawingml/2006/main" xmlns:r="http://schemas.openxmlformats.org/officeDocument/2006/relationships" xmlns:p="http://schemas.openxmlformats.org/presentationml/2006/main">
+  <p:cSld>
+    <p:spTree>
+      <p:nvGrpSpPr>
+        <p:cNvPr id="1" name=""/>
+        <p:cNvGrpSpPr/>
+        <p:nvPr/>
+      </p:nvGrpSpPr>
+      <p:grpSpPr>
+        <a:xfrm>
+          <a:off x="0" y="0"/>
+          <a:ext cx="0" cy="0"/>
+          <a:chOff x="0" y="0"/>
+          <a:chExt cx="0" cy="0"/>
+        </a:xfrm>
+      </p:grpSpPr>
+      <p:sp>
+        <p:nvSpPr>
+          <p:cNvPr id="2" name="Title 1"/>
+          <p:cNvSpPr>
+            <a:spLocks noGrp="1"/>
+          </p:cNvSpPr>
+          <p:nvPr>
+            <p:ph type="title"/>
+          </p:nvPr>
+        </p:nvSpPr>
+        <p:spPr/>
+        <p:txBody>
+          <a:bodyPr/>
+          <a:lstStyle/>
+          <a:p>
+            <a:pPr marL="0" lvl="0" indent="0">
+              <a:buNone/>
+            </a:pPr>
+            <a:r>
+              <a:t>Wie liest man das Testergebnis?</a:t>
+            </a:r>
+          </a:p>
+        </p:txBody>
+      </p:sp>
+      <p:sp>
+        <p:nvSpPr>
+          <p:cNvPr id="3" name="Content Placeholder 2"/>
+          <p:cNvSpPr>
+            <a:spLocks noGrp="1"/>
+          </p:cNvSpPr>
+          <p:nvPr>
+            <p:ph idx="1"/>
+          </p:nvPr>
+        </p:nvSpPr>
+        <p:spPr/>
+        <p:txBody>
+          <a:bodyPr/>
+          <a:lstStyle/>
+          <a:p>
+            <a:pPr lvl="0"/>
+            <a:r>
               <a:t>Drei Kandidaten treten an:</a:t>
             </a:r>
           </a:p>
@@ -14535,7 +15756,7 @@
               <a:t>Bücher</a:t>
             </a:r>
             <a:r>
-              <a:t> („wer dieses mochte, mochte auch …“)</a:t>
+              <a:t> (Bücher, die von denselben Menschen ähnlich bewertet wurden)</a:t>
             </a:r>
           </a:p>
           <a:p>
@@ -14966,7 +16187,7 @@
 </p:sld>
 </file>
 
-<file path=ppt/slides/slide46.xml><?xml version="1.0" encoding="utf-8"?>
+<file path=ppt/slides/slide49.xml><?xml version="1.0" encoding="utf-8"?>
 <p:sld xmlns:a="http://schemas.openxmlformats.org/drawingml/2006/main" xmlns:r="http://schemas.openxmlformats.org/officeDocument/2006/relationships" xmlns:p="http://schemas.openxmlformats.org/presentationml/2006/main">
   <p:cSld>
     <p:spTree>
@@ -15042,863 +16263,6 @@
   <p:clrMapOvr>
     <a:masterClrMapping/>
   </p:clrMapOvr>
-</p:sld>
-</file>
-
-<file path=ppt/slides/slide47.xml><?xml version="1.0" encoding="utf-8"?>
-<p:sld xmlns:a="http://schemas.openxmlformats.org/drawingml/2006/main" xmlns:r="http://schemas.openxmlformats.org/officeDocument/2006/relationships" xmlns:p="http://schemas.openxmlformats.org/presentationml/2006/main">
-  <p:cSld>
-    <p:spTree>
-      <p:nvGrpSpPr>
-        <p:cNvPr id="1" name=""/>
-        <p:cNvGrpSpPr/>
-        <p:nvPr/>
-      </p:nvGrpSpPr>
-      <p:grpSpPr>
-        <a:xfrm>
-          <a:off x="0" y="0"/>
-          <a:ext cx="0" cy="0"/>
-          <a:chOff x="0" y="0"/>
-          <a:chExt cx="0" cy="0"/>
-        </a:xfrm>
-      </p:grpSpPr>
-      <p:sp>
-        <p:nvSpPr>
-          <p:cNvPr id="2" name="Title 1"/>
-          <p:cNvSpPr>
-            <a:spLocks noGrp="1"/>
-          </p:cNvSpPr>
-          <p:nvPr>
-            <p:ph type="title"/>
-          </p:nvPr>
-        </p:nvSpPr>
-        <p:spPr/>
-        <p:txBody>
-          <a:bodyPr/>
-          <a:lstStyle/>
-          <a:p>
-            <a:pPr marL="0" lvl="0" indent="0">
-              <a:buNone/>
-            </a:pPr>
-            <a:r>
-              <a:t>Was bedeuten die Abkürzungen?</a:t>
-            </a:r>
-          </a:p>
-        </p:txBody>
-      </p:sp>
-      <p:sp>
-        <p:nvSpPr>
-          <p:cNvPr id="3" name="Content Placeholder 2"/>
-          <p:cNvSpPr>
-            <a:spLocks noGrp="1"/>
-          </p:cNvSpPr>
-          <p:nvPr>
-            <p:ph idx="1"/>
-          </p:nvPr>
-        </p:nvSpPr>
-        <p:spPr/>
-        <p:txBody>
-          <a:bodyPr/>
-          <a:lstStyle/>
-          <a:p>
-            <a:pPr lvl="0"/>
-            <a:r>
-              <a:rPr b="1"/>
-              <a:t>ROC</a:t>
-            </a:r>
-            <a:r>
-              <a:t> — Receiver Operating Characteristic: wie gut trennt ein Verfahren Treffer von Fehlern?</a:t>
-            </a:r>
-          </a:p>
-          <a:p>
-            <a:pPr lvl="0"/>
-            <a:r>
-              <a:rPr b="1"/>
-              <a:t>TPR</a:t>
-            </a:r>
-            <a:r>
-              <a:t> — True Positive Rate: Anteil der Lieblingsbücher, die das System gefunden hat</a:t>
-            </a:r>
-          </a:p>
-          <a:p>
-            <a:pPr lvl="0"/>
-            <a:r>
-              <a:rPr b="1"/>
-              <a:t>FPR</a:t>
-            </a:r>
-            <a:r>
-              <a:t> — False Positive Rate: Anteil der Empfehlungen, die daneben lagen</a:t>
-            </a:r>
-          </a:p>
-          <a:p>
-            <a:pPr lvl="0"/>
-            <a:r>
-              <a:t>Eine perfekte Kurve schmiegt sich an die obere linke Ecke — viel TPR, kaum FPR</a:t>
-            </a:r>
-          </a:p>
-        </p:txBody>
-      </p:sp>
-    </p:spTree>
-  </p:cSld>
-  <p:clrMapOvr>
-    <a:masterClrMapping/>
-  </p:clrMapOvr>
-  <p:timing>
-    <p:tnLst>
-      <p:par>
-        <p:cTn id="1" dur="indefinite" restart="never" nodeType="tmRoot">
-          <p:childTnLst>
-            <p:seq concurrent="1" nextAc="seek">
-              <p:cTn id="2" dur="indefinite" nodeType="mainSeq">
-                <p:childTnLst>
-                  <p:par>
-                    <p:cTn id="3" fill="hold">
-                      <p:stCondLst>
-                        <p:cond delay="indefinite"/>
-                      </p:stCondLst>
-                      <p:childTnLst>
-                        <p:par>
-                          <p:cTn id="4" fill="hold">
-                            <p:stCondLst>
-                              <p:cond delay="0"/>
-                            </p:stCondLst>
-                            <p:childTnLst>
-                              <p:par>
-                                <p:cTn id="5" presetID="1" presetClass="entr" presetSubtype="0" fill="hold" grpId="0" nodeType="clickEffect">
-                                  <p:stCondLst>
-                                    <p:cond delay="0"/>
-                                  </p:stCondLst>
-                                  <p:childTnLst>
-                                    <p:set>
-                                      <p:cBhvr>
-                                        <p:cTn id="6" dur="1" fill="hold">
-                                          <p:stCondLst>
-                                            <p:cond delay="0"/>
-                                          </p:stCondLst>
-                                        </p:cTn>
-                                        <p:tgtEl>
-                                          <p:spTgt spid="3">
-                                            <p:txEl>
-                                              <p:pRg st="0" end="0"/>
-                                            </p:txEl>
-                                          </p:spTgt>
-                                        </p:tgtEl>
-                                        <p:attrNameLst>
-                                          <p:attrName>style.visibility</p:attrName>
-                                        </p:attrNameLst>
-                                      </p:cBhvr>
-                                      <p:to>
-                                        <p:strVal val="visible"/>
-                                      </p:to>
-                                    </p:set>
-                                  </p:childTnLst>
-                                </p:cTn>
-                              </p:par>
-                            </p:childTnLst>
-                          </p:cTn>
-                        </p:par>
-                      </p:childTnLst>
-                    </p:cTn>
-                  </p:par>
-                  <p:par>
-                    <p:cTn id="7" fill="hold">
-                      <p:stCondLst>
-                        <p:cond delay="indefinite"/>
-                      </p:stCondLst>
-                      <p:childTnLst>
-                        <p:par>
-                          <p:cTn id="8" fill="hold">
-                            <p:stCondLst>
-                              <p:cond delay="0"/>
-                            </p:stCondLst>
-                            <p:childTnLst>
-                              <p:par>
-                                <p:cTn id="9" presetID="1" presetClass="entr" presetSubtype="0" fill="hold" grpId="0" nodeType="clickEffect">
-                                  <p:stCondLst>
-                                    <p:cond delay="0"/>
-                                  </p:stCondLst>
-                                  <p:childTnLst>
-                                    <p:set>
-                                      <p:cBhvr>
-                                        <p:cTn id="10" dur="1" fill="hold">
-                                          <p:stCondLst>
-                                            <p:cond delay="0"/>
-                                          </p:stCondLst>
-                                        </p:cTn>
-                                        <p:tgtEl>
-                                          <p:spTgt spid="3">
-                                            <p:txEl>
-                                              <p:pRg st="1" end="1"/>
-                                            </p:txEl>
-                                          </p:spTgt>
-                                        </p:tgtEl>
-                                        <p:attrNameLst>
-                                          <p:attrName>style.visibility</p:attrName>
-                                        </p:attrNameLst>
-                                      </p:cBhvr>
-                                      <p:to>
-                                        <p:strVal val="visible"/>
-                                      </p:to>
-                                    </p:set>
-                                  </p:childTnLst>
-                                </p:cTn>
-                              </p:par>
-                            </p:childTnLst>
-                          </p:cTn>
-                        </p:par>
-                      </p:childTnLst>
-                    </p:cTn>
-                  </p:par>
-                  <p:par>
-                    <p:cTn id="11" fill="hold">
-                      <p:stCondLst>
-                        <p:cond delay="indefinite"/>
-                      </p:stCondLst>
-                      <p:childTnLst>
-                        <p:par>
-                          <p:cTn id="12" fill="hold">
-                            <p:stCondLst>
-                              <p:cond delay="0"/>
-                            </p:stCondLst>
-                            <p:childTnLst>
-                              <p:par>
-                                <p:cTn id="13" presetID="1" presetClass="entr" presetSubtype="0" fill="hold" grpId="0" nodeType="clickEffect">
-                                  <p:stCondLst>
-                                    <p:cond delay="0"/>
-                                  </p:stCondLst>
-                                  <p:childTnLst>
-                                    <p:set>
-                                      <p:cBhvr>
-                                        <p:cTn id="14" dur="1" fill="hold">
-                                          <p:stCondLst>
-                                            <p:cond delay="0"/>
-                                          </p:stCondLst>
-                                        </p:cTn>
-                                        <p:tgtEl>
-                                          <p:spTgt spid="3">
-                                            <p:txEl>
-                                              <p:pRg st="2" end="2"/>
-                                            </p:txEl>
-                                          </p:spTgt>
-                                        </p:tgtEl>
-                                        <p:attrNameLst>
-                                          <p:attrName>style.visibility</p:attrName>
-                                        </p:attrNameLst>
-                                      </p:cBhvr>
-                                      <p:to>
-                                        <p:strVal val="visible"/>
-                                      </p:to>
-                                    </p:set>
-                                  </p:childTnLst>
-                                </p:cTn>
-                              </p:par>
-                            </p:childTnLst>
-                          </p:cTn>
-                        </p:par>
-                      </p:childTnLst>
-                    </p:cTn>
-                  </p:par>
-                  <p:par>
-                    <p:cTn id="15" fill="hold">
-                      <p:stCondLst>
-                        <p:cond delay="indefinite"/>
-                      </p:stCondLst>
-                      <p:childTnLst>
-                        <p:par>
-                          <p:cTn id="16" fill="hold">
-                            <p:stCondLst>
-                              <p:cond delay="0"/>
-                            </p:stCondLst>
-                            <p:childTnLst>
-                              <p:par>
-                                <p:cTn id="17" presetID="1" presetClass="entr" presetSubtype="0" fill="hold" grpId="0" nodeType="clickEffect">
-                                  <p:stCondLst>
-                                    <p:cond delay="0"/>
-                                  </p:stCondLst>
-                                  <p:childTnLst>
-                                    <p:set>
-                                      <p:cBhvr>
-                                        <p:cTn id="18" dur="1" fill="hold">
-                                          <p:stCondLst>
-                                            <p:cond delay="0"/>
-                                          </p:stCondLst>
-                                        </p:cTn>
-                                        <p:tgtEl>
-                                          <p:spTgt spid="3">
-                                            <p:txEl>
-                                              <p:pRg st="3" end="3"/>
-                                            </p:txEl>
-                                          </p:spTgt>
-                                        </p:tgtEl>
-                                        <p:attrNameLst>
-                                          <p:attrName>style.visibility</p:attrName>
-                                        </p:attrNameLst>
-                                      </p:cBhvr>
-                                      <p:to>
-                                        <p:strVal val="visible"/>
-                                      </p:to>
-                                    </p:set>
-                                  </p:childTnLst>
-                                </p:cTn>
-                              </p:par>
-                            </p:childTnLst>
-                          </p:cTn>
-                        </p:par>
-                      </p:childTnLst>
-                    </p:cTn>
-                  </p:par>
-                </p:childTnLst>
-              </p:cTn>
-              <p:prevCondLst>
-                <p:cond evt="onPrev" delay="0">
-                  <p:tgtEl>
-                    <p:sldTgt/>
-                  </p:tgtEl>
-                </p:cond>
-              </p:prevCondLst>
-              <p:nextCondLst>
-                <p:cond evt="onNext" delay="0">
-                  <p:tgtEl>
-                    <p:sldTgt/>
-                  </p:tgtEl>
-                </p:cond>
-              </p:nextCondLst>
-            </p:seq>
-          </p:childTnLst>
-        </p:cTn>
-      </p:par>
-    </p:tnLst>
-    <p:bldLst>
-      <p:bldP spid="3" grpId="0" uiExpand="1" build="p"/>
-    </p:bldLst>
-  </p:timing>
-</p:sld>
-</file>
-
-<file path=ppt/slides/slide48.xml><?xml version="1.0" encoding="utf-8"?>
-<p:sld xmlns:a="http://schemas.openxmlformats.org/drawingml/2006/main" xmlns:r="http://schemas.openxmlformats.org/officeDocument/2006/relationships" xmlns:p="http://schemas.openxmlformats.org/presentationml/2006/main">
-  <p:cSld>
-    <p:spTree>
-      <p:nvGrpSpPr>
-        <p:cNvPr id="1" name=""/>
-        <p:cNvGrpSpPr/>
-        <p:nvPr/>
-      </p:nvGrpSpPr>
-      <p:grpSpPr>
-        <a:xfrm>
-          <a:off x="0" y="0"/>
-          <a:ext cx="0" cy="0"/>
-          <a:chOff x="0" y="0"/>
-          <a:chExt cx="0" cy="0"/>
-        </a:xfrm>
-      </p:grpSpPr>
-      <p:sp>
-        <p:nvSpPr>
-          <p:cNvPr id="2" name="Title 1"/>
-          <p:cNvSpPr>
-            <a:spLocks noGrp="1"/>
-          </p:cNvSpPr>
-          <p:nvPr>
-            <p:ph type="title"/>
-          </p:nvPr>
-        </p:nvSpPr>
-        <p:spPr/>
-        <p:txBody>
-          <a:bodyPr/>
-          <a:lstStyle/>
-          <a:p>
-            <a:pPr marL="0" lvl="0" indent="0">
-              <a:buNone/>
-            </a:pPr>
-            <a:r>
-              <a:t>Was sehen wir im Bild?</a:t>
-            </a:r>
-          </a:p>
-        </p:txBody>
-      </p:sp>
-      <p:sp>
-        <p:nvSpPr>
-          <p:cNvPr id="3" name="Content Placeholder 2"/>
-          <p:cNvSpPr>
-            <a:spLocks noGrp="1"/>
-          </p:cNvSpPr>
-          <p:nvPr>
-            <p:ph idx="1"/>
-          </p:nvPr>
-        </p:nvSpPr>
-        <p:spPr/>
-        <p:txBody>
-          <a:bodyPr/>
-          <a:lstStyle/>
-          <a:p>
-            <a:pPr lvl="0"/>
-            <a:r>
-              <a:t>UBCF und IBCF liegen bei wenigen Empfehlungen (N=1, 5) über der Diagonale — sie treffen öfter als Zufall</a:t>
-            </a:r>
-          </a:p>
-          <a:p>
-            <a:pPr lvl="0"/>
-            <a:r>
-              <a:t>Zufall liegt darunter: er empfiehlt gleichmäßig, die Testbücher sind aber nicht gleichmäßig verteilt</a:t>
-            </a:r>
-          </a:p>
-          <a:p>
-            <a:pPr lvl="0"/>
-            <a:r>
-              <a:t>UBCF und IBCF greifen bevorzugt auf viel bewertete Bücher zurück — und treffen den Test-Pool deshalb öfter</a:t>
-            </a:r>
-          </a:p>
-          <a:p>
-            <a:pPr lvl="0"/>
-            <a:r>
-              <a:t>Alle Werte sind winzig (max. ~2 %): selbst das beste Verfahren findet nur einen Bruchteil der versteckten Bücher — das ist Sparsity</a:t>
-            </a:r>
-          </a:p>
-        </p:txBody>
-      </p:sp>
-    </p:spTree>
-  </p:cSld>
-  <p:clrMapOvr>
-    <a:masterClrMapping/>
-  </p:clrMapOvr>
-  <p:timing>
-    <p:tnLst>
-      <p:par>
-        <p:cTn id="1" dur="indefinite" restart="never" nodeType="tmRoot">
-          <p:childTnLst>
-            <p:seq concurrent="1" nextAc="seek">
-              <p:cTn id="2" dur="indefinite" nodeType="mainSeq">
-                <p:childTnLst>
-                  <p:par>
-                    <p:cTn id="3" fill="hold">
-                      <p:stCondLst>
-                        <p:cond delay="indefinite"/>
-                      </p:stCondLst>
-                      <p:childTnLst>
-                        <p:par>
-                          <p:cTn id="4" fill="hold">
-                            <p:stCondLst>
-                              <p:cond delay="0"/>
-                            </p:stCondLst>
-                            <p:childTnLst>
-                              <p:par>
-                                <p:cTn id="5" presetID="1" presetClass="entr" presetSubtype="0" fill="hold" grpId="0" nodeType="clickEffect">
-                                  <p:stCondLst>
-                                    <p:cond delay="0"/>
-                                  </p:stCondLst>
-                                  <p:childTnLst>
-                                    <p:set>
-                                      <p:cBhvr>
-                                        <p:cTn id="6" dur="1" fill="hold">
-                                          <p:stCondLst>
-                                            <p:cond delay="0"/>
-                                          </p:stCondLst>
-                                        </p:cTn>
-                                        <p:tgtEl>
-                                          <p:spTgt spid="3">
-                                            <p:txEl>
-                                              <p:pRg st="0" end="0"/>
-                                            </p:txEl>
-                                          </p:spTgt>
-                                        </p:tgtEl>
-                                        <p:attrNameLst>
-                                          <p:attrName>style.visibility</p:attrName>
-                                        </p:attrNameLst>
-                                      </p:cBhvr>
-                                      <p:to>
-                                        <p:strVal val="visible"/>
-                                      </p:to>
-                                    </p:set>
-                                  </p:childTnLst>
-                                </p:cTn>
-                              </p:par>
-                            </p:childTnLst>
-                          </p:cTn>
-                        </p:par>
-                      </p:childTnLst>
-                    </p:cTn>
-                  </p:par>
-                  <p:par>
-                    <p:cTn id="7" fill="hold">
-                      <p:stCondLst>
-                        <p:cond delay="indefinite"/>
-                      </p:stCondLst>
-                      <p:childTnLst>
-                        <p:par>
-                          <p:cTn id="8" fill="hold">
-                            <p:stCondLst>
-                              <p:cond delay="0"/>
-                            </p:stCondLst>
-                            <p:childTnLst>
-                              <p:par>
-                                <p:cTn id="9" presetID="1" presetClass="entr" presetSubtype="0" fill="hold" grpId="0" nodeType="clickEffect">
-                                  <p:stCondLst>
-                                    <p:cond delay="0"/>
-                                  </p:stCondLst>
-                                  <p:childTnLst>
-                                    <p:set>
-                                      <p:cBhvr>
-                                        <p:cTn id="10" dur="1" fill="hold">
-                                          <p:stCondLst>
-                                            <p:cond delay="0"/>
-                                          </p:stCondLst>
-                                        </p:cTn>
-                                        <p:tgtEl>
-                                          <p:spTgt spid="3">
-                                            <p:txEl>
-                                              <p:pRg st="1" end="1"/>
-                                            </p:txEl>
-                                          </p:spTgt>
-                                        </p:tgtEl>
-                                        <p:attrNameLst>
-                                          <p:attrName>style.visibility</p:attrName>
-                                        </p:attrNameLst>
-                                      </p:cBhvr>
-                                      <p:to>
-                                        <p:strVal val="visible"/>
-                                      </p:to>
-                                    </p:set>
-                                  </p:childTnLst>
-                                </p:cTn>
-                              </p:par>
-                            </p:childTnLst>
-                          </p:cTn>
-                        </p:par>
-                      </p:childTnLst>
-                    </p:cTn>
-                  </p:par>
-                  <p:par>
-                    <p:cTn id="11" fill="hold">
-                      <p:stCondLst>
-                        <p:cond delay="indefinite"/>
-                      </p:stCondLst>
-                      <p:childTnLst>
-                        <p:par>
-                          <p:cTn id="12" fill="hold">
-                            <p:stCondLst>
-                              <p:cond delay="0"/>
-                            </p:stCondLst>
-                            <p:childTnLst>
-                              <p:par>
-                                <p:cTn id="13" presetID="1" presetClass="entr" presetSubtype="0" fill="hold" grpId="0" nodeType="clickEffect">
-                                  <p:stCondLst>
-                                    <p:cond delay="0"/>
-                                  </p:stCondLst>
-                                  <p:childTnLst>
-                                    <p:set>
-                                      <p:cBhvr>
-                                        <p:cTn id="14" dur="1" fill="hold">
-                                          <p:stCondLst>
-                                            <p:cond delay="0"/>
-                                          </p:stCondLst>
-                                        </p:cTn>
-                                        <p:tgtEl>
-                                          <p:spTgt spid="3">
-                                            <p:txEl>
-                                              <p:pRg st="2" end="2"/>
-                                            </p:txEl>
-                                          </p:spTgt>
-                                        </p:tgtEl>
-                                        <p:attrNameLst>
-                                          <p:attrName>style.visibility</p:attrName>
-                                        </p:attrNameLst>
-                                      </p:cBhvr>
-                                      <p:to>
-                                        <p:strVal val="visible"/>
-                                      </p:to>
-                                    </p:set>
-                                  </p:childTnLst>
-                                </p:cTn>
-                              </p:par>
-                            </p:childTnLst>
-                          </p:cTn>
-                        </p:par>
-                      </p:childTnLst>
-                    </p:cTn>
-                  </p:par>
-                  <p:par>
-                    <p:cTn id="15" fill="hold">
-                      <p:stCondLst>
-                        <p:cond delay="indefinite"/>
-                      </p:stCondLst>
-                      <p:childTnLst>
-                        <p:par>
-                          <p:cTn id="16" fill="hold">
-                            <p:stCondLst>
-                              <p:cond delay="0"/>
-                            </p:stCondLst>
-                            <p:childTnLst>
-                              <p:par>
-                                <p:cTn id="17" presetID="1" presetClass="entr" presetSubtype="0" fill="hold" grpId="0" nodeType="clickEffect">
-                                  <p:stCondLst>
-                                    <p:cond delay="0"/>
-                                  </p:stCondLst>
-                                  <p:childTnLst>
-                                    <p:set>
-                                      <p:cBhvr>
-                                        <p:cTn id="18" dur="1" fill="hold">
-                                          <p:stCondLst>
-                                            <p:cond delay="0"/>
-                                          </p:stCondLst>
-                                        </p:cTn>
-                                        <p:tgtEl>
-                                          <p:spTgt spid="3">
-                                            <p:txEl>
-                                              <p:pRg st="3" end="3"/>
-                                            </p:txEl>
-                                          </p:spTgt>
-                                        </p:tgtEl>
-                                        <p:attrNameLst>
-                                          <p:attrName>style.visibility</p:attrName>
-                                        </p:attrNameLst>
-                                      </p:cBhvr>
-                                      <p:to>
-                                        <p:strVal val="visible"/>
-                                      </p:to>
-                                    </p:set>
-                                  </p:childTnLst>
-                                </p:cTn>
-                              </p:par>
-                            </p:childTnLst>
-                          </p:cTn>
-                        </p:par>
-                      </p:childTnLst>
-                    </p:cTn>
-                  </p:par>
-                </p:childTnLst>
-              </p:cTn>
-              <p:prevCondLst>
-                <p:cond evt="onPrev" delay="0">
-                  <p:tgtEl>
-                    <p:sldTgt/>
-                  </p:tgtEl>
-                </p:cond>
-              </p:prevCondLst>
-              <p:nextCondLst>
-                <p:cond evt="onNext" delay="0">
-                  <p:tgtEl>
-                    <p:sldTgt/>
-                  </p:tgtEl>
-                </p:cond>
-              </p:nextCondLst>
-            </p:seq>
-          </p:childTnLst>
-        </p:cTn>
-      </p:par>
-    </p:tnLst>
-    <p:bldLst>
-      <p:bldP spid="3" grpId="0" uiExpand="1" build="p"/>
-    </p:bldLst>
-  </p:timing>
-</p:sld>
-</file>
-
-<file path=ppt/slides/slide49.xml><?xml version="1.0" encoding="utf-8"?>
-<p:sld xmlns:a="http://schemas.openxmlformats.org/drawingml/2006/main" xmlns:r="http://schemas.openxmlformats.org/officeDocument/2006/relationships" xmlns:p="http://schemas.openxmlformats.org/presentationml/2006/main">
-  <p:cSld>
-    <p:spTree>
-      <p:nvGrpSpPr>
-        <p:cNvPr id="1" name=""/>
-        <p:cNvGrpSpPr/>
-        <p:nvPr/>
-      </p:nvGrpSpPr>
-      <p:grpSpPr>
-        <a:xfrm>
-          <a:off x="0" y="0"/>
-          <a:ext cx="0" cy="0"/>
-          <a:chOff x="0" y="0"/>
-          <a:chExt cx="0" cy="0"/>
-        </a:xfrm>
-      </p:grpSpPr>
-      <p:sp>
-        <p:nvSpPr>
-          <p:cNvPr id="2" name="Title 1"/>
-          <p:cNvSpPr>
-            <a:spLocks noGrp="1"/>
-          </p:cNvSpPr>
-          <p:nvPr>
-            <p:ph type="title"/>
-          </p:nvPr>
-        </p:nvSpPr>
-        <p:spPr/>
-        <p:txBody>
-          <a:bodyPr/>
-          <a:lstStyle/>
-          <a:p>
-            <a:pPr marL="0" lvl="0" indent="0">
-              <a:buNone/>
-            </a:pPr>
-            <a:r>
-              <a:t>Wie würden Sie es lösen: Lesertypen?</a:t>
-            </a:r>
-          </a:p>
-        </p:txBody>
-      </p:sp>
-      <p:sp>
-        <p:nvSpPr>
-          <p:cNvPr id="3" name="Content Placeholder 2"/>
-          <p:cNvSpPr>
-            <a:spLocks noGrp="1"/>
-          </p:cNvSpPr>
-          <p:nvPr>
-            <p:ph idx="1"/>
-          </p:nvPr>
-        </p:nvSpPr>
-        <p:spPr/>
-        <p:txBody>
-          <a:bodyPr/>
-          <a:lstStyle/>
-          <a:p>
-            <a:pPr lvl="0"/>
-            <a:r>
-              <a:t>Aufgabe: Beschreiben Sie die Nutzerschaft in einer Handvoll Typen — ohne dass jemand die Typen vorgibt</a:t>
-            </a:r>
-          </a:p>
-          <a:p>
-            <a:pPr lvl="0"/>
-            <a:r>
-              <a:rPr b="1"/>
-              <a:t>Welche Merkmale aus den Tabellen würden Sie heranziehen? Woran erkennt man „ähnliche” Nutzer:innen?</a:t>
-            </a:r>
-          </a:p>
-        </p:txBody>
-      </p:sp>
-    </p:spTree>
-  </p:cSld>
-  <p:clrMapOvr>
-    <a:masterClrMapping/>
-  </p:clrMapOvr>
-  <p:timing>
-    <p:tnLst>
-      <p:par>
-        <p:cTn id="1" dur="indefinite" restart="never" nodeType="tmRoot">
-          <p:childTnLst>
-            <p:seq concurrent="1" nextAc="seek">
-              <p:cTn id="2" dur="indefinite" nodeType="mainSeq">
-                <p:childTnLst>
-                  <p:par>
-                    <p:cTn id="3" fill="hold">
-                      <p:stCondLst>
-                        <p:cond delay="indefinite"/>
-                      </p:stCondLst>
-                      <p:childTnLst>
-                        <p:par>
-                          <p:cTn id="4" fill="hold">
-                            <p:stCondLst>
-                              <p:cond delay="0"/>
-                            </p:stCondLst>
-                            <p:childTnLst>
-                              <p:par>
-                                <p:cTn id="5" presetID="1" presetClass="entr" presetSubtype="0" fill="hold" grpId="0" nodeType="clickEffect">
-                                  <p:stCondLst>
-                                    <p:cond delay="0"/>
-                                  </p:stCondLst>
-                                  <p:childTnLst>
-                                    <p:set>
-                                      <p:cBhvr>
-                                        <p:cTn id="6" dur="1" fill="hold">
-                                          <p:stCondLst>
-                                            <p:cond delay="0"/>
-                                          </p:stCondLst>
-                                        </p:cTn>
-                                        <p:tgtEl>
-                                          <p:spTgt spid="3">
-                                            <p:txEl>
-                                              <p:pRg st="0" end="0"/>
-                                            </p:txEl>
-                                          </p:spTgt>
-                                        </p:tgtEl>
-                                        <p:attrNameLst>
-                                          <p:attrName>style.visibility</p:attrName>
-                                        </p:attrNameLst>
-                                      </p:cBhvr>
-                                      <p:to>
-                                        <p:strVal val="visible"/>
-                                      </p:to>
-                                    </p:set>
-                                  </p:childTnLst>
-                                </p:cTn>
-                              </p:par>
-                            </p:childTnLst>
-                          </p:cTn>
-                        </p:par>
-                      </p:childTnLst>
-                    </p:cTn>
-                  </p:par>
-                  <p:par>
-                    <p:cTn id="7" fill="hold">
-                      <p:stCondLst>
-                        <p:cond delay="indefinite"/>
-                      </p:stCondLst>
-                      <p:childTnLst>
-                        <p:par>
-                          <p:cTn id="8" fill="hold">
-                            <p:stCondLst>
-                              <p:cond delay="0"/>
-                            </p:stCondLst>
-                            <p:childTnLst>
-                              <p:par>
-                                <p:cTn id="9" presetID="1" presetClass="entr" presetSubtype="0" fill="hold" grpId="0" nodeType="clickEffect">
-                                  <p:stCondLst>
-                                    <p:cond delay="0"/>
-                                  </p:stCondLst>
-                                  <p:childTnLst>
-                                    <p:set>
-                                      <p:cBhvr>
-                                        <p:cTn id="10" dur="1" fill="hold">
-                                          <p:stCondLst>
-                                            <p:cond delay="0"/>
-                                          </p:stCondLst>
-                                        </p:cTn>
-                                        <p:tgtEl>
-                                          <p:spTgt spid="3">
-                                            <p:txEl>
-                                              <p:pRg st="1" end="1"/>
-                                            </p:txEl>
-                                          </p:spTgt>
-                                        </p:tgtEl>
-                                        <p:attrNameLst>
-                                          <p:attrName>style.visibility</p:attrName>
-                                        </p:attrNameLst>
-                                      </p:cBhvr>
-                                      <p:to>
-                                        <p:strVal val="visible"/>
-                                      </p:to>
-                                    </p:set>
-                                  </p:childTnLst>
-                                </p:cTn>
-                              </p:par>
-                            </p:childTnLst>
-                          </p:cTn>
-                        </p:par>
-                      </p:childTnLst>
-                    </p:cTn>
-                  </p:par>
-                </p:childTnLst>
-              </p:cTn>
-              <p:prevCondLst>
-                <p:cond evt="onPrev" delay="0">
-                  <p:tgtEl>
-                    <p:sldTgt/>
-                  </p:tgtEl>
-                </p:cond>
-              </p:prevCondLst>
-              <p:nextCondLst>
-                <p:cond evt="onNext" delay="0">
-                  <p:tgtEl>
-                    <p:sldTgt/>
-                  </p:tgtEl>
-                </p:cond>
-              </p:nextCondLst>
-            </p:seq>
-          </p:childTnLst>
-        </p:cTn>
-      </p:par>
-    </p:tnLst>
-    <p:bldLst>
-      <p:bldP spid="3" grpId="0" uiExpand="1" build="p"/>
-    </p:bldLst>
-  </p:timing>
 </p:sld>
 </file>
 
@@ -16215,7 +16579,7 @@
               <a:buNone/>
             </a:pPr>
             <a:r>
-              <a:t>Clustering: Lesertypen finden</a:t>
+              <a:t>Was bedeuten die Abkürzungen?</a:t>
             </a:r>
           </a:p>
         </p:txBody>
@@ -16237,29 +16601,37 @@
           <a:p>
             <a:pPr lvl="0"/>
             <a:r>
-              <a:t>Idee: </a:t>
-            </a:r>
-            <a:r>
               <a:rPr b="1"/>
-              <a:t>Gruppiere Ähnliches, ohne vorher Gruppen festzulegen</a:t>
+              <a:t>ROC</a:t>
+            </a:r>
+            <a:r>
+              <a:t> — Receiver Operating Characteristic: wie gut trennt ein Verfahren Treffer von Fehlern?</a:t>
             </a:r>
           </a:p>
           <a:p>
             <a:pPr lvl="0"/>
             <a:r>
-              <a:t>Denken Sie an eine Schule: 800 Schulkinder (10–20 Jahre), 100 Lehrkräfte (30–65 Jahre)</a:t>
+              <a:rPr b="1"/>
+              <a:t>TPR</a:t>
+            </a:r>
+            <a:r>
+              <a:t> — True Positive Rate: Anteil der Lieblingsbücher, die das System gefunden hat</a:t>
             </a:r>
           </a:p>
           <a:p>
             <a:pPr lvl="0"/>
             <a:r>
-              <a:t>Ein Algorithmus, der das Konzept „Lehrkraft” gar nicht kennt, findet die zwei Gruppen trotzdem — allein über die Altersabstände</a:t>
+              <a:rPr b="1"/>
+              <a:t>FPR</a:t>
+            </a:r>
+            <a:r>
+              <a:t> — False Positive Rate: Anteil der Empfehlungen, die daneben lagen</a:t>
             </a:r>
           </a:p>
           <a:p>
             <a:pPr lvl="0"/>
             <a:r>
-              <a:t>Mehr braucht es nicht: Abstände messen, Nahes zusammenfassen</a:t>
+              <a:t>Eine perfekte Kurve schmiegt sich an die obere linke Ecke — viel TPR, kaum FPR</a:t>
             </a:r>
           </a:p>
         </p:txBody>
@@ -16502,6 +16874,855 @@
 </file>
 
 <file path=ppt/slides/slide51.xml><?xml version="1.0" encoding="utf-8"?>
+<p:sld xmlns:a="http://schemas.openxmlformats.org/drawingml/2006/main" xmlns:r="http://schemas.openxmlformats.org/officeDocument/2006/relationships" xmlns:p="http://schemas.openxmlformats.org/presentationml/2006/main">
+  <p:cSld>
+    <p:spTree>
+      <p:nvGrpSpPr>
+        <p:cNvPr id="1" name=""/>
+        <p:cNvGrpSpPr/>
+        <p:nvPr/>
+      </p:nvGrpSpPr>
+      <p:grpSpPr>
+        <a:xfrm>
+          <a:off x="0" y="0"/>
+          <a:ext cx="0" cy="0"/>
+          <a:chOff x="0" y="0"/>
+          <a:chExt cx="0" cy="0"/>
+        </a:xfrm>
+      </p:grpSpPr>
+      <p:sp>
+        <p:nvSpPr>
+          <p:cNvPr id="2" name="Title 1"/>
+          <p:cNvSpPr>
+            <a:spLocks noGrp="1"/>
+          </p:cNvSpPr>
+          <p:nvPr>
+            <p:ph type="title"/>
+          </p:nvPr>
+        </p:nvSpPr>
+        <p:spPr/>
+        <p:txBody>
+          <a:bodyPr/>
+          <a:lstStyle/>
+          <a:p>
+            <a:pPr marL="0" lvl="0" indent="0">
+              <a:buNone/>
+            </a:pPr>
+            <a:r>
+              <a:t>Was sehen wir im Bild?</a:t>
+            </a:r>
+          </a:p>
+        </p:txBody>
+      </p:sp>
+      <p:sp>
+        <p:nvSpPr>
+          <p:cNvPr id="3" name="Content Placeholder 2"/>
+          <p:cNvSpPr>
+            <a:spLocks noGrp="1"/>
+          </p:cNvSpPr>
+          <p:nvPr>
+            <p:ph idx="1"/>
+          </p:nvPr>
+        </p:nvSpPr>
+        <p:spPr/>
+        <p:txBody>
+          <a:bodyPr/>
+          <a:lstStyle/>
+          <a:p>
+            <a:pPr lvl="0"/>
+            <a:r>
+              <a:t>UBCF und IBCF liegen bei wenigen Empfehlungen (N=1, 5) über der Diagonale — sie treffen öfter als Zufall</a:t>
+            </a:r>
+          </a:p>
+          <a:p>
+            <a:pPr lvl="0"/>
+            <a:r>
+              <a:t>Zufall liegt darunter: er empfiehlt gleichmäßig, die Testbücher sind aber nicht gleichmäßig verteilt</a:t>
+            </a:r>
+          </a:p>
+          <a:p>
+            <a:pPr lvl="0"/>
+            <a:r>
+              <a:t>UBCF und IBCF greifen bevorzugt auf viel bewertete Bücher zurück — und treffen den Test-Pool deshalb öfter</a:t>
+            </a:r>
+          </a:p>
+          <a:p>
+            <a:pPr lvl="0"/>
+            <a:r>
+              <a:t>Alle Werte sind winzig (max. ~2 %): selbst das beste Verfahren findet nur einen Bruchteil der versteckten Bücher — das ist Sparsity</a:t>
+            </a:r>
+          </a:p>
+        </p:txBody>
+      </p:sp>
+    </p:spTree>
+  </p:cSld>
+  <p:clrMapOvr>
+    <a:masterClrMapping/>
+  </p:clrMapOvr>
+  <p:timing>
+    <p:tnLst>
+      <p:par>
+        <p:cTn id="1" dur="indefinite" restart="never" nodeType="tmRoot">
+          <p:childTnLst>
+            <p:seq concurrent="1" nextAc="seek">
+              <p:cTn id="2" dur="indefinite" nodeType="mainSeq">
+                <p:childTnLst>
+                  <p:par>
+                    <p:cTn id="3" fill="hold">
+                      <p:stCondLst>
+                        <p:cond delay="indefinite"/>
+                      </p:stCondLst>
+                      <p:childTnLst>
+                        <p:par>
+                          <p:cTn id="4" fill="hold">
+                            <p:stCondLst>
+                              <p:cond delay="0"/>
+                            </p:stCondLst>
+                            <p:childTnLst>
+                              <p:par>
+                                <p:cTn id="5" presetID="1" presetClass="entr" presetSubtype="0" fill="hold" grpId="0" nodeType="clickEffect">
+                                  <p:stCondLst>
+                                    <p:cond delay="0"/>
+                                  </p:stCondLst>
+                                  <p:childTnLst>
+                                    <p:set>
+                                      <p:cBhvr>
+                                        <p:cTn id="6" dur="1" fill="hold">
+                                          <p:stCondLst>
+                                            <p:cond delay="0"/>
+                                          </p:stCondLst>
+                                        </p:cTn>
+                                        <p:tgtEl>
+                                          <p:spTgt spid="3">
+                                            <p:txEl>
+                                              <p:pRg st="0" end="0"/>
+                                            </p:txEl>
+                                          </p:spTgt>
+                                        </p:tgtEl>
+                                        <p:attrNameLst>
+                                          <p:attrName>style.visibility</p:attrName>
+                                        </p:attrNameLst>
+                                      </p:cBhvr>
+                                      <p:to>
+                                        <p:strVal val="visible"/>
+                                      </p:to>
+                                    </p:set>
+                                  </p:childTnLst>
+                                </p:cTn>
+                              </p:par>
+                            </p:childTnLst>
+                          </p:cTn>
+                        </p:par>
+                      </p:childTnLst>
+                    </p:cTn>
+                  </p:par>
+                  <p:par>
+                    <p:cTn id="7" fill="hold">
+                      <p:stCondLst>
+                        <p:cond delay="indefinite"/>
+                      </p:stCondLst>
+                      <p:childTnLst>
+                        <p:par>
+                          <p:cTn id="8" fill="hold">
+                            <p:stCondLst>
+                              <p:cond delay="0"/>
+                            </p:stCondLst>
+                            <p:childTnLst>
+                              <p:par>
+                                <p:cTn id="9" presetID="1" presetClass="entr" presetSubtype="0" fill="hold" grpId="0" nodeType="clickEffect">
+                                  <p:stCondLst>
+                                    <p:cond delay="0"/>
+                                  </p:stCondLst>
+                                  <p:childTnLst>
+                                    <p:set>
+                                      <p:cBhvr>
+                                        <p:cTn id="10" dur="1" fill="hold">
+                                          <p:stCondLst>
+                                            <p:cond delay="0"/>
+                                          </p:stCondLst>
+                                        </p:cTn>
+                                        <p:tgtEl>
+                                          <p:spTgt spid="3">
+                                            <p:txEl>
+                                              <p:pRg st="1" end="1"/>
+                                            </p:txEl>
+                                          </p:spTgt>
+                                        </p:tgtEl>
+                                        <p:attrNameLst>
+                                          <p:attrName>style.visibility</p:attrName>
+                                        </p:attrNameLst>
+                                      </p:cBhvr>
+                                      <p:to>
+                                        <p:strVal val="visible"/>
+                                      </p:to>
+                                    </p:set>
+                                  </p:childTnLst>
+                                </p:cTn>
+                              </p:par>
+                            </p:childTnLst>
+                          </p:cTn>
+                        </p:par>
+                      </p:childTnLst>
+                    </p:cTn>
+                  </p:par>
+                  <p:par>
+                    <p:cTn id="11" fill="hold">
+                      <p:stCondLst>
+                        <p:cond delay="indefinite"/>
+                      </p:stCondLst>
+                      <p:childTnLst>
+                        <p:par>
+                          <p:cTn id="12" fill="hold">
+                            <p:stCondLst>
+                              <p:cond delay="0"/>
+                            </p:stCondLst>
+                            <p:childTnLst>
+                              <p:par>
+                                <p:cTn id="13" presetID="1" presetClass="entr" presetSubtype="0" fill="hold" grpId="0" nodeType="clickEffect">
+                                  <p:stCondLst>
+                                    <p:cond delay="0"/>
+                                  </p:stCondLst>
+                                  <p:childTnLst>
+                                    <p:set>
+                                      <p:cBhvr>
+                                        <p:cTn id="14" dur="1" fill="hold">
+                                          <p:stCondLst>
+                                            <p:cond delay="0"/>
+                                          </p:stCondLst>
+                                        </p:cTn>
+                                        <p:tgtEl>
+                                          <p:spTgt spid="3">
+                                            <p:txEl>
+                                              <p:pRg st="2" end="2"/>
+                                            </p:txEl>
+                                          </p:spTgt>
+                                        </p:tgtEl>
+                                        <p:attrNameLst>
+                                          <p:attrName>style.visibility</p:attrName>
+                                        </p:attrNameLst>
+                                      </p:cBhvr>
+                                      <p:to>
+                                        <p:strVal val="visible"/>
+                                      </p:to>
+                                    </p:set>
+                                  </p:childTnLst>
+                                </p:cTn>
+                              </p:par>
+                            </p:childTnLst>
+                          </p:cTn>
+                        </p:par>
+                      </p:childTnLst>
+                    </p:cTn>
+                  </p:par>
+                  <p:par>
+                    <p:cTn id="15" fill="hold">
+                      <p:stCondLst>
+                        <p:cond delay="indefinite"/>
+                      </p:stCondLst>
+                      <p:childTnLst>
+                        <p:par>
+                          <p:cTn id="16" fill="hold">
+                            <p:stCondLst>
+                              <p:cond delay="0"/>
+                            </p:stCondLst>
+                            <p:childTnLst>
+                              <p:par>
+                                <p:cTn id="17" presetID="1" presetClass="entr" presetSubtype="0" fill="hold" grpId="0" nodeType="clickEffect">
+                                  <p:stCondLst>
+                                    <p:cond delay="0"/>
+                                  </p:stCondLst>
+                                  <p:childTnLst>
+                                    <p:set>
+                                      <p:cBhvr>
+                                        <p:cTn id="18" dur="1" fill="hold">
+                                          <p:stCondLst>
+                                            <p:cond delay="0"/>
+                                          </p:stCondLst>
+                                        </p:cTn>
+                                        <p:tgtEl>
+                                          <p:spTgt spid="3">
+                                            <p:txEl>
+                                              <p:pRg st="3" end="3"/>
+                                            </p:txEl>
+                                          </p:spTgt>
+                                        </p:tgtEl>
+                                        <p:attrNameLst>
+                                          <p:attrName>style.visibility</p:attrName>
+                                        </p:attrNameLst>
+                                      </p:cBhvr>
+                                      <p:to>
+                                        <p:strVal val="visible"/>
+                                      </p:to>
+                                    </p:set>
+                                  </p:childTnLst>
+                                </p:cTn>
+                              </p:par>
+                            </p:childTnLst>
+                          </p:cTn>
+                        </p:par>
+                      </p:childTnLst>
+                    </p:cTn>
+                  </p:par>
+                </p:childTnLst>
+              </p:cTn>
+              <p:prevCondLst>
+                <p:cond evt="onPrev" delay="0">
+                  <p:tgtEl>
+                    <p:sldTgt/>
+                  </p:tgtEl>
+                </p:cond>
+              </p:prevCondLst>
+              <p:nextCondLst>
+                <p:cond evt="onNext" delay="0">
+                  <p:tgtEl>
+                    <p:sldTgt/>
+                  </p:tgtEl>
+                </p:cond>
+              </p:nextCondLst>
+            </p:seq>
+          </p:childTnLst>
+        </p:cTn>
+      </p:par>
+    </p:tnLst>
+    <p:bldLst>
+      <p:bldP spid="3" grpId="0" uiExpand="1" build="p"/>
+    </p:bldLst>
+  </p:timing>
+</p:sld>
+</file>
+
+<file path=ppt/slides/slide52.xml><?xml version="1.0" encoding="utf-8"?>
+<p:sld xmlns:a="http://schemas.openxmlformats.org/drawingml/2006/main" xmlns:r="http://schemas.openxmlformats.org/officeDocument/2006/relationships" xmlns:p="http://schemas.openxmlformats.org/presentationml/2006/main">
+  <p:cSld>
+    <p:spTree>
+      <p:nvGrpSpPr>
+        <p:cNvPr id="1" name=""/>
+        <p:cNvGrpSpPr/>
+        <p:nvPr/>
+      </p:nvGrpSpPr>
+      <p:grpSpPr>
+        <a:xfrm>
+          <a:off x="0" y="0"/>
+          <a:ext cx="0" cy="0"/>
+          <a:chOff x="0" y="0"/>
+          <a:chExt cx="0" cy="0"/>
+        </a:xfrm>
+      </p:grpSpPr>
+      <p:sp>
+        <p:nvSpPr>
+          <p:cNvPr id="2" name="Title 1"/>
+          <p:cNvSpPr>
+            <a:spLocks noGrp="1"/>
+          </p:cNvSpPr>
+          <p:nvPr>
+            <p:ph type="title"/>
+          </p:nvPr>
+        </p:nvSpPr>
+        <p:spPr/>
+        <p:txBody>
+          <a:bodyPr/>
+          <a:lstStyle/>
+          <a:p>
+            <a:pPr marL="0" lvl="0" indent="0">
+              <a:buNone/>
+            </a:pPr>
+            <a:r>
+              <a:t>Wie würden Sie es lösen: Lesertypen?</a:t>
+            </a:r>
+          </a:p>
+        </p:txBody>
+      </p:sp>
+      <p:sp>
+        <p:nvSpPr>
+          <p:cNvPr id="3" name="Content Placeholder 2"/>
+          <p:cNvSpPr>
+            <a:spLocks noGrp="1"/>
+          </p:cNvSpPr>
+          <p:nvPr>
+            <p:ph idx="1"/>
+          </p:nvPr>
+        </p:nvSpPr>
+        <p:spPr/>
+        <p:txBody>
+          <a:bodyPr/>
+          <a:lstStyle/>
+          <a:p>
+            <a:pPr lvl="0"/>
+            <a:r>
+              <a:t>Aufgabe: Beschreiben Sie die Nutzerschaft in einer Handvoll Typen — ohne dass jemand die Typen vorgibt</a:t>
+            </a:r>
+          </a:p>
+          <a:p>
+            <a:pPr lvl="0"/>
+            <a:r>
+              <a:rPr b="1"/>
+              <a:t>Welche Merkmale aus den Tabellen würden Sie heranziehen? Woran erkennt man „ähnliche” Nutzer:innen?</a:t>
+            </a:r>
+          </a:p>
+        </p:txBody>
+      </p:sp>
+    </p:spTree>
+  </p:cSld>
+  <p:clrMapOvr>
+    <a:masterClrMapping/>
+  </p:clrMapOvr>
+  <p:timing>
+    <p:tnLst>
+      <p:par>
+        <p:cTn id="1" dur="indefinite" restart="never" nodeType="tmRoot">
+          <p:childTnLst>
+            <p:seq concurrent="1" nextAc="seek">
+              <p:cTn id="2" dur="indefinite" nodeType="mainSeq">
+                <p:childTnLst>
+                  <p:par>
+                    <p:cTn id="3" fill="hold">
+                      <p:stCondLst>
+                        <p:cond delay="indefinite"/>
+                      </p:stCondLst>
+                      <p:childTnLst>
+                        <p:par>
+                          <p:cTn id="4" fill="hold">
+                            <p:stCondLst>
+                              <p:cond delay="0"/>
+                            </p:stCondLst>
+                            <p:childTnLst>
+                              <p:par>
+                                <p:cTn id="5" presetID="1" presetClass="entr" presetSubtype="0" fill="hold" grpId="0" nodeType="clickEffect">
+                                  <p:stCondLst>
+                                    <p:cond delay="0"/>
+                                  </p:stCondLst>
+                                  <p:childTnLst>
+                                    <p:set>
+                                      <p:cBhvr>
+                                        <p:cTn id="6" dur="1" fill="hold">
+                                          <p:stCondLst>
+                                            <p:cond delay="0"/>
+                                          </p:stCondLst>
+                                        </p:cTn>
+                                        <p:tgtEl>
+                                          <p:spTgt spid="3">
+                                            <p:txEl>
+                                              <p:pRg st="0" end="0"/>
+                                            </p:txEl>
+                                          </p:spTgt>
+                                        </p:tgtEl>
+                                        <p:attrNameLst>
+                                          <p:attrName>style.visibility</p:attrName>
+                                        </p:attrNameLst>
+                                      </p:cBhvr>
+                                      <p:to>
+                                        <p:strVal val="visible"/>
+                                      </p:to>
+                                    </p:set>
+                                  </p:childTnLst>
+                                </p:cTn>
+                              </p:par>
+                            </p:childTnLst>
+                          </p:cTn>
+                        </p:par>
+                      </p:childTnLst>
+                    </p:cTn>
+                  </p:par>
+                  <p:par>
+                    <p:cTn id="7" fill="hold">
+                      <p:stCondLst>
+                        <p:cond delay="indefinite"/>
+                      </p:stCondLst>
+                      <p:childTnLst>
+                        <p:par>
+                          <p:cTn id="8" fill="hold">
+                            <p:stCondLst>
+                              <p:cond delay="0"/>
+                            </p:stCondLst>
+                            <p:childTnLst>
+                              <p:par>
+                                <p:cTn id="9" presetID="1" presetClass="entr" presetSubtype="0" fill="hold" grpId="0" nodeType="clickEffect">
+                                  <p:stCondLst>
+                                    <p:cond delay="0"/>
+                                  </p:stCondLst>
+                                  <p:childTnLst>
+                                    <p:set>
+                                      <p:cBhvr>
+                                        <p:cTn id="10" dur="1" fill="hold">
+                                          <p:stCondLst>
+                                            <p:cond delay="0"/>
+                                          </p:stCondLst>
+                                        </p:cTn>
+                                        <p:tgtEl>
+                                          <p:spTgt spid="3">
+                                            <p:txEl>
+                                              <p:pRg st="1" end="1"/>
+                                            </p:txEl>
+                                          </p:spTgt>
+                                        </p:tgtEl>
+                                        <p:attrNameLst>
+                                          <p:attrName>style.visibility</p:attrName>
+                                        </p:attrNameLst>
+                                      </p:cBhvr>
+                                      <p:to>
+                                        <p:strVal val="visible"/>
+                                      </p:to>
+                                    </p:set>
+                                  </p:childTnLst>
+                                </p:cTn>
+                              </p:par>
+                            </p:childTnLst>
+                          </p:cTn>
+                        </p:par>
+                      </p:childTnLst>
+                    </p:cTn>
+                  </p:par>
+                </p:childTnLst>
+              </p:cTn>
+              <p:prevCondLst>
+                <p:cond evt="onPrev" delay="0">
+                  <p:tgtEl>
+                    <p:sldTgt/>
+                  </p:tgtEl>
+                </p:cond>
+              </p:prevCondLst>
+              <p:nextCondLst>
+                <p:cond evt="onNext" delay="0">
+                  <p:tgtEl>
+                    <p:sldTgt/>
+                  </p:tgtEl>
+                </p:cond>
+              </p:nextCondLst>
+            </p:seq>
+          </p:childTnLst>
+        </p:cTn>
+      </p:par>
+    </p:tnLst>
+    <p:bldLst>
+      <p:bldP spid="3" grpId="0" uiExpand="1" build="p"/>
+    </p:bldLst>
+  </p:timing>
+</p:sld>
+</file>
+
+<file path=ppt/slides/slide53.xml><?xml version="1.0" encoding="utf-8"?>
+<p:sld xmlns:a="http://schemas.openxmlformats.org/drawingml/2006/main" xmlns:r="http://schemas.openxmlformats.org/officeDocument/2006/relationships" xmlns:p="http://schemas.openxmlformats.org/presentationml/2006/main">
+  <p:cSld>
+    <p:spTree>
+      <p:nvGrpSpPr>
+        <p:cNvPr id="1" name=""/>
+        <p:cNvGrpSpPr/>
+        <p:nvPr/>
+      </p:nvGrpSpPr>
+      <p:grpSpPr>
+        <a:xfrm>
+          <a:off x="0" y="0"/>
+          <a:ext cx="0" cy="0"/>
+          <a:chOff x="0" y="0"/>
+          <a:chExt cx="0" cy="0"/>
+        </a:xfrm>
+      </p:grpSpPr>
+      <p:sp>
+        <p:nvSpPr>
+          <p:cNvPr id="2" name="Title 1"/>
+          <p:cNvSpPr>
+            <a:spLocks noGrp="1"/>
+          </p:cNvSpPr>
+          <p:nvPr>
+            <p:ph type="title"/>
+          </p:nvPr>
+        </p:nvSpPr>
+        <p:spPr/>
+        <p:txBody>
+          <a:bodyPr/>
+          <a:lstStyle/>
+          <a:p>
+            <a:pPr marL="0" lvl="0" indent="0">
+              <a:buNone/>
+            </a:pPr>
+            <a:r>
+              <a:t>Clustering: Lesertypen finden</a:t>
+            </a:r>
+          </a:p>
+        </p:txBody>
+      </p:sp>
+      <p:sp>
+        <p:nvSpPr>
+          <p:cNvPr id="3" name="Content Placeholder 2"/>
+          <p:cNvSpPr>
+            <a:spLocks noGrp="1"/>
+          </p:cNvSpPr>
+          <p:nvPr>
+            <p:ph idx="1"/>
+          </p:nvPr>
+        </p:nvSpPr>
+        <p:spPr/>
+        <p:txBody>
+          <a:bodyPr/>
+          <a:lstStyle/>
+          <a:p>
+            <a:pPr lvl="0"/>
+            <a:r>
+              <a:t>Idee: </a:t>
+            </a:r>
+            <a:r>
+              <a:rPr b="1"/>
+              <a:t>Gruppiere Ähnliches, ohne vorher Gruppen festzulegen</a:t>
+            </a:r>
+          </a:p>
+          <a:p>
+            <a:pPr lvl="0"/>
+            <a:r>
+              <a:t>Denken Sie an eine Schule: 800 Schulkinder (10–20 Jahre), 100 Lehrkräfte (30–65 Jahre)</a:t>
+            </a:r>
+          </a:p>
+          <a:p>
+            <a:pPr lvl="0"/>
+            <a:r>
+              <a:t>Ein Algorithmus, der das Konzept „Lehrkraft” gar nicht kennt, findet die zwei Gruppen trotzdem — allein über die Altersabstände</a:t>
+            </a:r>
+          </a:p>
+          <a:p>
+            <a:pPr lvl="0"/>
+            <a:r>
+              <a:t>Mehr braucht es nicht: Abstände messen, Nahes zusammenfassen</a:t>
+            </a:r>
+          </a:p>
+        </p:txBody>
+      </p:sp>
+    </p:spTree>
+  </p:cSld>
+  <p:clrMapOvr>
+    <a:masterClrMapping/>
+  </p:clrMapOvr>
+  <p:timing>
+    <p:tnLst>
+      <p:par>
+        <p:cTn id="1" dur="indefinite" restart="never" nodeType="tmRoot">
+          <p:childTnLst>
+            <p:seq concurrent="1" nextAc="seek">
+              <p:cTn id="2" dur="indefinite" nodeType="mainSeq">
+                <p:childTnLst>
+                  <p:par>
+                    <p:cTn id="3" fill="hold">
+                      <p:stCondLst>
+                        <p:cond delay="indefinite"/>
+                      </p:stCondLst>
+                      <p:childTnLst>
+                        <p:par>
+                          <p:cTn id="4" fill="hold">
+                            <p:stCondLst>
+                              <p:cond delay="0"/>
+                            </p:stCondLst>
+                            <p:childTnLst>
+                              <p:par>
+                                <p:cTn id="5" presetID="1" presetClass="entr" presetSubtype="0" fill="hold" grpId="0" nodeType="clickEffect">
+                                  <p:stCondLst>
+                                    <p:cond delay="0"/>
+                                  </p:stCondLst>
+                                  <p:childTnLst>
+                                    <p:set>
+                                      <p:cBhvr>
+                                        <p:cTn id="6" dur="1" fill="hold">
+                                          <p:stCondLst>
+                                            <p:cond delay="0"/>
+                                          </p:stCondLst>
+                                        </p:cTn>
+                                        <p:tgtEl>
+                                          <p:spTgt spid="3">
+                                            <p:txEl>
+                                              <p:pRg st="0" end="0"/>
+                                            </p:txEl>
+                                          </p:spTgt>
+                                        </p:tgtEl>
+                                        <p:attrNameLst>
+                                          <p:attrName>style.visibility</p:attrName>
+                                        </p:attrNameLst>
+                                      </p:cBhvr>
+                                      <p:to>
+                                        <p:strVal val="visible"/>
+                                      </p:to>
+                                    </p:set>
+                                  </p:childTnLst>
+                                </p:cTn>
+                              </p:par>
+                            </p:childTnLst>
+                          </p:cTn>
+                        </p:par>
+                      </p:childTnLst>
+                    </p:cTn>
+                  </p:par>
+                  <p:par>
+                    <p:cTn id="7" fill="hold">
+                      <p:stCondLst>
+                        <p:cond delay="indefinite"/>
+                      </p:stCondLst>
+                      <p:childTnLst>
+                        <p:par>
+                          <p:cTn id="8" fill="hold">
+                            <p:stCondLst>
+                              <p:cond delay="0"/>
+                            </p:stCondLst>
+                            <p:childTnLst>
+                              <p:par>
+                                <p:cTn id="9" presetID="1" presetClass="entr" presetSubtype="0" fill="hold" grpId="0" nodeType="clickEffect">
+                                  <p:stCondLst>
+                                    <p:cond delay="0"/>
+                                  </p:stCondLst>
+                                  <p:childTnLst>
+                                    <p:set>
+                                      <p:cBhvr>
+                                        <p:cTn id="10" dur="1" fill="hold">
+                                          <p:stCondLst>
+                                            <p:cond delay="0"/>
+                                          </p:stCondLst>
+                                        </p:cTn>
+                                        <p:tgtEl>
+                                          <p:spTgt spid="3">
+                                            <p:txEl>
+                                              <p:pRg st="1" end="1"/>
+                                            </p:txEl>
+                                          </p:spTgt>
+                                        </p:tgtEl>
+                                        <p:attrNameLst>
+                                          <p:attrName>style.visibility</p:attrName>
+                                        </p:attrNameLst>
+                                      </p:cBhvr>
+                                      <p:to>
+                                        <p:strVal val="visible"/>
+                                      </p:to>
+                                    </p:set>
+                                  </p:childTnLst>
+                                </p:cTn>
+                              </p:par>
+                            </p:childTnLst>
+                          </p:cTn>
+                        </p:par>
+                      </p:childTnLst>
+                    </p:cTn>
+                  </p:par>
+                  <p:par>
+                    <p:cTn id="11" fill="hold">
+                      <p:stCondLst>
+                        <p:cond delay="indefinite"/>
+                      </p:stCondLst>
+                      <p:childTnLst>
+                        <p:par>
+                          <p:cTn id="12" fill="hold">
+                            <p:stCondLst>
+                              <p:cond delay="0"/>
+                            </p:stCondLst>
+                            <p:childTnLst>
+                              <p:par>
+                                <p:cTn id="13" presetID="1" presetClass="entr" presetSubtype="0" fill="hold" grpId="0" nodeType="clickEffect">
+                                  <p:stCondLst>
+                                    <p:cond delay="0"/>
+                                  </p:stCondLst>
+                                  <p:childTnLst>
+                                    <p:set>
+                                      <p:cBhvr>
+                                        <p:cTn id="14" dur="1" fill="hold">
+                                          <p:stCondLst>
+                                            <p:cond delay="0"/>
+                                          </p:stCondLst>
+                                        </p:cTn>
+                                        <p:tgtEl>
+                                          <p:spTgt spid="3">
+                                            <p:txEl>
+                                              <p:pRg st="2" end="2"/>
+                                            </p:txEl>
+                                          </p:spTgt>
+                                        </p:tgtEl>
+                                        <p:attrNameLst>
+                                          <p:attrName>style.visibility</p:attrName>
+                                        </p:attrNameLst>
+                                      </p:cBhvr>
+                                      <p:to>
+                                        <p:strVal val="visible"/>
+                                      </p:to>
+                                    </p:set>
+                                  </p:childTnLst>
+                                </p:cTn>
+                              </p:par>
+                            </p:childTnLst>
+                          </p:cTn>
+                        </p:par>
+                      </p:childTnLst>
+                    </p:cTn>
+                  </p:par>
+                  <p:par>
+                    <p:cTn id="15" fill="hold">
+                      <p:stCondLst>
+                        <p:cond delay="indefinite"/>
+                      </p:stCondLst>
+                      <p:childTnLst>
+                        <p:par>
+                          <p:cTn id="16" fill="hold">
+                            <p:stCondLst>
+                              <p:cond delay="0"/>
+                            </p:stCondLst>
+                            <p:childTnLst>
+                              <p:par>
+                                <p:cTn id="17" presetID="1" presetClass="entr" presetSubtype="0" fill="hold" grpId="0" nodeType="clickEffect">
+                                  <p:stCondLst>
+                                    <p:cond delay="0"/>
+                                  </p:stCondLst>
+                                  <p:childTnLst>
+                                    <p:set>
+                                      <p:cBhvr>
+                                        <p:cTn id="18" dur="1" fill="hold">
+                                          <p:stCondLst>
+                                            <p:cond delay="0"/>
+                                          </p:stCondLst>
+                                        </p:cTn>
+                                        <p:tgtEl>
+                                          <p:spTgt spid="3">
+                                            <p:txEl>
+                                              <p:pRg st="3" end="3"/>
+                                            </p:txEl>
+                                          </p:spTgt>
+                                        </p:tgtEl>
+                                        <p:attrNameLst>
+                                          <p:attrName>style.visibility</p:attrName>
+                                        </p:attrNameLst>
+                                      </p:cBhvr>
+                                      <p:to>
+                                        <p:strVal val="visible"/>
+                                      </p:to>
+                                    </p:set>
+                                  </p:childTnLst>
+                                </p:cTn>
+                              </p:par>
+                            </p:childTnLst>
+                          </p:cTn>
+                        </p:par>
+                      </p:childTnLst>
+                    </p:cTn>
+                  </p:par>
+                </p:childTnLst>
+              </p:cTn>
+              <p:prevCondLst>
+                <p:cond evt="onPrev" delay="0">
+                  <p:tgtEl>
+                    <p:sldTgt/>
+                  </p:tgtEl>
+                </p:cond>
+              </p:prevCondLst>
+              <p:nextCondLst>
+                <p:cond evt="onNext" delay="0">
+                  <p:tgtEl>
+                    <p:sldTgt/>
+                  </p:tgtEl>
+                </p:cond>
+              </p:nextCondLst>
+            </p:seq>
+          </p:childTnLst>
+        </p:cTn>
+      </p:par>
+    </p:tnLst>
+    <p:bldLst>
+      <p:bldP spid="3" grpId="0" uiExpand="1" build="p"/>
+    </p:bldLst>
+  </p:timing>
+</p:sld>
+</file>
+
+<file path=ppt/slides/slide54.xml><?xml version="1.0" encoding="utf-8"?>
 <p:sld xmlns:a="http://schemas.openxmlformats.org/drawingml/2006/main" xmlns:r="http://schemas.openxmlformats.org/officeDocument/2006/relationships" xmlns:p="http://schemas.openxmlformats.org/presentationml/2006/main">
   <p:cSld>
     <p:spTree>
@@ -16890,7 +18111,7 @@
 </p:sld>
 </file>
 
-<file path=ppt/slides/slide52.xml><?xml version="1.0" encoding="utf-8"?>
+<file path=ppt/slides/slide55.xml><?xml version="1.0" encoding="utf-8"?>
 <p:sld xmlns:a="http://schemas.openxmlformats.org/drawingml/2006/main" xmlns:r="http://schemas.openxmlformats.org/officeDocument/2006/relationships" xmlns:p="http://schemas.openxmlformats.org/presentationml/2006/main">
   <p:cSld>
     <p:spTree>
@@ -16969,7 +18190,7 @@
 </p:sld>
 </file>
 
-<file path=ppt/slides/slide53.xml><?xml version="1.0" encoding="utf-8"?>
+<file path=ppt/slides/slide56.xml><?xml version="1.0" encoding="utf-8"?>
 <p:sld xmlns:a="http://schemas.openxmlformats.org/drawingml/2006/main" xmlns:r="http://schemas.openxmlformats.org/officeDocument/2006/relationships" xmlns:p="http://schemas.openxmlformats.org/presentationml/2006/main">
   <p:cSld>
     <p:spTree>
@@ -17048,7 +18269,7 @@
 </p:sld>
 </file>
 
-<file path=ppt/slides/slide54.xml><?xml version="1.0" encoding="utf-8"?>
+<file path=ppt/slides/slide57.xml><?xml version="1.0" encoding="utf-8"?>
 <p:sld xmlns:a="http://schemas.openxmlformats.org/drawingml/2006/main" xmlns:r="http://schemas.openxmlformats.org/officeDocument/2006/relationships" xmlns:p="http://schemas.openxmlformats.org/presentationml/2006/main">
   <p:cSld>
     <p:spTree>
@@ -17563,7 +18784,7 @@
 </p:sld>
 </file>
 
-<file path=ppt/slides/slide55.xml><?xml version="1.0" encoding="utf-8"?>
+<file path=ppt/slides/slide58.xml><?xml version="1.0" encoding="utf-8"?>
 <p:sld xmlns:a="http://schemas.openxmlformats.org/drawingml/2006/main" xmlns:r="http://schemas.openxmlformats.org/officeDocument/2006/relationships" xmlns:p="http://schemas.openxmlformats.org/presentationml/2006/main">
   <p:cSld>
     <p:spTree>
@@ -17827,7 +19048,7 @@
 </p:sld>
 </file>
 
-<file path=ppt/slides/slide56.xml><?xml version="1.0" encoding="utf-8"?>
+<file path=ppt/slides/slide59.xml><?xml version="1.0" encoding="utf-8"?>
 <p:sld xmlns:a="http://schemas.openxmlformats.org/drawingml/2006/main" xmlns:r="http://schemas.openxmlformats.org/officeDocument/2006/relationships" xmlns:p="http://schemas.openxmlformats.org/presentationml/2006/main">
   <p:cSld>
     <p:spTree>
@@ -18156,7 +19377,215 @@
 </p:sld>
 </file>
 
-<file path=ppt/slides/slide57.xml><?xml version="1.0" encoding="utf-8"?>
+<file path=ppt/slides/slide6.xml><?xml version="1.0" encoding="utf-8"?>
+<p:sld xmlns:a="http://schemas.openxmlformats.org/drawingml/2006/main" xmlns:r="http://schemas.openxmlformats.org/officeDocument/2006/relationships" xmlns:p="http://schemas.openxmlformats.org/presentationml/2006/main">
+  <p:cSld>
+    <p:spTree>
+      <p:nvGrpSpPr>
+        <p:cNvPr id="1" name=""/>
+        <p:cNvGrpSpPr/>
+        <p:nvPr/>
+      </p:nvGrpSpPr>
+      <p:grpSpPr>
+        <a:xfrm>
+          <a:off x="0" y="0"/>
+          <a:ext cx="0" cy="0"/>
+          <a:chOff x="0" y="0"/>
+          <a:chExt cx="0" cy="0"/>
+        </a:xfrm>
+      </p:grpSpPr>
+      <p:sp>
+        <p:nvSpPr>
+          <p:cNvPr id="2" name="Title 1"/>
+          <p:cNvSpPr>
+            <a:spLocks noGrp="1"/>
+          </p:cNvSpPr>
+          <p:nvPr>
+            <p:ph type="title"/>
+          </p:nvPr>
+        </p:nvSpPr>
+        <p:spPr/>
+        <p:txBody>
+          <a:bodyPr/>
+          <a:lstStyle/>
+          <a:p>
+            <a:pPr marL="0" lvl="0" indent="0">
+              <a:buNone/>
+            </a:pPr>
+            <a:r>
+              <a:t>Womit starten wir?</a:t>
+            </a:r>
+          </a:p>
+        </p:txBody>
+      </p:sp>
+      <p:sp>
+        <p:nvSpPr>
+          <p:cNvPr id="3" name="Content Placeholder 2"/>
+          <p:cNvSpPr>
+            <a:spLocks noGrp="1"/>
+          </p:cNvSpPr>
+          <p:nvPr>
+            <p:ph idx="1"/>
+          </p:nvPr>
+        </p:nvSpPr>
+        <p:spPr/>
+        <p:txBody>
+          <a:bodyPr/>
+          <a:lstStyle/>
+          <a:p>
+            <a:pPr lvl="0"/>
+            <a:r>
+              <a:t>Welche Materialien haben Sie durchgearbeitet?</a:t>
+            </a:r>
+          </a:p>
+          <a:p>
+            <a:pPr lvl="0"/>
+            <a:r>
+              <a:t>Wo hakte es?</a:t>
+            </a:r>
+          </a:p>
+        </p:txBody>
+      </p:sp>
+    </p:spTree>
+  </p:cSld>
+  <p:clrMapOvr>
+    <a:masterClrMapping/>
+  </p:clrMapOvr>
+  <p:timing>
+    <p:tnLst>
+      <p:par>
+        <p:cTn id="1" dur="indefinite" restart="never" nodeType="tmRoot">
+          <p:childTnLst>
+            <p:seq concurrent="1" nextAc="seek">
+              <p:cTn id="2" dur="indefinite" nodeType="mainSeq">
+                <p:childTnLst>
+                  <p:par>
+                    <p:cTn id="3" fill="hold">
+                      <p:stCondLst>
+                        <p:cond delay="indefinite"/>
+                      </p:stCondLst>
+                      <p:childTnLst>
+                        <p:par>
+                          <p:cTn id="4" fill="hold">
+                            <p:stCondLst>
+                              <p:cond delay="0"/>
+                            </p:stCondLst>
+                            <p:childTnLst>
+                              <p:par>
+                                <p:cTn id="5" presetID="1" presetClass="entr" presetSubtype="0" fill="hold" grpId="0" nodeType="clickEffect">
+                                  <p:stCondLst>
+                                    <p:cond delay="0"/>
+                                  </p:stCondLst>
+                                  <p:childTnLst>
+                                    <p:set>
+                                      <p:cBhvr>
+                                        <p:cTn id="6" dur="1" fill="hold">
+                                          <p:stCondLst>
+                                            <p:cond delay="0"/>
+                                          </p:stCondLst>
+                                        </p:cTn>
+                                        <p:tgtEl>
+                                          <p:spTgt spid="3">
+                                            <p:txEl>
+                                              <p:pRg st="0" end="0"/>
+                                            </p:txEl>
+                                          </p:spTgt>
+                                        </p:tgtEl>
+                                        <p:attrNameLst>
+                                          <p:attrName>style.visibility</p:attrName>
+                                        </p:attrNameLst>
+                                      </p:cBhvr>
+                                      <p:to>
+                                        <p:strVal val="visible"/>
+                                      </p:to>
+                                    </p:set>
+                                  </p:childTnLst>
+                                </p:cTn>
+                              </p:par>
+                            </p:childTnLst>
+                          </p:cTn>
+                        </p:par>
+                      </p:childTnLst>
+                    </p:cTn>
+                  </p:par>
+                  <p:par>
+                    <p:cTn id="7" fill="hold">
+                      <p:stCondLst>
+                        <p:cond delay="indefinite"/>
+                      </p:stCondLst>
+                      <p:childTnLst>
+                        <p:par>
+                          <p:cTn id="8" fill="hold">
+                            <p:stCondLst>
+                              <p:cond delay="0"/>
+                            </p:stCondLst>
+                            <p:childTnLst>
+                              <p:par>
+                                <p:cTn id="9" presetID="1" presetClass="entr" presetSubtype="0" fill="hold" grpId="0" nodeType="clickEffect">
+                                  <p:stCondLst>
+                                    <p:cond delay="0"/>
+                                  </p:stCondLst>
+                                  <p:childTnLst>
+                                    <p:set>
+                                      <p:cBhvr>
+                                        <p:cTn id="10" dur="1" fill="hold">
+                                          <p:stCondLst>
+                                            <p:cond delay="0"/>
+                                          </p:stCondLst>
+                                        </p:cTn>
+                                        <p:tgtEl>
+                                          <p:spTgt spid="3">
+                                            <p:txEl>
+                                              <p:pRg st="1" end="1"/>
+                                            </p:txEl>
+                                          </p:spTgt>
+                                        </p:tgtEl>
+                                        <p:attrNameLst>
+                                          <p:attrName>style.visibility</p:attrName>
+                                        </p:attrNameLst>
+                                      </p:cBhvr>
+                                      <p:to>
+                                        <p:strVal val="visible"/>
+                                      </p:to>
+                                    </p:set>
+                                  </p:childTnLst>
+                                </p:cTn>
+                              </p:par>
+                            </p:childTnLst>
+                          </p:cTn>
+                        </p:par>
+                      </p:childTnLst>
+                    </p:cTn>
+                  </p:par>
+                </p:childTnLst>
+              </p:cTn>
+              <p:prevCondLst>
+                <p:cond evt="onPrev" delay="0">
+                  <p:tgtEl>
+                    <p:sldTgt/>
+                  </p:tgtEl>
+                </p:cond>
+              </p:prevCondLst>
+              <p:nextCondLst>
+                <p:cond evt="onNext" delay="0">
+                  <p:tgtEl>
+                    <p:sldTgt/>
+                  </p:tgtEl>
+                </p:cond>
+              </p:nextCondLst>
+            </p:seq>
+          </p:childTnLst>
+        </p:cTn>
+      </p:par>
+    </p:tnLst>
+    <p:bldLst>
+      <p:bldP spid="3" grpId="0" uiExpand="1" build="p"/>
+    </p:bldLst>
+  </p:timing>
+</p:sld>
+</file>
+
+<file path=ppt/slides/slide60.xml><?xml version="1.0" encoding="utf-8"?>
 <p:sld xmlns:a="http://schemas.openxmlformats.org/drawingml/2006/main" xmlns:r="http://schemas.openxmlformats.org/officeDocument/2006/relationships" xmlns:p="http://schemas.openxmlformats.org/presentationml/2006/main">
   <p:cSld>
     <p:spTree>
@@ -18481,7 +19910,7 @@
 </p:sld>
 </file>
 
-<file path=ppt/slides/slide58.xml><?xml version="1.0" encoding="utf-8"?>
+<file path=ppt/slides/slide61.xml><?xml version="1.0" encoding="utf-8"?>
 <p:sld xmlns:a="http://schemas.openxmlformats.org/drawingml/2006/main" xmlns:r="http://schemas.openxmlformats.org/officeDocument/2006/relationships" xmlns:p="http://schemas.openxmlformats.org/presentationml/2006/main">
   <p:cSld>
     <p:spTree>
@@ -18813,7 +20242,7 @@
 </p:sld>
 </file>
 
-<file path=ppt/slides/slide59.xml><?xml version="1.0" encoding="utf-8"?>
+<file path=ppt/slides/slide62.xml><?xml version="1.0" encoding="utf-8"?>
 <p:sld xmlns:a="http://schemas.openxmlformats.org/drawingml/2006/main" xmlns:r="http://schemas.openxmlformats.org/officeDocument/2006/relationships" xmlns:p="http://schemas.openxmlformats.org/presentationml/2006/main">
   <p:cSld>
     <p:spTree>
@@ -18892,215 +20321,7 @@
 </p:sld>
 </file>
 
-<file path=ppt/slides/slide6.xml><?xml version="1.0" encoding="utf-8"?>
-<p:sld xmlns:a="http://schemas.openxmlformats.org/drawingml/2006/main" xmlns:r="http://schemas.openxmlformats.org/officeDocument/2006/relationships" xmlns:p="http://schemas.openxmlformats.org/presentationml/2006/main">
-  <p:cSld>
-    <p:spTree>
-      <p:nvGrpSpPr>
-        <p:cNvPr id="1" name=""/>
-        <p:cNvGrpSpPr/>
-        <p:nvPr/>
-      </p:nvGrpSpPr>
-      <p:grpSpPr>
-        <a:xfrm>
-          <a:off x="0" y="0"/>
-          <a:ext cx="0" cy="0"/>
-          <a:chOff x="0" y="0"/>
-          <a:chExt cx="0" cy="0"/>
-        </a:xfrm>
-      </p:grpSpPr>
-      <p:sp>
-        <p:nvSpPr>
-          <p:cNvPr id="2" name="Title 1"/>
-          <p:cNvSpPr>
-            <a:spLocks noGrp="1"/>
-          </p:cNvSpPr>
-          <p:nvPr>
-            <p:ph type="title"/>
-          </p:nvPr>
-        </p:nvSpPr>
-        <p:spPr/>
-        <p:txBody>
-          <a:bodyPr/>
-          <a:lstStyle/>
-          <a:p>
-            <a:pPr marL="0" lvl="0" indent="0">
-              <a:buNone/>
-            </a:pPr>
-            <a:r>
-              <a:t>Womit starten wir?</a:t>
-            </a:r>
-          </a:p>
-        </p:txBody>
-      </p:sp>
-      <p:sp>
-        <p:nvSpPr>
-          <p:cNvPr id="3" name="Content Placeholder 2"/>
-          <p:cNvSpPr>
-            <a:spLocks noGrp="1"/>
-          </p:cNvSpPr>
-          <p:nvPr>
-            <p:ph idx="1"/>
-          </p:nvPr>
-        </p:nvSpPr>
-        <p:spPr/>
-        <p:txBody>
-          <a:bodyPr/>
-          <a:lstStyle/>
-          <a:p>
-            <a:pPr lvl="0"/>
-            <a:r>
-              <a:t>Welche Materialien haben Sie durchgearbeitet?</a:t>
-            </a:r>
-          </a:p>
-          <a:p>
-            <a:pPr lvl="0"/>
-            <a:r>
-              <a:t>Wo hakte es?</a:t>
-            </a:r>
-          </a:p>
-        </p:txBody>
-      </p:sp>
-    </p:spTree>
-  </p:cSld>
-  <p:clrMapOvr>
-    <a:masterClrMapping/>
-  </p:clrMapOvr>
-  <p:timing>
-    <p:tnLst>
-      <p:par>
-        <p:cTn id="1" dur="indefinite" restart="never" nodeType="tmRoot">
-          <p:childTnLst>
-            <p:seq concurrent="1" nextAc="seek">
-              <p:cTn id="2" dur="indefinite" nodeType="mainSeq">
-                <p:childTnLst>
-                  <p:par>
-                    <p:cTn id="3" fill="hold">
-                      <p:stCondLst>
-                        <p:cond delay="indefinite"/>
-                      </p:stCondLst>
-                      <p:childTnLst>
-                        <p:par>
-                          <p:cTn id="4" fill="hold">
-                            <p:stCondLst>
-                              <p:cond delay="0"/>
-                            </p:stCondLst>
-                            <p:childTnLst>
-                              <p:par>
-                                <p:cTn id="5" presetID="1" presetClass="entr" presetSubtype="0" fill="hold" grpId="0" nodeType="clickEffect">
-                                  <p:stCondLst>
-                                    <p:cond delay="0"/>
-                                  </p:stCondLst>
-                                  <p:childTnLst>
-                                    <p:set>
-                                      <p:cBhvr>
-                                        <p:cTn id="6" dur="1" fill="hold">
-                                          <p:stCondLst>
-                                            <p:cond delay="0"/>
-                                          </p:stCondLst>
-                                        </p:cTn>
-                                        <p:tgtEl>
-                                          <p:spTgt spid="3">
-                                            <p:txEl>
-                                              <p:pRg st="0" end="0"/>
-                                            </p:txEl>
-                                          </p:spTgt>
-                                        </p:tgtEl>
-                                        <p:attrNameLst>
-                                          <p:attrName>style.visibility</p:attrName>
-                                        </p:attrNameLst>
-                                      </p:cBhvr>
-                                      <p:to>
-                                        <p:strVal val="visible"/>
-                                      </p:to>
-                                    </p:set>
-                                  </p:childTnLst>
-                                </p:cTn>
-                              </p:par>
-                            </p:childTnLst>
-                          </p:cTn>
-                        </p:par>
-                      </p:childTnLst>
-                    </p:cTn>
-                  </p:par>
-                  <p:par>
-                    <p:cTn id="7" fill="hold">
-                      <p:stCondLst>
-                        <p:cond delay="indefinite"/>
-                      </p:stCondLst>
-                      <p:childTnLst>
-                        <p:par>
-                          <p:cTn id="8" fill="hold">
-                            <p:stCondLst>
-                              <p:cond delay="0"/>
-                            </p:stCondLst>
-                            <p:childTnLst>
-                              <p:par>
-                                <p:cTn id="9" presetID="1" presetClass="entr" presetSubtype="0" fill="hold" grpId="0" nodeType="clickEffect">
-                                  <p:stCondLst>
-                                    <p:cond delay="0"/>
-                                  </p:stCondLst>
-                                  <p:childTnLst>
-                                    <p:set>
-                                      <p:cBhvr>
-                                        <p:cTn id="10" dur="1" fill="hold">
-                                          <p:stCondLst>
-                                            <p:cond delay="0"/>
-                                          </p:stCondLst>
-                                        </p:cTn>
-                                        <p:tgtEl>
-                                          <p:spTgt spid="3">
-                                            <p:txEl>
-                                              <p:pRg st="1" end="1"/>
-                                            </p:txEl>
-                                          </p:spTgt>
-                                        </p:tgtEl>
-                                        <p:attrNameLst>
-                                          <p:attrName>style.visibility</p:attrName>
-                                        </p:attrNameLst>
-                                      </p:cBhvr>
-                                      <p:to>
-                                        <p:strVal val="visible"/>
-                                      </p:to>
-                                    </p:set>
-                                  </p:childTnLst>
-                                </p:cTn>
-                              </p:par>
-                            </p:childTnLst>
-                          </p:cTn>
-                        </p:par>
-                      </p:childTnLst>
-                    </p:cTn>
-                  </p:par>
-                </p:childTnLst>
-              </p:cTn>
-              <p:prevCondLst>
-                <p:cond evt="onPrev" delay="0">
-                  <p:tgtEl>
-                    <p:sldTgt/>
-                  </p:tgtEl>
-                </p:cond>
-              </p:prevCondLst>
-              <p:nextCondLst>
-                <p:cond evt="onNext" delay="0">
-                  <p:tgtEl>
-                    <p:sldTgt/>
-                  </p:tgtEl>
-                </p:cond>
-              </p:nextCondLst>
-            </p:seq>
-          </p:childTnLst>
-        </p:cTn>
-      </p:par>
-    </p:tnLst>
-    <p:bldLst>
-      <p:bldP spid="3" grpId="0" uiExpand="1" build="p"/>
-    </p:bldLst>
-  </p:timing>
-</p:sld>
-</file>
-
-<file path=ppt/slides/slide60.xml><?xml version="1.0" encoding="utf-8"?>
+<file path=ppt/slides/slide63.xml><?xml version="1.0" encoding="utf-8"?>
 <p:sld xmlns:a="http://schemas.openxmlformats.org/drawingml/2006/main" xmlns:r="http://schemas.openxmlformats.org/officeDocument/2006/relationships" xmlns:p="http://schemas.openxmlformats.org/presentationml/2006/main">
   <p:cSld>
     <p:spTree>
@@ -19488,866 +20709,6 @@
 </p:sld>
 </file>
 
-<file path=ppt/slides/slide61.xml><?xml version="1.0" encoding="utf-8"?>
-<p:sld xmlns:a="http://schemas.openxmlformats.org/drawingml/2006/main" xmlns:r="http://schemas.openxmlformats.org/officeDocument/2006/relationships" xmlns:p="http://schemas.openxmlformats.org/presentationml/2006/main">
-  <p:cSld>
-    <p:spTree>
-      <p:nvGrpSpPr>
-        <p:cNvPr id="1" name=""/>
-        <p:cNvGrpSpPr/>
-        <p:nvPr/>
-      </p:nvGrpSpPr>
-      <p:grpSpPr>
-        <a:xfrm>
-          <a:off x="0" y="0"/>
-          <a:ext cx="0" cy="0"/>
-          <a:chOff x="0" y="0"/>
-          <a:chExt cx="0" cy="0"/>
-        </a:xfrm>
-      </p:grpSpPr>
-      <p:sp>
-        <p:nvSpPr>
-          <p:cNvPr id="2" name="Title 1"/>
-          <p:cNvSpPr>
-            <a:spLocks noGrp="1"/>
-          </p:cNvSpPr>
-          <p:nvPr>
-            <p:ph type="title"/>
-          </p:nvPr>
-        </p:nvSpPr>
-        <p:spPr/>
-        <p:txBody>
-          <a:bodyPr/>
-          <a:lstStyle/>
-          <a:p>
-            <a:pPr marL="0" lvl="0" indent="0">
-              <a:buNone/>
-            </a:pPr>
-            <a:r>
-              <a:t>Wie würden Sie es lösen: Dubletten?</a:t>
-            </a:r>
-          </a:p>
-        </p:txBody>
-      </p:sp>
-      <p:sp>
-        <p:nvSpPr>
-          <p:cNvPr id="3" name="Content Placeholder 2"/>
-          <p:cNvSpPr>
-            <a:spLocks noGrp="1"/>
-          </p:cNvSpPr>
-          <p:nvPr>
-            <p:ph idx="1"/>
-          </p:nvPr>
-        </p:nvSpPr>
-        <p:spPr/>
-        <p:txBody>
-          <a:bodyPr/>
-          <a:lstStyle/>
-          <a:p>
-            <a:pPr lvl="0"/>
-            <a:r>
-              <a:t>Aufgabe: „The Green Mile”, „Der Green Mile”, „The Green Mile (Signet)” — finden Sie alle Auflagen desselben Werks unter 271.000 Titeln</a:t>
-            </a:r>
-          </a:p>
-          <a:p>
-            <a:pPr lvl="0"/>
-            <a:r>
-              <a:rPr b="1"/>
-              <a:t>Wie würden Sie das angehen — von Hand, mit Regeln, mit Normdaten? Und wie lange bräuchten Sie?</a:t>
-            </a:r>
-          </a:p>
-        </p:txBody>
-      </p:sp>
-    </p:spTree>
-  </p:cSld>
-  <p:clrMapOvr>
-    <a:masterClrMapping/>
-  </p:clrMapOvr>
-  <p:timing>
-    <p:tnLst>
-      <p:par>
-        <p:cTn id="1" dur="indefinite" restart="never" nodeType="tmRoot">
-          <p:childTnLst>
-            <p:seq concurrent="1" nextAc="seek">
-              <p:cTn id="2" dur="indefinite" nodeType="mainSeq">
-                <p:childTnLst>
-                  <p:par>
-                    <p:cTn id="3" fill="hold">
-                      <p:stCondLst>
-                        <p:cond delay="indefinite"/>
-                      </p:stCondLst>
-                      <p:childTnLst>
-                        <p:par>
-                          <p:cTn id="4" fill="hold">
-                            <p:stCondLst>
-                              <p:cond delay="0"/>
-                            </p:stCondLst>
-                            <p:childTnLst>
-                              <p:par>
-                                <p:cTn id="5" presetID="1" presetClass="entr" presetSubtype="0" fill="hold" grpId="0" nodeType="clickEffect">
-                                  <p:stCondLst>
-                                    <p:cond delay="0"/>
-                                  </p:stCondLst>
-                                  <p:childTnLst>
-                                    <p:set>
-                                      <p:cBhvr>
-                                        <p:cTn id="6" dur="1" fill="hold">
-                                          <p:stCondLst>
-                                            <p:cond delay="0"/>
-                                          </p:stCondLst>
-                                        </p:cTn>
-                                        <p:tgtEl>
-                                          <p:spTgt spid="3">
-                                            <p:txEl>
-                                              <p:pRg st="0" end="0"/>
-                                            </p:txEl>
-                                          </p:spTgt>
-                                        </p:tgtEl>
-                                        <p:attrNameLst>
-                                          <p:attrName>style.visibility</p:attrName>
-                                        </p:attrNameLst>
-                                      </p:cBhvr>
-                                      <p:to>
-                                        <p:strVal val="visible"/>
-                                      </p:to>
-                                    </p:set>
-                                  </p:childTnLst>
-                                </p:cTn>
-                              </p:par>
-                            </p:childTnLst>
-                          </p:cTn>
-                        </p:par>
-                      </p:childTnLst>
-                    </p:cTn>
-                  </p:par>
-                  <p:par>
-                    <p:cTn id="7" fill="hold">
-                      <p:stCondLst>
-                        <p:cond delay="indefinite"/>
-                      </p:stCondLst>
-                      <p:childTnLst>
-                        <p:par>
-                          <p:cTn id="8" fill="hold">
-                            <p:stCondLst>
-                              <p:cond delay="0"/>
-                            </p:stCondLst>
-                            <p:childTnLst>
-                              <p:par>
-                                <p:cTn id="9" presetID="1" presetClass="entr" presetSubtype="0" fill="hold" grpId="0" nodeType="clickEffect">
-                                  <p:stCondLst>
-                                    <p:cond delay="0"/>
-                                  </p:stCondLst>
-                                  <p:childTnLst>
-                                    <p:set>
-                                      <p:cBhvr>
-                                        <p:cTn id="10" dur="1" fill="hold">
-                                          <p:stCondLst>
-                                            <p:cond delay="0"/>
-                                          </p:stCondLst>
-                                        </p:cTn>
-                                        <p:tgtEl>
-                                          <p:spTgt spid="3">
-                                            <p:txEl>
-                                              <p:pRg st="1" end="1"/>
-                                            </p:txEl>
-                                          </p:spTgt>
-                                        </p:tgtEl>
-                                        <p:attrNameLst>
-                                          <p:attrName>style.visibility</p:attrName>
-                                        </p:attrNameLst>
-                                      </p:cBhvr>
-                                      <p:to>
-                                        <p:strVal val="visible"/>
-                                      </p:to>
-                                    </p:set>
-                                  </p:childTnLst>
-                                </p:cTn>
-                              </p:par>
-                            </p:childTnLst>
-                          </p:cTn>
-                        </p:par>
-                      </p:childTnLst>
-                    </p:cTn>
-                  </p:par>
-                </p:childTnLst>
-              </p:cTn>
-              <p:prevCondLst>
-                <p:cond evt="onPrev" delay="0">
-                  <p:tgtEl>
-                    <p:sldTgt/>
-                  </p:tgtEl>
-                </p:cond>
-              </p:prevCondLst>
-              <p:nextCondLst>
-                <p:cond evt="onNext" delay="0">
-                  <p:tgtEl>
-                    <p:sldTgt/>
-                  </p:tgtEl>
-                </p:cond>
-              </p:nextCondLst>
-            </p:seq>
-          </p:childTnLst>
-        </p:cTn>
-      </p:par>
-    </p:tnLst>
-    <p:bldLst>
-      <p:bldP spid="3" grpId="0" uiExpand="1" build="p"/>
-    </p:bldLst>
-  </p:timing>
-</p:sld>
-</file>
-
-<file path=ppt/slides/slide62.xml><?xml version="1.0" encoding="utf-8"?>
-<p:sld xmlns:a="http://schemas.openxmlformats.org/drawingml/2006/main" xmlns:r="http://schemas.openxmlformats.org/officeDocument/2006/relationships" xmlns:p="http://schemas.openxmlformats.org/presentationml/2006/main">
-  <p:cSld>
-    <p:spTree>
-      <p:nvGrpSpPr>
-        <p:cNvPr id="1" name=""/>
-        <p:cNvGrpSpPr/>
-        <p:nvPr/>
-      </p:nvGrpSpPr>
-      <p:grpSpPr>
-        <a:xfrm>
-          <a:off x="0" y="0"/>
-          <a:ext cx="0" cy="0"/>
-          <a:chOff x="0" y="0"/>
-          <a:chExt cx="0" cy="0"/>
-        </a:xfrm>
-      </p:grpSpPr>
-      <p:sp>
-        <p:nvSpPr>
-          <p:cNvPr id="2" name="Title 1"/>
-          <p:cNvSpPr>
-            <a:spLocks noGrp="1"/>
-          </p:cNvSpPr>
-          <p:nvPr>
-            <p:ph type="title"/>
-          </p:nvPr>
-        </p:nvSpPr>
-        <p:spPr/>
-        <p:txBody>
-          <a:bodyPr/>
-          <a:lstStyle/>
-          <a:p>
-            <a:pPr marL="0" lvl="0" indent="0">
-              <a:buNone/>
-            </a:pPr>
-            <a:r>
-              <a:t>Record Linkage: Ist das dasselbe Buch?</a:t>
-            </a:r>
-          </a:p>
-        </p:txBody>
-      </p:sp>
-      <p:sp>
-        <p:nvSpPr>
-          <p:cNvPr id="3" name="Content Placeholder 2"/>
-          <p:cNvSpPr>
-            <a:spLocks noGrp="1"/>
-          </p:cNvSpPr>
-          <p:nvPr>
-            <p:ph idx="1"/>
-          </p:nvPr>
-        </p:nvSpPr>
-        <p:spPr/>
-        <p:txBody>
-          <a:bodyPr/>
-          <a:lstStyle/>
-          <a:p>
-            <a:pPr lvl="0"/>
-            <a:r>
-              <a:t>Idee: </a:t>
-            </a:r>
-            <a:r>
-              <a:rPr b="1"/>
-              <a:t>Einträge zusammenführen, die dasselbe Objekt beschreiben</a:t>
-            </a:r>
-          </a:p>
-          <a:p>
-            <a:pPr lvl="0"/>
-            <a:r>
-              <a:t>„The Green Mile”, „Der Green Mile”, „The Green Mile (Signet)” — ein Werk, drei Datensätze</a:t>
-            </a:r>
-          </a:p>
-          <a:p>
-            <a:pPr lvl="0"/>
-            <a:r>
-              <a:t>Das ist FRBR als Data-Mining-Problem: Werk vs. Manifestation</a:t>
-            </a:r>
-          </a:p>
-          <a:p>
-            <a:pPr lvl="0"/>
-            <a:r>
-              <a:rPr b="1"/>
-              <a:t>Hier sind Sie die Expert:innen</a:t>
-            </a:r>
-            <a:r>
-              <a:t> — Normdaten und Dublettenkontrolle sind genau das</a:t>
-            </a:r>
-          </a:p>
-        </p:txBody>
-      </p:sp>
-    </p:spTree>
-  </p:cSld>
-  <p:clrMapOvr>
-    <a:masterClrMapping/>
-  </p:clrMapOvr>
-  <p:timing>
-    <p:tnLst>
-      <p:par>
-        <p:cTn id="1" dur="indefinite" restart="never" nodeType="tmRoot">
-          <p:childTnLst>
-            <p:seq concurrent="1" nextAc="seek">
-              <p:cTn id="2" dur="indefinite" nodeType="mainSeq">
-                <p:childTnLst>
-                  <p:par>
-                    <p:cTn id="3" fill="hold">
-                      <p:stCondLst>
-                        <p:cond delay="indefinite"/>
-                      </p:stCondLst>
-                      <p:childTnLst>
-                        <p:par>
-                          <p:cTn id="4" fill="hold">
-                            <p:stCondLst>
-                              <p:cond delay="0"/>
-                            </p:stCondLst>
-                            <p:childTnLst>
-                              <p:par>
-                                <p:cTn id="5" presetID="1" presetClass="entr" presetSubtype="0" fill="hold" grpId="0" nodeType="clickEffect">
-                                  <p:stCondLst>
-                                    <p:cond delay="0"/>
-                                  </p:stCondLst>
-                                  <p:childTnLst>
-                                    <p:set>
-                                      <p:cBhvr>
-                                        <p:cTn id="6" dur="1" fill="hold">
-                                          <p:stCondLst>
-                                            <p:cond delay="0"/>
-                                          </p:stCondLst>
-                                        </p:cTn>
-                                        <p:tgtEl>
-                                          <p:spTgt spid="3">
-                                            <p:txEl>
-                                              <p:pRg st="0" end="0"/>
-                                            </p:txEl>
-                                          </p:spTgt>
-                                        </p:tgtEl>
-                                        <p:attrNameLst>
-                                          <p:attrName>style.visibility</p:attrName>
-                                        </p:attrNameLst>
-                                      </p:cBhvr>
-                                      <p:to>
-                                        <p:strVal val="visible"/>
-                                      </p:to>
-                                    </p:set>
-                                  </p:childTnLst>
-                                </p:cTn>
-                              </p:par>
-                            </p:childTnLst>
-                          </p:cTn>
-                        </p:par>
-                      </p:childTnLst>
-                    </p:cTn>
-                  </p:par>
-                  <p:par>
-                    <p:cTn id="7" fill="hold">
-                      <p:stCondLst>
-                        <p:cond delay="indefinite"/>
-                      </p:stCondLst>
-                      <p:childTnLst>
-                        <p:par>
-                          <p:cTn id="8" fill="hold">
-                            <p:stCondLst>
-                              <p:cond delay="0"/>
-                            </p:stCondLst>
-                            <p:childTnLst>
-                              <p:par>
-                                <p:cTn id="9" presetID="1" presetClass="entr" presetSubtype="0" fill="hold" grpId="0" nodeType="clickEffect">
-                                  <p:stCondLst>
-                                    <p:cond delay="0"/>
-                                  </p:stCondLst>
-                                  <p:childTnLst>
-                                    <p:set>
-                                      <p:cBhvr>
-                                        <p:cTn id="10" dur="1" fill="hold">
-                                          <p:stCondLst>
-                                            <p:cond delay="0"/>
-                                          </p:stCondLst>
-                                        </p:cTn>
-                                        <p:tgtEl>
-                                          <p:spTgt spid="3">
-                                            <p:txEl>
-                                              <p:pRg st="1" end="1"/>
-                                            </p:txEl>
-                                          </p:spTgt>
-                                        </p:tgtEl>
-                                        <p:attrNameLst>
-                                          <p:attrName>style.visibility</p:attrName>
-                                        </p:attrNameLst>
-                                      </p:cBhvr>
-                                      <p:to>
-                                        <p:strVal val="visible"/>
-                                      </p:to>
-                                    </p:set>
-                                  </p:childTnLst>
-                                </p:cTn>
-                              </p:par>
-                            </p:childTnLst>
-                          </p:cTn>
-                        </p:par>
-                      </p:childTnLst>
-                    </p:cTn>
-                  </p:par>
-                  <p:par>
-                    <p:cTn id="11" fill="hold">
-                      <p:stCondLst>
-                        <p:cond delay="indefinite"/>
-                      </p:stCondLst>
-                      <p:childTnLst>
-                        <p:par>
-                          <p:cTn id="12" fill="hold">
-                            <p:stCondLst>
-                              <p:cond delay="0"/>
-                            </p:stCondLst>
-                            <p:childTnLst>
-                              <p:par>
-                                <p:cTn id="13" presetID="1" presetClass="entr" presetSubtype="0" fill="hold" grpId="0" nodeType="clickEffect">
-                                  <p:stCondLst>
-                                    <p:cond delay="0"/>
-                                  </p:stCondLst>
-                                  <p:childTnLst>
-                                    <p:set>
-                                      <p:cBhvr>
-                                        <p:cTn id="14" dur="1" fill="hold">
-                                          <p:stCondLst>
-                                            <p:cond delay="0"/>
-                                          </p:stCondLst>
-                                        </p:cTn>
-                                        <p:tgtEl>
-                                          <p:spTgt spid="3">
-                                            <p:txEl>
-                                              <p:pRg st="2" end="2"/>
-                                            </p:txEl>
-                                          </p:spTgt>
-                                        </p:tgtEl>
-                                        <p:attrNameLst>
-                                          <p:attrName>style.visibility</p:attrName>
-                                        </p:attrNameLst>
-                                      </p:cBhvr>
-                                      <p:to>
-                                        <p:strVal val="visible"/>
-                                      </p:to>
-                                    </p:set>
-                                  </p:childTnLst>
-                                </p:cTn>
-                              </p:par>
-                            </p:childTnLst>
-                          </p:cTn>
-                        </p:par>
-                      </p:childTnLst>
-                    </p:cTn>
-                  </p:par>
-                  <p:par>
-                    <p:cTn id="15" fill="hold">
-                      <p:stCondLst>
-                        <p:cond delay="indefinite"/>
-                      </p:stCondLst>
-                      <p:childTnLst>
-                        <p:par>
-                          <p:cTn id="16" fill="hold">
-                            <p:stCondLst>
-                              <p:cond delay="0"/>
-                            </p:stCondLst>
-                            <p:childTnLst>
-                              <p:par>
-                                <p:cTn id="17" presetID="1" presetClass="entr" presetSubtype="0" fill="hold" grpId="0" nodeType="clickEffect">
-                                  <p:stCondLst>
-                                    <p:cond delay="0"/>
-                                  </p:stCondLst>
-                                  <p:childTnLst>
-                                    <p:set>
-                                      <p:cBhvr>
-                                        <p:cTn id="18" dur="1" fill="hold">
-                                          <p:stCondLst>
-                                            <p:cond delay="0"/>
-                                          </p:stCondLst>
-                                        </p:cTn>
-                                        <p:tgtEl>
-                                          <p:spTgt spid="3">
-                                            <p:txEl>
-                                              <p:pRg st="3" end="3"/>
-                                            </p:txEl>
-                                          </p:spTgt>
-                                        </p:tgtEl>
-                                        <p:attrNameLst>
-                                          <p:attrName>style.visibility</p:attrName>
-                                        </p:attrNameLst>
-                                      </p:cBhvr>
-                                      <p:to>
-                                        <p:strVal val="visible"/>
-                                      </p:to>
-                                    </p:set>
-                                  </p:childTnLst>
-                                </p:cTn>
-                              </p:par>
-                            </p:childTnLst>
-                          </p:cTn>
-                        </p:par>
-                      </p:childTnLst>
-                    </p:cTn>
-                  </p:par>
-                </p:childTnLst>
-              </p:cTn>
-              <p:prevCondLst>
-                <p:cond evt="onPrev" delay="0">
-                  <p:tgtEl>
-                    <p:sldTgt/>
-                  </p:tgtEl>
-                </p:cond>
-              </p:prevCondLst>
-              <p:nextCondLst>
-                <p:cond evt="onNext" delay="0">
-                  <p:tgtEl>
-                    <p:sldTgt/>
-                  </p:tgtEl>
-                </p:cond>
-              </p:nextCondLst>
-            </p:seq>
-          </p:childTnLst>
-        </p:cTn>
-      </p:par>
-    </p:tnLst>
-    <p:bldLst>
-      <p:bldP spid="3" grpId="0" uiExpand="1" build="p"/>
-    </p:bldLst>
-  </p:timing>
-</p:sld>
-</file>
-
-<file path=ppt/slides/slide63.xml><?xml version="1.0" encoding="utf-8"?>
-<p:sld xmlns:a="http://schemas.openxmlformats.org/drawingml/2006/main" xmlns:r="http://schemas.openxmlformats.org/officeDocument/2006/relationships" xmlns:p="http://schemas.openxmlformats.org/presentationml/2006/main">
-  <p:cSld>
-    <p:spTree>
-      <p:nvGrpSpPr>
-        <p:cNvPr id="1" name=""/>
-        <p:cNvGrpSpPr/>
-        <p:nvPr/>
-      </p:nvGrpSpPr>
-      <p:grpSpPr>
-        <a:xfrm>
-          <a:off x="0" y="0"/>
-          <a:ext cx="0" cy="0"/>
-          <a:chOff x="0" y="0"/>
-          <a:chExt cx="0" cy="0"/>
-        </a:xfrm>
-      </p:grpSpPr>
-      <p:sp>
-        <p:nvSpPr>
-          <p:cNvPr id="2" name="Title 1"/>
-          <p:cNvSpPr>
-            <a:spLocks noGrp="1"/>
-          </p:cNvSpPr>
-          <p:nvPr>
-            <p:ph type="title"/>
-          </p:nvPr>
-        </p:nvSpPr>
-        <p:spPr/>
-        <p:txBody>
-          <a:bodyPr/>
-          <a:lstStyle/>
-          <a:p>
-            <a:pPr marL="0" lvl="0" indent="0">
-              <a:buNone/>
-            </a:pPr>
-            <a:r>
-              <a:t>Record Linkage: Wie der Computer Titel vergleicht</a:t>
-            </a:r>
-          </a:p>
-        </p:txBody>
-      </p:sp>
-      <p:sp>
-        <p:nvSpPr>
-          <p:cNvPr id="3" name="Content Placeholder 2"/>
-          <p:cNvSpPr>
-            <a:spLocks noGrp="1"/>
-          </p:cNvSpPr>
-          <p:nvPr>
-            <p:ph idx="1"/>
-          </p:nvPr>
-        </p:nvSpPr>
-        <p:spPr/>
-        <p:txBody>
-          <a:bodyPr/>
-          <a:lstStyle/>
-          <a:p>
-            <a:pPr lvl="0"/>
-            <a:r>
-              <a:t>String-Ähnlichkeit: „the green mile” und „der green mile” teilen fast alle Buchstaben in fast derselben Reihenfolge — Ähnlichkeit fast 1</a:t>
-            </a:r>
-          </a:p>
-          <a:p>
-            <a:pPr lvl="0"/>
-            <a:r>
-              <a:t>Aber: alle 271.000 Titel paarweise vergleichen wären ~37 Milliarden Vergleiche</a:t>
-            </a:r>
-          </a:p>
-          <a:p>
-            <a:pPr lvl="0"/>
-            <a:r>
-              <a:t>Der Trick (wie bei Apriori!): vorher grob aussieben — verglichen wird nur innerhalb desselben Autors (</a:t>
-            </a:r>
-            <a:r>
-              <a:rPr b="1"/>
-              <a:t>Blocking</a:t>
-            </a:r>
-            <a:r>
-              <a:t>)</a:t>
-            </a:r>
-          </a:p>
-          <a:p>
-            <a:pPr lvl="0"/>
-            <a:r>
-              <a:t>Ergebnis: Allein bei Stephen King fallen 77 Titelvarianten zu 35 Werken zusammen — im ganzen Datensatz stecken über 40.000 Mehrfach-ISBNs</a:t>
-            </a:r>
-          </a:p>
-        </p:txBody>
-      </p:sp>
-    </p:spTree>
-  </p:cSld>
-  <p:clrMapOvr>
-    <a:masterClrMapping/>
-  </p:clrMapOvr>
-  <p:timing>
-    <p:tnLst>
-      <p:par>
-        <p:cTn id="1" dur="indefinite" restart="never" nodeType="tmRoot">
-          <p:childTnLst>
-            <p:seq concurrent="1" nextAc="seek">
-              <p:cTn id="2" dur="indefinite" nodeType="mainSeq">
-                <p:childTnLst>
-                  <p:par>
-                    <p:cTn id="3" fill="hold">
-                      <p:stCondLst>
-                        <p:cond delay="indefinite"/>
-                      </p:stCondLst>
-                      <p:childTnLst>
-                        <p:par>
-                          <p:cTn id="4" fill="hold">
-                            <p:stCondLst>
-                              <p:cond delay="0"/>
-                            </p:stCondLst>
-                            <p:childTnLst>
-                              <p:par>
-                                <p:cTn id="5" presetID="1" presetClass="entr" presetSubtype="0" fill="hold" grpId="0" nodeType="clickEffect">
-                                  <p:stCondLst>
-                                    <p:cond delay="0"/>
-                                  </p:stCondLst>
-                                  <p:childTnLst>
-                                    <p:set>
-                                      <p:cBhvr>
-                                        <p:cTn id="6" dur="1" fill="hold">
-                                          <p:stCondLst>
-                                            <p:cond delay="0"/>
-                                          </p:stCondLst>
-                                        </p:cTn>
-                                        <p:tgtEl>
-                                          <p:spTgt spid="3">
-                                            <p:txEl>
-                                              <p:pRg st="0" end="0"/>
-                                            </p:txEl>
-                                          </p:spTgt>
-                                        </p:tgtEl>
-                                        <p:attrNameLst>
-                                          <p:attrName>style.visibility</p:attrName>
-                                        </p:attrNameLst>
-                                      </p:cBhvr>
-                                      <p:to>
-                                        <p:strVal val="visible"/>
-                                      </p:to>
-                                    </p:set>
-                                  </p:childTnLst>
-                                </p:cTn>
-                              </p:par>
-                            </p:childTnLst>
-                          </p:cTn>
-                        </p:par>
-                      </p:childTnLst>
-                    </p:cTn>
-                  </p:par>
-                  <p:par>
-                    <p:cTn id="7" fill="hold">
-                      <p:stCondLst>
-                        <p:cond delay="indefinite"/>
-                      </p:stCondLst>
-                      <p:childTnLst>
-                        <p:par>
-                          <p:cTn id="8" fill="hold">
-                            <p:stCondLst>
-                              <p:cond delay="0"/>
-                            </p:stCondLst>
-                            <p:childTnLst>
-                              <p:par>
-                                <p:cTn id="9" presetID="1" presetClass="entr" presetSubtype="0" fill="hold" grpId="0" nodeType="clickEffect">
-                                  <p:stCondLst>
-                                    <p:cond delay="0"/>
-                                  </p:stCondLst>
-                                  <p:childTnLst>
-                                    <p:set>
-                                      <p:cBhvr>
-                                        <p:cTn id="10" dur="1" fill="hold">
-                                          <p:stCondLst>
-                                            <p:cond delay="0"/>
-                                          </p:stCondLst>
-                                        </p:cTn>
-                                        <p:tgtEl>
-                                          <p:spTgt spid="3">
-                                            <p:txEl>
-                                              <p:pRg st="1" end="1"/>
-                                            </p:txEl>
-                                          </p:spTgt>
-                                        </p:tgtEl>
-                                        <p:attrNameLst>
-                                          <p:attrName>style.visibility</p:attrName>
-                                        </p:attrNameLst>
-                                      </p:cBhvr>
-                                      <p:to>
-                                        <p:strVal val="visible"/>
-                                      </p:to>
-                                    </p:set>
-                                  </p:childTnLst>
-                                </p:cTn>
-                              </p:par>
-                            </p:childTnLst>
-                          </p:cTn>
-                        </p:par>
-                      </p:childTnLst>
-                    </p:cTn>
-                  </p:par>
-                  <p:par>
-                    <p:cTn id="11" fill="hold">
-                      <p:stCondLst>
-                        <p:cond delay="indefinite"/>
-                      </p:stCondLst>
-                      <p:childTnLst>
-                        <p:par>
-                          <p:cTn id="12" fill="hold">
-                            <p:stCondLst>
-                              <p:cond delay="0"/>
-                            </p:stCondLst>
-                            <p:childTnLst>
-                              <p:par>
-                                <p:cTn id="13" presetID="1" presetClass="entr" presetSubtype="0" fill="hold" grpId="0" nodeType="clickEffect">
-                                  <p:stCondLst>
-                                    <p:cond delay="0"/>
-                                  </p:stCondLst>
-                                  <p:childTnLst>
-                                    <p:set>
-                                      <p:cBhvr>
-                                        <p:cTn id="14" dur="1" fill="hold">
-                                          <p:stCondLst>
-                                            <p:cond delay="0"/>
-                                          </p:stCondLst>
-                                        </p:cTn>
-                                        <p:tgtEl>
-                                          <p:spTgt spid="3">
-                                            <p:txEl>
-                                              <p:pRg st="2" end="2"/>
-                                            </p:txEl>
-                                          </p:spTgt>
-                                        </p:tgtEl>
-                                        <p:attrNameLst>
-                                          <p:attrName>style.visibility</p:attrName>
-                                        </p:attrNameLst>
-                                      </p:cBhvr>
-                                      <p:to>
-                                        <p:strVal val="visible"/>
-                                      </p:to>
-                                    </p:set>
-                                  </p:childTnLst>
-                                </p:cTn>
-                              </p:par>
-                            </p:childTnLst>
-                          </p:cTn>
-                        </p:par>
-                      </p:childTnLst>
-                    </p:cTn>
-                  </p:par>
-                  <p:par>
-                    <p:cTn id="15" fill="hold">
-                      <p:stCondLst>
-                        <p:cond delay="indefinite"/>
-                      </p:stCondLst>
-                      <p:childTnLst>
-                        <p:par>
-                          <p:cTn id="16" fill="hold">
-                            <p:stCondLst>
-                              <p:cond delay="0"/>
-                            </p:stCondLst>
-                            <p:childTnLst>
-                              <p:par>
-                                <p:cTn id="17" presetID="1" presetClass="entr" presetSubtype="0" fill="hold" grpId="0" nodeType="clickEffect">
-                                  <p:stCondLst>
-                                    <p:cond delay="0"/>
-                                  </p:stCondLst>
-                                  <p:childTnLst>
-                                    <p:set>
-                                      <p:cBhvr>
-                                        <p:cTn id="18" dur="1" fill="hold">
-                                          <p:stCondLst>
-                                            <p:cond delay="0"/>
-                                          </p:stCondLst>
-                                        </p:cTn>
-                                        <p:tgtEl>
-                                          <p:spTgt spid="3">
-                                            <p:txEl>
-                                              <p:pRg st="3" end="3"/>
-                                            </p:txEl>
-                                          </p:spTgt>
-                                        </p:tgtEl>
-                                        <p:attrNameLst>
-                                          <p:attrName>style.visibility</p:attrName>
-                                        </p:attrNameLst>
-                                      </p:cBhvr>
-                                      <p:to>
-                                        <p:strVal val="visible"/>
-                                      </p:to>
-                                    </p:set>
-                                  </p:childTnLst>
-                                </p:cTn>
-                              </p:par>
-                            </p:childTnLst>
-                          </p:cTn>
-                        </p:par>
-                      </p:childTnLst>
-                    </p:cTn>
-                  </p:par>
-                </p:childTnLst>
-              </p:cTn>
-              <p:prevCondLst>
-                <p:cond evt="onPrev" delay="0">
-                  <p:tgtEl>
-                    <p:sldTgt/>
-                  </p:tgtEl>
-                </p:cond>
-              </p:prevCondLst>
-              <p:nextCondLst>
-                <p:cond evt="onNext" delay="0">
-                  <p:tgtEl>
-                    <p:sldTgt/>
-                  </p:tgtEl>
-                </p:cond>
-              </p:nextCondLst>
-            </p:seq>
-          </p:childTnLst>
-        </p:cTn>
-      </p:par>
-    </p:tnLst>
-    <p:bldLst>
-      <p:bldP spid="3" grpId="0" uiExpand="1" build="p"/>
-    </p:bldLst>
-  </p:timing>
-</p:sld>
-</file>
-
 <file path=ppt/slides/slide64.xml><?xml version="1.0" encoding="utf-8"?>
 <p:sld xmlns:a="http://schemas.openxmlformats.org/drawingml/2006/main" xmlns:r="http://schemas.openxmlformats.org/officeDocument/2006/relationships" xmlns:p="http://schemas.openxmlformats.org/presentationml/2006/main">
   <p:cSld>
@@ -20384,7 +20745,7 @@
               <a:buNone/>
             </a:pPr>
             <a:r>
-              <a:t>Wie würden Sie es lösen: Was stimmt hier nicht?</a:t>
+              <a:t>Wie würden Sie es lösen: Dubletten?</a:t>
             </a:r>
           </a:p>
         </p:txBody>
@@ -20406,14 +20767,14 @@
           <a:p>
             <a:pPr lvl="0"/>
             <a:r>
-              <a:t>Aufgabe: Im Datensatz stecken kaputte und unglaubwürdige Einträge — finden Sie sie</a:t>
+              <a:t>Aufgabe: „The Green Mile”, „Der Green Mile”, „The Green Mile (Signet)” — finden Sie alle Auflagen desselben Werks unter 271.000 Titeln</a:t>
             </a:r>
           </a:p>
           <a:p>
             <a:pPr lvl="0"/>
             <a:r>
               <a:rPr b="1"/>
-              <a:t>Woran würden Sie „verdächtig” festmachen? Welche Werte würden Sie sich zuerst ansehen?</a:t>
+              <a:t>Wie würden Sie das angehen — von Hand, mit Regeln, mit Normdaten? Und wie lange bräuchten Sie?</a:t>
             </a:r>
           </a:p>
         </p:txBody>
@@ -20593,7 +20954,7 @@
               <a:buNone/>
             </a:pPr>
             <a:r>
-              <a:t>Anomalieerkennung: Was fällt aus dem Rahmen?</a:t>
+              <a:t>Record Linkage: Ist das dasselbe Buch?</a:t>
             </a:r>
           </a:p>
         </p:txBody>
@@ -20615,33 +20976,33 @@
           <a:p>
             <a:pPr lvl="0"/>
             <a:r>
-              <a:t>Idee: Erst das Normale beschreiben — dann das finden, was nicht dazu passt</a:t>
+              <a:t>Idee: </a:t>
+            </a:r>
+            <a:r>
+              <a:rPr b="1"/>
+              <a:t>Einträge zusammenführen, die dasselbe Objekt beschreiben</a:t>
             </a:r>
           </a:p>
           <a:p>
             <a:pPr lvl="0"/>
             <a:r>
-              <a:t>Eine Nutzerin hat 7.550 Bücher bewertet. Das wäre </a:t>
-            </a:r>
+              <a:t>„The Green Mile”, „Der Green Mile”, „The Green Mile (Signet)” — ein Werk, drei Datensätze</a:t>
+            </a:r>
+          </a:p>
+          <a:p>
+            <a:pPr lvl="0"/>
+            <a:r>
+              <a:t>Das ist FRBR als Data-Mining-Problem: Werk vs. Manifestation</a:t>
+            </a:r>
+          </a:p>
+          <a:p>
+            <a:pPr lvl="0"/>
             <a:r>
               <a:rPr b="1"/>
-              <a:t>ein Buch pro Tag, zwanzig Jahre lang</a:t>
-            </a:r>
-          </a:p>
-          <a:p>
-            <a:pPr lvl="0"/>
-            <a:r>
-              <a:t>Plausibler: Massenimport oder Automatisierung</a:t>
-            </a:r>
-          </a:p>
-          <a:p>
-            <a:pPr lvl="0"/>
-            <a:r>
-              <a:t>Rauswerfen oder drinlassen? Beides vertretbar — aber </a:t>
-            </a:r>
-            <a:r>
-              <a:rPr b="1"/>
-              <a:t>entscheiden und dokumentieren</a:t>
+              <a:t>Hier sind Sie die Expert:innen</a:t>
+            </a:r>
+            <a:r>
+              <a:t> — Normdaten und Dublettenkontrolle sind genau das</a:t>
             </a:r>
           </a:p>
         </p:txBody>
@@ -20919,7 +21280,7 @@
               <a:buNone/>
             </a:pPr>
             <a:r>
-              <a:t>Anomalien erzählen Geschichten</a:t>
+              <a:t>Record Linkage: Wie der Computer Titel vergleicht</a:t>
             </a:r>
           </a:p>
         </p:txBody>
@@ -20941,33 +21302,32 @@
           <a:p>
             <a:pPr lvl="0"/>
             <a:r>
-              <a:rPr i="1"/>
-              <a:t>Wild Animus</a:t>
-            </a:r>
-            <a:r>
-              <a:t>: 238 Bewertungen (Spitzenwert) — Durchschnittsnote 4,1 (mit Abstand Tiefstwert)</a:t>
+              <a:t>String-Ähnlichkeit: „the green mile” und „der green mile” teilen fast alle Buchstaben in fast derselben Reihenfolge — Ähnlichkeit fast 1</a:t>
             </a:r>
           </a:p>
           <a:p>
             <a:pPr lvl="0"/>
             <a:r>
-              <a:t>Kein Datenfehler: Das Buch wurde Anfang der 2000er massenhaft verschenkt</a:t>
+              <a:t>Aber: alle 271.000 Titel paarweise vergleichen wären ~37 Milliarden Vergleiche</a:t>
             </a:r>
           </a:p>
           <a:p>
             <a:pPr lvl="0"/>
             <a:r>
-              <a:t>Im Streudiagramm Popularität × Note springt der Punkt sofort ins Auge</a:t>
+              <a:t>Der Trick (wie bei Apriori!): vorher grob aussieben — verglichen wird nur innerhalb desselben Autors (</a:t>
+            </a:r>
+            <a:r>
+              <a:rPr b="1"/>
+              <a:t>Blocking</a:t>
+            </a:r>
+            <a:r>
+              <a:t>)</a:t>
             </a:r>
           </a:p>
           <a:p>
             <a:pPr lvl="0"/>
             <a:r>
-              <a:t>Anomalien sind nicht immer Schmutz — </a:t>
-            </a:r>
-            <a:r>
-              <a:rPr b="1"/>
-              <a:t>manchmal sind sie der interessanteste Befund</a:t>
+              <a:t>Ergebnis: Allein bei Stephen King fallen 77 Titelvarianten zu 35 Werken zusammen — im ganzen Datensatz stecken über 40.000 Mehrfach-ISBNs</a:t>
             </a:r>
           </a:p>
         </p:txBody>
@@ -21245,86 +21605,7 @@
               <a:buNone/>
             </a:pPr>
             <a:r>
-              <a:t>Der Ausreißer im Bild</a:t>
-            </a:r>
-          </a:p>
-        </p:txBody>
-      </p:sp>
-      <p:pic>
-        <p:nvPicPr>
-          <p:cNvPr id="3" name="Picture 1" descr="images/popularitaet_vs_note.png"/>
-          <p:cNvPicPr>
-            <a:picLocks noGrp="1" noChangeAspect="1"/>
-          </p:cNvPicPr>
-          <p:nvPr/>
-        </p:nvPicPr>
-        <p:blipFill>
-          <a:blip r:embed="rId2"/>
-          <a:stretch>
-            <a:fillRect/>
-          </a:stretch>
-        </p:blipFill>
-        <p:spPr bwMode="auto">
-          <a:xfrm>
-            <a:off x="1346200" y="1193800"/>
-            <a:ext cx="6464300" cy="3390900"/>
-          </a:xfrm>
-          <a:prstGeom prst="rect">
-            <a:avLst/>
-          </a:prstGeom>
-          <a:noFill/>
-          <a:ln w="9525">
-            <a:noFill/>
-            <a:headEnd/>
-            <a:tailEnd/>
-          </a:ln>
-        </p:spPr>
-      </p:pic>
-    </p:spTree>
-  </p:cSld>
-  <p:clrMapOvr>
-    <a:masterClrMapping/>
-  </p:clrMapOvr>
-</p:sld>
-</file>
-
-<file path=ppt/slides/slide68.xml><?xml version="1.0" encoding="utf-8"?>
-<p:sld xmlns:a="http://schemas.openxmlformats.org/drawingml/2006/main" xmlns:r="http://schemas.openxmlformats.org/officeDocument/2006/relationships" xmlns:p="http://schemas.openxmlformats.org/presentationml/2006/main">
-  <p:cSld>
-    <p:spTree>
-      <p:nvGrpSpPr>
-        <p:cNvPr id="1" name=""/>
-        <p:cNvGrpSpPr/>
-        <p:nvPr/>
-      </p:nvGrpSpPr>
-      <p:grpSpPr>
-        <a:xfrm>
-          <a:off x="0" y="0"/>
-          <a:ext cx="0" cy="0"/>
-          <a:chOff x="0" y="0"/>
-          <a:chExt cx="0" cy="0"/>
-        </a:xfrm>
-      </p:grpSpPr>
-      <p:sp>
-        <p:nvSpPr>
-          <p:cNvPr id="2" name="Title 1"/>
-          <p:cNvSpPr>
-            <a:spLocks noGrp="1"/>
-          </p:cNvSpPr>
-          <p:nvPr>
-            <p:ph type="title"/>
-          </p:nvPr>
-        </p:nvSpPr>
-        <p:spPr/>
-        <p:txBody>
-          <a:bodyPr/>
-          <a:lstStyle/>
-          <a:p>
-            <a:pPr marL="0" lvl="0" indent="0">
-              <a:buNone/>
-            </a:pPr>
-            <a:r>
-              <a:t>Wie würden Sie es lösen: das große Ganze zeigen?</a:t>
+              <a:t>Wie würden Sie es lösen: Was stimmt hier nicht?</a:t>
             </a:r>
           </a:p>
         </p:txBody>
@@ -21346,21 +21627,14 @@
           <a:p>
             <a:pPr lvl="0"/>
             <a:r>
-              <a:t>Aufgabe: Zeigen Sie einer Kollegin </a:t>
-            </a:r>
-            <a:r>
-              <a:rPr i="1"/>
-              <a:t>auf einen Blick</a:t>
-            </a:r>
-            <a:r>
-              <a:t>, welche Bücher zusammengehören</a:t>
+              <a:t>Aufgabe: Im Datensatz stecken kaputte und unglaubwürdige Einträge — finden Sie sie</a:t>
             </a:r>
           </a:p>
           <a:p>
             <a:pPr lvl="0"/>
             <a:r>
               <a:rPr b="1"/>
-              <a:t>Wie würden Sie 400.000 Bewertungszeilen in ein einziges Bild verwandeln?</a:t>
+              <a:t>Woran würden Sie „verdächtig” festmachen? Welche Werte würden Sie sich zuerst ansehen?</a:t>
             </a:r>
           </a:p>
         </p:txBody>
@@ -21504,7 +21778,7 @@
 </p:sld>
 </file>
 
-<file path=ppt/slides/slide69.xml><?xml version="1.0" encoding="utf-8"?>
+<file path=ppt/slides/slide68.xml><?xml version="1.0" encoding="utf-8"?>
 <p:sld xmlns:a="http://schemas.openxmlformats.org/drawingml/2006/main" xmlns:r="http://schemas.openxmlformats.org/officeDocument/2006/relationships" xmlns:p="http://schemas.openxmlformats.org/presentationml/2006/main">
   <p:cSld>
     <p:spTree>
@@ -21540,7 +21814,7 @@
               <a:buNone/>
             </a:pPr>
             <a:r>
-              <a:t>Netzwerkanalyse: Die Landkarte der Bücher</a:t>
+              <a:t>Anomalieerkennung: Was fällt aus dem Rahmen?</a:t>
             </a:r>
           </a:p>
         </p:txBody>
@@ -21562,23 +21836,33 @@
           <a:p>
             <a:pPr lvl="0"/>
             <a:r>
-              <a:t>Idee: Male jedes Buch als Punkt — und verbinde zwei Punkte, wenn dieselben Menschen beide Bücher haben</a:t>
+              <a:t>Idee: Erst das Normale beschreiben — dann das finden, was nicht dazu passt</a:t>
             </a:r>
           </a:p>
           <a:p>
             <a:pPr lvl="0"/>
             <a:r>
-              <a:t>Je mehr gemeinsame Leser:innen, desto dicker die Linie</a:t>
+              <a:t>Eine Nutzerin hat 7.550 Bücher bewertet. Das wäre </a:t>
+            </a:r>
+            <a:r>
+              <a:rPr b="1"/>
+              <a:t>ein Buch pro Tag, zwanzig Jahre lang</a:t>
             </a:r>
           </a:p>
           <a:p>
             <a:pPr lvl="0"/>
             <a:r>
-              <a:t>Aus einer Tabelle mit 400.000 Zeilen wird </a:t>
+              <a:t>Plausibler: Massenimport oder Automatisierung</a:t>
+            </a:r>
+          </a:p>
+          <a:p>
+            <a:pPr lvl="0"/>
+            <a:r>
+              <a:t>Rauswerfen oder drinlassen? Beides vertretbar — aber </a:t>
             </a:r>
             <a:r>
               <a:rPr b="1"/>
-              <a:t>ein Bild</a:t>
+              <a:t>entscheiden und dokumentieren</a:t>
             </a:r>
           </a:p>
         </p:txBody>
@@ -21723,6 +22007,381 @@
                                           <p:spTgt spid="3">
                                             <p:txEl>
                                               <p:pRg st="2" end="2"/>
+                                            </p:txEl>
+                                          </p:spTgt>
+                                        </p:tgtEl>
+                                        <p:attrNameLst>
+                                          <p:attrName>style.visibility</p:attrName>
+                                        </p:attrNameLst>
+                                      </p:cBhvr>
+                                      <p:to>
+                                        <p:strVal val="visible"/>
+                                      </p:to>
+                                    </p:set>
+                                  </p:childTnLst>
+                                </p:cTn>
+                              </p:par>
+                            </p:childTnLst>
+                          </p:cTn>
+                        </p:par>
+                      </p:childTnLst>
+                    </p:cTn>
+                  </p:par>
+                  <p:par>
+                    <p:cTn id="15" fill="hold">
+                      <p:stCondLst>
+                        <p:cond delay="indefinite"/>
+                      </p:stCondLst>
+                      <p:childTnLst>
+                        <p:par>
+                          <p:cTn id="16" fill="hold">
+                            <p:stCondLst>
+                              <p:cond delay="0"/>
+                            </p:stCondLst>
+                            <p:childTnLst>
+                              <p:par>
+                                <p:cTn id="17" presetID="1" presetClass="entr" presetSubtype="0" fill="hold" grpId="0" nodeType="clickEffect">
+                                  <p:stCondLst>
+                                    <p:cond delay="0"/>
+                                  </p:stCondLst>
+                                  <p:childTnLst>
+                                    <p:set>
+                                      <p:cBhvr>
+                                        <p:cTn id="18" dur="1" fill="hold">
+                                          <p:stCondLst>
+                                            <p:cond delay="0"/>
+                                          </p:stCondLst>
+                                        </p:cTn>
+                                        <p:tgtEl>
+                                          <p:spTgt spid="3">
+                                            <p:txEl>
+                                              <p:pRg st="3" end="3"/>
+                                            </p:txEl>
+                                          </p:spTgt>
+                                        </p:tgtEl>
+                                        <p:attrNameLst>
+                                          <p:attrName>style.visibility</p:attrName>
+                                        </p:attrNameLst>
+                                      </p:cBhvr>
+                                      <p:to>
+                                        <p:strVal val="visible"/>
+                                      </p:to>
+                                    </p:set>
+                                  </p:childTnLst>
+                                </p:cTn>
+                              </p:par>
+                            </p:childTnLst>
+                          </p:cTn>
+                        </p:par>
+                      </p:childTnLst>
+                    </p:cTn>
+                  </p:par>
+                </p:childTnLst>
+              </p:cTn>
+              <p:prevCondLst>
+                <p:cond evt="onPrev" delay="0">
+                  <p:tgtEl>
+                    <p:sldTgt/>
+                  </p:tgtEl>
+                </p:cond>
+              </p:prevCondLst>
+              <p:nextCondLst>
+                <p:cond evt="onNext" delay="0">
+                  <p:tgtEl>
+                    <p:sldTgt/>
+                  </p:tgtEl>
+                </p:cond>
+              </p:nextCondLst>
+            </p:seq>
+          </p:childTnLst>
+        </p:cTn>
+      </p:par>
+    </p:tnLst>
+    <p:bldLst>
+      <p:bldP spid="3" grpId="0" uiExpand="1" build="p"/>
+    </p:bldLst>
+  </p:timing>
+</p:sld>
+</file>
+
+<file path=ppt/slides/slide69.xml><?xml version="1.0" encoding="utf-8"?>
+<p:sld xmlns:a="http://schemas.openxmlformats.org/drawingml/2006/main" xmlns:r="http://schemas.openxmlformats.org/officeDocument/2006/relationships" xmlns:p="http://schemas.openxmlformats.org/presentationml/2006/main">
+  <p:cSld>
+    <p:spTree>
+      <p:nvGrpSpPr>
+        <p:cNvPr id="1" name=""/>
+        <p:cNvGrpSpPr/>
+        <p:nvPr/>
+      </p:nvGrpSpPr>
+      <p:grpSpPr>
+        <a:xfrm>
+          <a:off x="0" y="0"/>
+          <a:ext cx="0" cy="0"/>
+          <a:chOff x="0" y="0"/>
+          <a:chExt cx="0" cy="0"/>
+        </a:xfrm>
+      </p:grpSpPr>
+      <p:sp>
+        <p:nvSpPr>
+          <p:cNvPr id="2" name="Title 1"/>
+          <p:cNvSpPr>
+            <a:spLocks noGrp="1"/>
+          </p:cNvSpPr>
+          <p:nvPr>
+            <p:ph type="title"/>
+          </p:nvPr>
+        </p:nvSpPr>
+        <p:spPr/>
+        <p:txBody>
+          <a:bodyPr/>
+          <a:lstStyle/>
+          <a:p>
+            <a:pPr marL="0" lvl="0" indent="0">
+              <a:buNone/>
+            </a:pPr>
+            <a:r>
+              <a:t>Anomalien erzählen Geschichten</a:t>
+            </a:r>
+          </a:p>
+        </p:txBody>
+      </p:sp>
+      <p:sp>
+        <p:nvSpPr>
+          <p:cNvPr id="3" name="Content Placeholder 2"/>
+          <p:cNvSpPr>
+            <a:spLocks noGrp="1"/>
+          </p:cNvSpPr>
+          <p:nvPr>
+            <p:ph idx="1"/>
+          </p:nvPr>
+        </p:nvSpPr>
+        <p:spPr/>
+        <p:txBody>
+          <a:bodyPr/>
+          <a:lstStyle/>
+          <a:p>
+            <a:pPr lvl="0"/>
+            <a:r>
+              <a:rPr i="1"/>
+              <a:t>Wild Animus</a:t>
+            </a:r>
+            <a:r>
+              <a:t>: 238 Bewertungen (Spitzenwert) — Durchschnittsnote 4,1 (mit Abstand Tiefstwert)</a:t>
+            </a:r>
+          </a:p>
+          <a:p>
+            <a:pPr lvl="0"/>
+            <a:r>
+              <a:t>Kein Datenfehler: Das Buch wurde Anfang der 2000er massenhaft verschenkt</a:t>
+            </a:r>
+          </a:p>
+          <a:p>
+            <a:pPr lvl="0"/>
+            <a:r>
+              <a:t>Im Streudiagramm Popularität × Note springt der Punkt sofort ins Auge</a:t>
+            </a:r>
+          </a:p>
+          <a:p>
+            <a:pPr lvl="0"/>
+            <a:r>
+              <a:t>Anomalien sind nicht immer Schmutz — </a:t>
+            </a:r>
+            <a:r>
+              <a:rPr b="1"/>
+              <a:t>manchmal sind sie der interessanteste Befund</a:t>
+            </a:r>
+          </a:p>
+        </p:txBody>
+      </p:sp>
+    </p:spTree>
+  </p:cSld>
+  <p:clrMapOvr>
+    <a:masterClrMapping/>
+  </p:clrMapOvr>
+  <p:timing>
+    <p:tnLst>
+      <p:par>
+        <p:cTn id="1" dur="indefinite" restart="never" nodeType="tmRoot">
+          <p:childTnLst>
+            <p:seq concurrent="1" nextAc="seek">
+              <p:cTn id="2" dur="indefinite" nodeType="mainSeq">
+                <p:childTnLst>
+                  <p:par>
+                    <p:cTn id="3" fill="hold">
+                      <p:stCondLst>
+                        <p:cond delay="indefinite"/>
+                      </p:stCondLst>
+                      <p:childTnLst>
+                        <p:par>
+                          <p:cTn id="4" fill="hold">
+                            <p:stCondLst>
+                              <p:cond delay="0"/>
+                            </p:stCondLst>
+                            <p:childTnLst>
+                              <p:par>
+                                <p:cTn id="5" presetID="1" presetClass="entr" presetSubtype="0" fill="hold" grpId="0" nodeType="clickEffect">
+                                  <p:stCondLst>
+                                    <p:cond delay="0"/>
+                                  </p:stCondLst>
+                                  <p:childTnLst>
+                                    <p:set>
+                                      <p:cBhvr>
+                                        <p:cTn id="6" dur="1" fill="hold">
+                                          <p:stCondLst>
+                                            <p:cond delay="0"/>
+                                          </p:stCondLst>
+                                        </p:cTn>
+                                        <p:tgtEl>
+                                          <p:spTgt spid="3">
+                                            <p:txEl>
+                                              <p:pRg st="0" end="0"/>
+                                            </p:txEl>
+                                          </p:spTgt>
+                                        </p:tgtEl>
+                                        <p:attrNameLst>
+                                          <p:attrName>style.visibility</p:attrName>
+                                        </p:attrNameLst>
+                                      </p:cBhvr>
+                                      <p:to>
+                                        <p:strVal val="visible"/>
+                                      </p:to>
+                                    </p:set>
+                                  </p:childTnLst>
+                                </p:cTn>
+                              </p:par>
+                            </p:childTnLst>
+                          </p:cTn>
+                        </p:par>
+                      </p:childTnLst>
+                    </p:cTn>
+                  </p:par>
+                  <p:par>
+                    <p:cTn id="7" fill="hold">
+                      <p:stCondLst>
+                        <p:cond delay="indefinite"/>
+                      </p:stCondLst>
+                      <p:childTnLst>
+                        <p:par>
+                          <p:cTn id="8" fill="hold">
+                            <p:stCondLst>
+                              <p:cond delay="0"/>
+                            </p:stCondLst>
+                            <p:childTnLst>
+                              <p:par>
+                                <p:cTn id="9" presetID="1" presetClass="entr" presetSubtype="0" fill="hold" grpId="0" nodeType="clickEffect">
+                                  <p:stCondLst>
+                                    <p:cond delay="0"/>
+                                  </p:stCondLst>
+                                  <p:childTnLst>
+                                    <p:set>
+                                      <p:cBhvr>
+                                        <p:cTn id="10" dur="1" fill="hold">
+                                          <p:stCondLst>
+                                            <p:cond delay="0"/>
+                                          </p:stCondLst>
+                                        </p:cTn>
+                                        <p:tgtEl>
+                                          <p:spTgt spid="3">
+                                            <p:txEl>
+                                              <p:pRg st="1" end="1"/>
+                                            </p:txEl>
+                                          </p:spTgt>
+                                        </p:tgtEl>
+                                        <p:attrNameLst>
+                                          <p:attrName>style.visibility</p:attrName>
+                                        </p:attrNameLst>
+                                      </p:cBhvr>
+                                      <p:to>
+                                        <p:strVal val="visible"/>
+                                      </p:to>
+                                    </p:set>
+                                  </p:childTnLst>
+                                </p:cTn>
+                              </p:par>
+                            </p:childTnLst>
+                          </p:cTn>
+                        </p:par>
+                      </p:childTnLst>
+                    </p:cTn>
+                  </p:par>
+                  <p:par>
+                    <p:cTn id="11" fill="hold">
+                      <p:stCondLst>
+                        <p:cond delay="indefinite"/>
+                      </p:stCondLst>
+                      <p:childTnLst>
+                        <p:par>
+                          <p:cTn id="12" fill="hold">
+                            <p:stCondLst>
+                              <p:cond delay="0"/>
+                            </p:stCondLst>
+                            <p:childTnLst>
+                              <p:par>
+                                <p:cTn id="13" presetID="1" presetClass="entr" presetSubtype="0" fill="hold" grpId="0" nodeType="clickEffect">
+                                  <p:stCondLst>
+                                    <p:cond delay="0"/>
+                                  </p:stCondLst>
+                                  <p:childTnLst>
+                                    <p:set>
+                                      <p:cBhvr>
+                                        <p:cTn id="14" dur="1" fill="hold">
+                                          <p:stCondLst>
+                                            <p:cond delay="0"/>
+                                          </p:stCondLst>
+                                        </p:cTn>
+                                        <p:tgtEl>
+                                          <p:spTgt spid="3">
+                                            <p:txEl>
+                                              <p:pRg st="2" end="2"/>
+                                            </p:txEl>
+                                          </p:spTgt>
+                                        </p:tgtEl>
+                                        <p:attrNameLst>
+                                          <p:attrName>style.visibility</p:attrName>
+                                        </p:attrNameLst>
+                                      </p:cBhvr>
+                                      <p:to>
+                                        <p:strVal val="visible"/>
+                                      </p:to>
+                                    </p:set>
+                                  </p:childTnLst>
+                                </p:cTn>
+                              </p:par>
+                            </p:childTnLst>
+                          </p:cTn>
+                        </p:par>
+                      </p:childTnLst>
+                    </p:cTn>
+                  </p:par>
+                  <p:par>
+                    <p:cTn id="15" fill="hold">
+                      <p:stCondLst>
+                        <p:cond delay="indefinite"/>
+                      </p:stCondLst>
+                      <p:childTnLst>
+                        <p:par>
+                          <p:cTn id="16" fill="hold">
+                            <p:stCondLst>
+                              <p:cond delay="0"/>
+                            </p:stCondLst>
+                            <p:childTnLst>
+                              <p:par>
+                                <p:cTn id="17" presetID="1" presetClass="entr" presetSubtype="0" fill="hold" grpId="0" nodeType="clickEffect">
+                                  <p:stCondLst>
+                                    <p:cond delay="0"/>
+                                  </p:stCondLst>
+                                  <p:childTnLst>
+                                    <p:set>
+                                      <p:cBhvr>
+                                        <p:cTn id="18" dur="1" fill="hold">
+                                          <p:stCondLst>
+                                            <p:cond delay="0"/>
+                                          </p:stCondLst>
+                                        </p:cTn>
+                                        <p:tgtEl>
+                                          <p:spTgt spid="3">
+                                            <p:txEl>
+                                              <p:pRg st="3" end="3"/>
                                             </p:txEl>
                                           </p:spTgt>
                                         </p:tgtEl>
@@ -22259,6 +22918,568 @@
               <a:buNone/>
             </a:pPr>
             <a:r>
+              <a:t>Der Ausreißer im Bild</a:t>
+            </a:r>
+          </a:p>
+        </p:txBody>
+      </p:sp>
+      <p:pic>
+        <p:nvPicPr>
+          <p:cNvPr id="3" name="Picture 1" descr="images/popularitaet_vs_note.png"/>
+          <p:cNvPicPr>
+            <a:picLocks noGrp="1" noChangeAspect="1"/>
+          </p:cNvPicPr>
+          <p:nvPr/>
+        </p:nvPicPr>
+        <p:blipFill>
+          <a:blip r:embed="rId2"/>
+          <a:stretch>
+            <a:fillRect/>
+          </a:stretch>
+        </p:blipFill>
+        <p:spPr bwMode="auto">
+          <a:xfrm>
+            <a:off x="1346200" y="1193800"/>
+            <a:ext cx="6464300" cy="3390900"/>
+          </a:xfrm>
+          <a:prstGeom prst="rect">
+            <a:avLst/>
+          </a:prstGeom>
+          <a:noFill/>
+          <a:ln w="9525">
+            <a:noFill/>
+            <a:headEnd/>
+            <a:tailEnd/>
+          </a:ln>
+        </p:spPr>
+      </p:pic>
+    </p:spTree>
+  </p:cSld>
+  <p:clrMapOvr>
+    <a:masterClrMapping/>
+  </p:clrMapOvr>
+</p:sld>
+</file>
+
+<file path=ppt/slides/slide71.xml><?xml version="1.0" encoding="utf-8"?>
+<p:sld xmlns:a="http://schemas.openxmlformats.org/drawingml/2006/main" xmlns:r="http://schemas.openxmlformats.org/officeDocument/2006/relationships" xmlns:p="http://schemas.openxmlformats.org/presentationml/2006/main">
+  <p:cSld>
+    <p:spTree>
+      <p:nvGrpSpPr>
+        <p:cNvPr id="1" name=""/>
+        <p:cNvGrpSpPr/>
+        <p:nvPr/>
+      </p:nvGrpSpPr>
+      <p:grpSpPr>
+        <a:xfrm>
+          <a:off x="0" y="0"/>
+          <a:ext cx="0" cy="0"/>
+          <a:chOff x="0" y="0"/>
+          <a:chExt cx="0" cy="0"/>
+        </a:xfrm>
+      </p:grpSpPr>
+      <p:sp>
+        <p:nvSpPr>
+          <p:cNvPr id="2" name="Title 1"/>
+          <p:cNvSpPr>
+            <a:spLocks noGrp="1"/>
+          </p:cNvSpPr>
+          <p:nvPr>
+            <p:ph type="title"/>
+          </p:nvPr>
+        </p:nvSpPr>
+        <p:spPr/>
+        <p:txBody>
+          <a:bodyPr/>
+          <a:lstStyle/>
+          <a:p>
+            <a:pPr marL="0" lvl="0" indent="0">
+              <a:buNone/>
+            </a:pPr>
+            <a:r>
+              <a:t>Wie würden Sie es lösen: das große Ganze zeigen?</a:t>
+            </a:r>
+          </a:p>
+        </p:txBody>
+      </p:sp>
+      <p:sp>
+        <p:nvSpPr>
+          <p:cNvPr id="3" name="Content Placeholder 2"/>
+          <p:cNvSpPr>
+            <a:spLocks noGrp="1"/>
+          </p:cNvSpPr>
+          <p:nvPr>
+            <p:ph idx="1"/>
+          </p:nvPr>
+        </p:nvSpPr>
+        <p:spPr/>
+        <p:txBody>
+          <a:bodyPr/>
+          <a:lstStyle/>
+          <a:p>
+            <a:pPr lvl="0"/>
+            <a:r>
+              <a:t>Aufgabe: Zeigen Sie einer Kollegin </a:t>
+            </a:r>
+            <a:r>
+              <a:rPr i="1"/>
+              <a:t>auf einen Blick</a:t>
+            </a:r>
+            <a:r>
+              <a:t>, welche Bücher zusammengehören</a:t>
+            </a:r>
+          </a:p>
+          <a:p>
+            <a:pPr lvl="0"/>
+            <a:r>
+              <a:rPr b="1"/>
+              <a:t>Wie würden Sie 400.000 Bewertungszeilen in ein einziges Bild verwandeln?</a:t>
+            </a:r>
+          </a:p>
+        </p:txBody>
+      </p:sp>
+    </p:spTree>
+  </p:cSld>
+  <p:clrMapOvr>
+    <a:masterClrMapping/>
+  </p:clrMapOvr>
+  <p:timing>
+    <p:tnLst>
+      <p:par>
+        <p:cTn id="1" dur="indefinite" restart="never" nodeType="tmRoot">
+          <p:childTnLst>
+            <p:seq concurrent="1" nextAc="seek">
+              <p:cTn id="2" dur="indefinite" nodeType="mainSeq">
+                <p:childTnLst>
+                  <p:par>
+                    <p:cTn id="3" fill="hold">
+                      <p:stCondLst>
+                        <p:cond delay="indefinite"/>
+                      </p:stCondLst>
+                      <p:childTnLst>
+                        <p:par>
+                          <p:cTn id="4" fill="hold">
+                            <p:stCondLst>
+                              <p:cond delay="0"/>
+                            </p:stCondLst>
+                            <p:childTnLst>
+                              <p:par>
+                                <p:cTn id="5" presetID="1" presetClass="entr" presetSubtype="0" fill="hold" grpId="0" nodeType="clickEffect">
+                                  <p:stCondLst>
+                                    <p:cond delay="0"/>
+                                  </p:stCondLst>
+                                  <p:childTnLst>
+                                    <p:set>
+                                      <p:cBhvr>
+                                        <p:cTn id="6" dur="1" fill="hold">
+                                          <p:stCondLst>
+                                            <p:cond delay="0"/>
+                                          </p:stCondLst>
+                                        </p:cTn>
+                                        <p:tgtEl>
+                                          <p:spTgt spid="3">
+                                            <p:txEl>
+                                              <p:pRg st="0" end="0"/>
+                                            </p:txEl>
+                                          </p:spTgt>
+                                        </p:tgtEl>
+                                        <p:attrNameLst>
+                                          <p:attrName>style.visibility</p:attrName>
+                                        </p:attrNameLst>
+                                      </p:cBhvr>
+                                      <p:to>
+                                        <p:strVal val="visible"/>
+                                      </p:to>
+                                    </p:set>
+                                  </p:childTnLst>
+                                </p:cTn>
+                              </p:par>
+                            </p:childTnLst>
+                          </p:cTn>
+                        </p:par>
+                      </p:childTnLst>
+                    </p:cTn>
+                  </p:par>
+                  <p:par>
+                    <p:cTn id="7" fill="hold">
+                      <p:stCondLst>
+                        <p:cond delay="indefinite"/>
+                      </p:stCondLst>
+                      <p:childTnLst>
+                        <p:par>
+                          <p:cTn id="8" fill="hold">
+                            <p:stCondLst>
+                              <p:cond delay="0"/>
+                            </p:stCondLst>
+                            <p:childTnLst>
+                              <p:par>
+                                <p:cTn id="9" presetID="1" presetClass="entr" presetSubtype="0" fill="hold" grpId="0" nodeType="clickEffect">
+                                  <p:stCondLst>
+                                    <p:cond delay="0"/>
+                                  </p:stCondLst>
+                                  <p:childTnLst>
+                                    <p:set>
+                                      <p:cBhvr>
+                                        <p:cTn id="10" dur="1" fill="hold">
+                                          <p:stCondLst>
+                                            <p:cond delay="0"/>
+                                          </p:stCondLst>
+                                        </p:cTn>
+                                        <p:tgtEl>
+                                          <p:spTgt spid="3">
+                                            <p:txEl>
+                                              <p:pRg st="1" end="1"/>
+                                            </p:txEl>
+                                          </p:spTgt>
+                                        </p:tgtEl>
+                                        <p:attrNameLst>
+                                          <p:attrName>style.visibility</p:attrName>
+                                        </p:attrNameLst>
+                                      </p:cBhvr>
+                                      <p:to>
+                                        <p:strVal val="visible"/>
+                                      </p:to>
+                                    </p:set>
+                                  </p:childTnLst>
+                                </p:cTn>
+                              </p:par>
+                            </p:childTnLst>
+                          </p:cTn>
+                        </p:par>
+                      </p:childTnLst>
+                    </p:cTn>
+                  </p:par>
+                </p:childTnLst>
+              </p:cTn>
+              <p:prevCondLst>
+                <p:cond evt="onPrev" delay="0">
+                  <p:tgtEl>
+                    <p:sldTgt/>
+                  </p:tgtEl>
+                </p:cond>
+              </p:prevCondLst>
+              <p:nextCondLst>
+                <p:cond evt="onNext" delay="0">
+                  <p:tgtEl>
+                    <p:sldTgt/>
+                  </p:tgtEl>
+                </p:cond>
+              </p:nextCondLst>
+            </p:seq>
+          </p:childTnLst>
+        </p:cTn>
+      </p:par>
+    </p:tnLst>
+    <p:bldLst>
+      <p:bldP spid="3" grpId="0" uiExpand="1" build="p"/>
+    </p:bldLst>
+  </p:timing>
+</p:sld>
+</file>
+
+<file path=ppt/slides/slide72.xml><?xml version="1.0" encoding="utf-8"?>
+<p:sld xmlns:a="http://schemas.openxmlformats.org/drawingml/2006/main" xmlns:r="http://schemas.openxmlformats.org/officeDocument/2006/relationships" xmlns:p="http://schemas.openxmlformats.org/presentationml/2006/main">
+  <p:cSld>
+    <p:spTree>
+      <p:nvGrpSpPr>
+        <p:cNvPr id="1" name=""/>
+        <p:cNvGrpSpPr/>
+        <p:nvPr/>
+      </p:nvGrpSpPr>
+      <p:grpSpPr>
+        <a:xfrm>
+          <a:off x="0" y="0"/>
+          <a:ext cx="0" cy="0"/>
+          <a:chOff x="0" y="0"/>
+          <a:chExt cx="0" cy="0"/>
+        </a:xfrm>
+      </p:grpSpPr>
+      <p:sp>
+        <p:nvSpPr>
+          <p:cNvPr id="2" name="Title 1"/>
+          <p:cNvSpPr>
+            <a:spLocks noGrp="1"/>
+          </p:cNvSpPr>
+          <p:nvPr>
+            <p:ph type="title"/>
+          </p:nvPr>
+        </p:nvSpPr>
+        <p:spPr/>
+        <p:txBody>
+          <a:bodyPr/>
+          <a:lstStyle/>
+          <a:p>
+            <a:pPr marL="0" lvl="0" indent="0">
+              <a:buNone/>
+            </a:pPr>
+            <a:r>
+              <a:t>Netzwerkanalyse: Die Landkarte der Bücher</a:t>
+            </a:r>
+          </a:p>
+        </p:txBody>
+      </p:sp>
+      <p:sp>
+        <p:nvSpPr>
+          <p:cNvPr id="3" name="Content Placeholder 2"/>
+          <p:cNvSpPr>
+            <a:spLocks noGrp="1"/>
+          </p:cNvSpPr>
+          <p:nvPr>
+            <p:ph idx="1"/>
+          </p:nvPr>
+        </p:nvSpPr>
+        <p:spPr/>
+        <p:txBody>
+          <a:bodyPr/>
+          <a:lstStyle/>
+          <a:p>
+            <a:pPr lvl="0"/>
+            <a:r>
+              <a:t>Idee: Male jedes Buch als Punkt — und verbinde zwei Punkte, wenn dieselben Menschen beide Bücher haben</a:t>
+            </a:r>
+          </a:p>
+          <a:p>
+            <a:pPr lvl="0"/>
+            <a:r>
+              <a:t>Je mehr gemeinsame Leser:innen, desto dicker die Linie</a:t>
+            </a:r>
+          </a:p>
+          <a:p>
+            <a:pPr lvl="0"/>
+            <a:r>
+              <a:t>Aus einer Tabelle mit 400.000 Zeilen wird </a:t>
+            </a:r>
+            <a:r>
+              <a:rPr b="1"/>
+              <a:t>ein Bild</a:t>
+            </a:r>
+          </a:p>
+        </p:txBody>
+      </p:sp>
+    </p:spTree>
+  </p:cSld>
+  <p:clrMapOvr>
+    <a:masterClrMapping/>
+  </p:clrMapOvr>
+  <p:timing>
+    <p:tnLst>
+      <p:par>
+        <p:cTn id="1" dur="indefinite" restart="never" nodeType="tmRoot">
+          <p:childTnLst>
+            <p:seq concurrent="1" nextAc="seek">
+              <p:cTn id="2" dur="indefinite" nodeType="mainSeq">
+                <p:childTnLst>
+                  <p:par>
+                    <p:cTn id="3" fill="hold">
+                      <p:stCondLst>
+                        <p:cond delay="indefinite"/>
+                      </p:stCondLst>
+                      <p:childTnLst>
+                        <p:par>
+                          <p:cTn id="4" fill="hold">
+                            <p:stCondLst>
+                              <p:cond delay="0"/>
+                            </p:stCondLst>
+                            <p:childTnLst>
+                              <p:par>
+                                <p:cTn id="5" presetID="1" presetClass="entr" presetSubtype="0" fill="hold" grpId="0" nodeType="clickEffect">
+                                  <p:stCondLst>
+                                    <p:cond delay="0"/>
+                                  </p:stCondLst>
+                                  <p:childTnLst>
+                                    <p:set>
+                                      <p:cBhvr>
+                                        <p:cTn id="6" dur="1" fill="hold">
+                                          <p:stCondLst>
+                                            <p:cond delay="0"/>
+                                          </p:stCondLst>
+                                        </p:cTn>
+                                        <p:tgtEl>
+                                          <p:spTgt spid="3">
+                                            <p:txEl>
+                                              <p:pRg st="0" end="0"/>
+                                            </p:txEl>
+                                          </p:spTgt>
+                                        </p:tgtEl>
+                                        <p:attrNameLst>
+                                          <p:attrName>style.visibility</p:attrName>
+                                        </p:attrNameLst>
+                                      </p:cBhvr>
+                                      <p:to>
+                                        <p:strVal val="visible"/>
+                                      </p:to>
+                                    </p:set>
+                                  </p:childTnLst>
+                                </p:cTn>
+                              </p:par>
+                            </p:childTnLst>
+                          </p:cTn>
+                        </p:par>
+                      </p:childTnLst>
+                    </p:cTn>
+                  </p:par>
+                  <p:par>
+                    <p:cTn id="7" fill="hold">
+                      <p:stCondLst>
+                        <p:cond delay="indefinite"/>
+                      </p:stCondLst>
+                      <p:childTnLst>
+                        <p:par>
+                          <p:cTn id="8" fill="hold">
+                            <p:stCondLst>
+                              <p:cond delay="0"/>
+                            </p:stCondLst>
+                            <p:childTnLst>
+                              <p:par>
+                                <p:cTn id="9" presetID="1" presetClass="entr" presetSubtype="0" fill="hold" grpId="0" nodeType="clickEffect">
+                                  <p:stCondLst>
+                                    <p:cond delay="0"/>
+                                  </p:stCondLst>
+                                  <p:childTnLst>
+                                    <p:set>
+                                      <p:cBhvr>
+                                        <p:cTn id="10" dur="1" fill="hold">
+                                          <p:stCondLst>
+                                            <p:cond delay="0"/>
+                                          </p:stCondLst>
+                                        </p:cTn>
+                                        <p:tgtEl>
+                                          <p:spTgt spid="3">
+                                            <p:txEl>
+                                              <p:pRg st="1" end="1"/>
+                                            </p:txEl>
+                                          </p:spTgt>
+                                        </p:tgtEl>
+                                        <p:attrNameLst>
+                                          <p:attrName>style.visibility</p:attrName>
+                                        </p:attrNameLst>
+                                      </p:cBhvr>
+                                      <p:to>
+                                        <p:strVal val="visible"/>
+                                      </p:to>
+                                    </p:set>
+                                  </p:childTnLst>
+                                </p:cTn>
+                              </p:par>
+                            </p:childTnLst>
+                          </p:cTn>
+                        </p:par>
+                      </p:childTnLst>
+                    </p:cTn>
+                  </p:par>
+                  <p:par>
+                    <p:cTn id="11" fill="hold">
+                      <p:stCondLst>
+                        <p:cond delay="indefinite"/>
+                      </p:stCondLst>
+                      <p:childTnLst>
+                        <p:par>
+                          <p:cTn id="12" fill="hold">
+                            <p:stCondLst>
+                              <p:cond delay="0"/>
+                            </p:stCondLst>
+                            <p:childTnLst>
+                              <p:par>
+                                <p:cTn id="13" presetID="1" presetClass="entr" presetSubtype="0" fill="hold" grpId="0" nodeType="clickEffect">
+                                  <p:stCondLst>
+                                    <p:cond delay="0"/>
+                                  </p:stCondLst>
+                                  <p:childTnLst>
+                                    <p:set>
+                                      <p:cBhvr>
+                                        <p:cTn id="14" dur="1" fill="hold">
+                                          <p:stCondLst>
+                                            <p:cond delay="0"/>
+                                          </p:stCondLst>
+                                        </p:cTn>
+                                        <p:tgtEl>
+                                          <p:spTgt spid="3">
+                                            <p:txEl>
+                                              <p:pRg st="2" end="2"/>
+                                            </p:txEl>
+                                          </p:spTgt>
+                                        </p:tgtEl>
+                                        <p:attrNameLst>
+                                          <p:attrName>style.visibility</p:attrName>
+                                        </p:attrNameLst>
+                                      </p:cBhvr>
+                                      <p:to>
+                                        <p:strVal val="visible"/>
+                                      </p:to>
+                                    </p:set>
+                                  </p:childTnLst>
+                                </p:cTn>
+                              </p:par>
+                            </p:childTnLst>
+                          </p:cTn>
+                        </p:par>
+                      </p:childTnLst>
+                    </p:cTn>
+                  </p:par>
+                </p:childTnLst>
+              </p:cTn>
+              <p:prevCondLst>
+                <p:cond evt="onPrev" delay="0">
+                  <p:tgtEl>
+                    <p:sldTgt/>
+                  </p:tgtEl>
+                </p:cond>
+              </p:prevCondLst>
+              <p:nextCondLst>
+                <p:cond evt="onNext" delay="0">
+                  <p:tgtEl>
+                    <p:sldTgt/>
+                  </p:tgtEl>
+                </p:cond>
+              </p:nextCondLst>
+            </p:seq>
+          </p:childTnLst>
+        </p:cTn>
+      </p:par>
+    </p:tnLst>
+    <p:bldLst>
+      <p:bldP spid="3" grpId="0" uiExpand="1" build="p"/>
+    </p:bldLst>
+  </p:timing>
+</p:sld>
+</file>
+
+<file path=ppt/slides/slide73.xml><?xml version="1.0" encoding="utf-8"?>
+<p:sld xmlns:a="http://schemas.openxmlformats.org/drawingml/2006/main" xmlns:r="http://schemas.openxmlformats.org/officeDocument/2006/relationships" xmlns:p="http://schemas.openxmlformats.org/presentationml/2006/main">
+  <p:cSld>
+    <p:spTree>
+      <p:nvGrpSpPr>
+        <p:cNvPr id="1" name=""/>
+        <p:cNvGrpSpPr/>
+        <p:nvPr/>
+      </p:nvGrpSpPr>
+      <p:grpSpPr>
+        <a:xfrm>
+          <a:off x="0" y="0"/>
+          <a:ext cx="0" cy="0"/>
+          <a:chOff x="0" y="0"/>
+          <a:chExt cx="0" cy="0"/>
+        </a:xfrm>
+      </p:grpSpPr>
+      <p:sp>
+        <p:nvSpPr>
+          <p:cNvPr id="2" name="Title 1"/>
+          <p:cNvSpPr>
+            <a:spLocks noGrp="1"/>
+          </p:cNvSpPr>
+          <p:nvPr>
+            <p:ph type="title"/>
+          </p:nvPr>
+        </p:nvSpPr>
+        <p:spPr/>
+        <p:txBody>
+          <a:bodyPr/>
+          <a:lstStyle/>
+          <a:p>
+            <a:pPr marL="0" lvl="0" indent="0">
+              <a:buNone/>
+            </a:pPr>
+            <a:r>
               <a:t>Die Karte</a:t>
             </a:r>
           </a:p>
@@ -22302,7 +23523,7 @@
 </p:sld>
 </file>
 
-<file path=ppt/slides/slide71.xml><?xml version="1.0" encoding="utf-8"?>
+<file path=ppt/slides/slide74.xml><?xml version="1.0" encoding="utf-8"?>
 <p:sld xmlns:a="http://schemas.openxmlformats.org/drawingml/2006/main" xmlns:r="http://schemas.openxmlformats.org/officeDocument/2006/relationships" xmlns:p="http://schemas.openxmlformats.org/presentationml/2006/main">
   <p:cSld>
     <p:spTree>
@@ -22624,7 +23845,7 @@
 </p:sld>
 </file>
 
-<file path=ppt/slides/slide72.xml><?xml version="1.0" encoding="utf-8"?>
+<file path=ppt/slides/slide75.xml><?xml version="1.0" encoding="utf-8"?>
 <p:sld xmlns:a="http://schemas.openxmlformats.org/drawingml/2006/main" xmlns:r="http://schemas.openxmlformats.org/officeDocument/2006/relationships" xmlns:p="http://schemas.openxmlformats.org/presentationml/2006/main">
   <p:cSld>
     <p:spTree>
@@ -22677,7 +23898,7 @@
         </p:nvGraphicFramePr>
         <p:xfrm>
           <a:off x="457200" y="1193800"/>
-          <a:ext cx="8229600" cy="2377440"/>
+          <a:ext cx="8229600" cy="3390900"/>
         </p:xfrm>
         <a:graphic>
           <a:graphicData uri="http://schemas.openxmlformats.org/drawingml/2006/table">
@@ -23016,7 +24237,7 @@
 </p:sld>
 </file>
 
-<file path=ppt/slides/slide73.xml><?xml version="1.0" encoding="utf-8"?>
+<file path=ppt/slides/slide76.xml><?xml version="1.0" encoding="utf-8"?>
 <p:sld xmlns:a="http://schemas.openxmlformats.org/drawingml/2006/main" xmlns:r="http://schemas.openxmlformats.org/officeDocument/2006/relationships" xmlns:p="http://schemas.openxmlformats.org/presentationml/2006/main">
   <p:cSld>
     <p:spTree>
@@ -23092,8 +24313,7 @@
           <a:p>
             <a:pPr lvl="0"/>
             <a:r>
-              <a:rPr b="1"/>
-              <a:t>Wollen Bibliotheken Filterblasen — oder ist Serendipität ein Bibliothekswert?</a:t>
+              <a:t>Filterblasen oder Serendipität?</a:t>
             </a:r>
           </a:p>
           <a:p>
@@ -23391,7 +24611,7 @@
 </p:sld>
 </file>
 
-<file path=ppt/slides/slide74.xml><?xml version="1.0" encoding="utf-8"?>
+<file path=ppt/slides/slide77.xml><?xml version="1.0" encoding="utf-8"?>
 <p:sld xmlns:a="http://schemas.openxmlformats.org/drawingml/2006/main" xmlns:r="http://schemas.openxmlformats.org/officeDocument/2006/relationships" xmlns:p="http://schemas.openxmlformats.org/presentationml/2006/main">
   <p:cSld>
     <p:spTree>
@@ -23654,7 +24874,7 @@
 </p:sld>
 </file>
 
-<file path=ppt/slides/slide75.xml><?xml version="1.0" encoding="utf-8"?>
+<file path=ppt/slides/slide78.xml><?xml version="1.0" encoding="utf-8"?>
 <p:sld xmlns:a="http://schemas.openxmlformats.org/drawingml/2006/main" xmlns:r="http://schemas.openxmlformats.org/officeDocument/2006/relationships" xmlns:p="http://schemas.openxmlformats.org/presentationml/2006/main">
   <p:cSld>
     <p:spTree>
@@ -23703,7 +24923,7 @@
 </p:sld>
 </file>
 
-<file path=ppt/slides/slide76.xml><?xml version="1.0" encoding="utf-8"?>
+<file path=ppt/slides/slide79.xml><?xml version="1.0" encoding="utf-8"?>
 <p:sld xmlns:a="http://schemas.openxmlformats.org/drawingml/2006/main" xmlns:r="http://schemas.openxmlformats.org/officeDocument/2006/relationships" xmlns:p="http://schemas.openxmlformats.org/presentationml/2006/main">
   <p:cSld>
     <p:spTree>
